--- a/omarsaab_portfolio.pptx
+++ b/omarsaab_portfolio.pptx
@@ -5,29 +5,34 @@
     <p:sldMasterId id="2147483648" r:id="rId1"/>
   </p:sldMasterIdLst>
   <p:notesMasterIdLst>
-    <p:notesMasterId r:id="rId16"/>
+    <p:notesMasterId r:id="rId21"/>
   </p:notesMasterIdLst>
   <p:sldIdLst>
     <p:sldId id="256" r:id="rId2"/>
     <p:sldId id="257" r:id="rId3"/>
     <p:sldId id="258" r:id="rId4"/>
     <p:sldId id="259" r:id="rId5"/>
-    <p:sldId id="260" r:id="rId6"/>
-    <p:sldId id="261" r:id="rId7"/>
-    <p:sldId id="262" r:id="rId8"/>
-    <p:sldId id="269" r:id="rId9"/>
-    <p:sldId id="263" r:id="rId10"/>
-    <p:sldId id="264" r:id="rId11"/>
-    <p:sldId id="265" r:id="rId12"/>
-    <p:sldId id="266" r:id="rId13"/>
-    <p:sldId id="267" r:id="rId14"/>
-    <p:sldId id="268" r:id="rId15"/>
+    <p:sldId id="261" r:id="rId6"/>
+    <p:sldId id="260" r:id="rId7"/>
+    <p:sldId id="274" r:id="rId8"/>
+    <p:sldId id="262" r:id="rId9"/>
+    <p:sldId id="269" r:id="rId10"/>
+    <p:sldId id="263" r:id="rId11"/>
+    <p:sldId id="264" r:id="rId12"/>
+    <p:sldId id="265" r:id="rId13"/>
+    <p:sldId id="271" r:id="rId14"/>
+    <p:sldId id="273" r:id="rId15"/>
+    <p:sldId id="266" r:id="rId16"/>
+    <p:sldId id="272" r:id="rId17"/>
+    <p:sldId id="275" r:id="rId18"/>
+    <p:sldId id="267" r:id="rId19"/>
+    <p:sldId id="268" r:id="rId20"/>
   </p:sldIdLst>
   <p:sldSz cx="12192000" cy="6858000"/>
   <p:notesSz cx="6858000" cy="12192000"/>
   <p:defaultTextStyle>
-    <a:lvl1pPr marL="0" algn="l" defTabSz="914400" rtl="0" eaLnBrk="1" latinLnBrk="0" hangingPunct="1">
-      <a:defRPr sz="1800" kern="1200">
+    <a:lvl1pPr marL="0" algn="l" defTabSz="914332" rtl="0" eaLnBrk="1" latinLnBrk="0" hangingPunct="1">
+      <a:defRPr sz="1900" kern="1200">
         <a:solidFill>
           <a:schemeClr val="tx1"/>
         </a:solidFill>
@@ -36,8 +41,8 @@
         <a:cs typeface="+mn-cs"/>
       </a:defRPr>
     </a:lvl1pPr>
-    <a:lvl2pPr marL="457200" algn="l" defTabSz="914400" rtl="0" eaLnBrk="1" latinLnBrk="0" hangingPunct="1">
-      <a:defRPr sz="1800" kern="1200">
+    <a:lvl2pPr marL="457167" algn="l" defTabSz="914332" rtl="0" eaLnBrk="1" latinLnBrk="0" hangingPunct="1">
+      <a:defRPr sz="1900" kern="1200">
         <a:solidFill>
           <a:schemeClr val="tx1"/>
         </a:solidFill>
@@ -46,8 +51,8 @@
         <a:cs typeface="+mn-cs"/>
       </a:defRPr>
     </a:lvl2pPr>
-    <a:lvl3pPr marL="914400" algn="l" defTabSz="914400" rtl="0" eaLnBrk="1" latinLnBrk="0" hangingPunct="1">
-      <a:defRPr sz="1800" kern="1200">
+    <a:lvl3pPr marL="914332" algn="l" defTabSz="914332" rtl="0" eaLnBrk="1" latinLnBrk="0" hangingPunct="1">
+      <a:defRPr sz="1900" kern="1200">
         <a:solidFill>
           <a:schemeClr val="tx1"/>
         </a:solidFill>
@@ -56,8 +61,8 @@
         <a:cs typeface="+mn-cs"/>
       </a:defRPr>
     </a:lvl3pPr>
-    <a:lvl4pPr marL="1371600" algn="l" defTabSz="914400" rtl="0" eaLnBrk="1" latinLnBrk="0" hangingPunct="1">
-      <a:defRPr sz="1800" kern="1200">
+    <a:lvl4pPr marL="1371498" algn="l" defTabSz="914332" rtl="0" eaLnBrk="1" latinLnBrk="0" hangingPunct="1">
+      <a:defRPr sz="1900" kern="1200">
         <a:solidFill>
           <a:schemeClr val="tx1"/>
         </a:solidFill>
@@ -66,8 +71,8 @@
         <a:cs typeface="+mn-cs"/>
       </a:defRPr>
     </a:lvl4pPr>
-    <a:lvl5pPr marL="1828800" algn="l" defTabSz="914400" rtl="0" eaLnBrk="1" latinLnBrk="0" hangingPunct="1">
-      <a:defRPr sz="1800" kern="1200">
+    <a:lvl5pPr marL="1828664" algn="l" defTabSz="914332" rtl="0" eaLnBrk="1" latinLnBrk="0" hangingPunct="1">
+      <a:defRPr sz="1900" kern="1200">
         <a:solidFill>
           <a:schemeClr val="tx1"/>
         </a:solidFill>
@@ -76,8 +81,8 @@
         <a:cs typeface="+mn-cs"/>
       </a:defRPr>
     </a:lvl5pPr>
-    <a:lvl6pPr marL="2286000" algn="l" defTabSz="914400" rtl="0" eaLnBrk="1" latinLnBrk="0" hangingPunct="1">
-      <a:defRPr sz="1800" kern="1200">
+    <a:lvl6pPr marL="2285830" algn="l" defTabSz="914332" rtl="0" eaLnBrk="1" latinLnBrk="0" hangingPunct="1">
+      <a:defRPr sz="1900" kern="1200">
         <a:solidFill>
           <a:schemeClr val="tx1"/>
         </a:solidFill>
@@ -86,8 +91,8 @@
         <a:cs typeface="+mn-cs"/>
       </a:defRPr>
     </a:lvl6pPr>
-    <a:lvl7pPr marL="2743200" algn="l" defTabSz="914400" rtl="0" eaLnBrk="1" latinLnBrk="0" hangingPunct="1">
-      <a:defRPr sz="1800" kern="1200">
+    <a:lvl7pPr marL="2742994" algn="l" defTabSz="914332" rtl="0" eaLnBrk="1" latinLnBrk="0" hangingPunct="1">
+      <a:defRPr sz="1900" kern="1200">
         <a:solidFill>
           <a:schemeClr val="tx1"/>
         </a:solidFill>
@@ -96,8 +101,8 @@
         <a:cs typeface="+mn-cs"/>
       </a:defRPr>
     </a:lvl7pPr>
-    <a:lvl8pPr marL="3200400" algn="l" defTabSz="914400" rtl="0" eaLnBrk="1" latinLnBrk="0" hangingPunct="1">
-      <a:defRPr sz="1800" kern="1200">
+    <a:lvl8pPr marL="3200160" algn="l" defTabSz="914332" rtl="0" eaLnBrk="1" latinLnBrk="0" hangingPunct="1">
+      <a:defRPr sz="1900" kern="1200">
         <a:solidFill>
           <a:schemeClr val="tx1"/>
         </a:solidFill>
@@ -106,8 +111,8 @@
         <a:cs typeface="+mn-cs"/>
       </a:defRPr>
     </a:lvl8pPr>
-    <a:lvl9pPr marL="3657600" algn="l" defTabSz="914400" rtl="0" eaLnBrk="1" latinLnBrk="0" hangingPunct="1">
-      <a:defRPr sz="1800" kern="1200">
+    <a:lvl9pPr marL="3657327" algn="l" defTabSz="914332" rtl="0" eaLnBrk="1" latinLnBrk="0" hangingPunct="1">
+      <a:defRPr sz="1900" kern="1200">
         <a:solidFill>
           <a:schemeClr val="tx1"/>
         </a:solidFill>
@@ -119,7 +124,18 @@
   </p:defaultTextStyle>
   <p:extLst>
     <p:ext uri="{EFAFB233-063F-42B5-8137-9DF3F51BA10A}">
-      <p15:sldGuideLst xmlns:p15="http://schemas.microsoft.com/office/powerpoint/2012/main"/>
+      <p15:sldGuideLst xmlns:p15="http://schemas.microsoft.com/office/powerpoint/2012/main">
+        <p15:guide id="1" orient="horz" pos="2160">
+          <p15:clr>
+            <a:srgbClr val="A4A3A4"/>
+          </p15:clr>
+        </p15:guide>
+        <p15:guide id="2" pos="3840">
+          <p15:clr>
+            <a:srgbClr val="A4A3A4"/>
+          </p15:clr>
+        </p15:guide>
+      </p15:sldGuideLst>
     </p:ext>
   </p:extLst>
 </p:presentation>
@@ -156,7 +172,7 @@
   </p:cSld>
   <p:clrMap bg1="lt1" tx1="dk1" bg2="lt2" tx2="dk2" accent1="accent1" accent2="accent2" accent3="accent3" accent4="accent4" accent5="accent5" accent6="accent6" hlink="hlink" folHlink="folHlink"/>
   <p:notesStyle>
-    <a:lvl1pPr marL="0" algn="l" defTabSz="914400" rtl="0" eaLnBrk="1" latinLnBrk="0" hangingPunct="1">
+    <a:lvl1pPr marL="0" algn="l" defTabSz="914332" rtl="0" eaLnBrk="1" latinLnBrk="0" hangingPunct="1">
       <a:defRPr sz="1200" kern="1200">
         <a:solidFill>
           <a:schemeClr val="tx1"/>
@@ -166,7 +182,7 @@
         <a:cs typeface="+mn-cs"/>
       </a:defRPr>
     </a:lvl1pPr>
-    <a:lvl2pPr marL="457200" algn="l" defTabSz="914400" rtl="0" eaLnBrk="1" latinLnBrk="0" hangingPunct="1">
+    <a:lvl2pPr marL="457167" algn="l" defTabSz="914332" rtl="0" eaLnBrk="1" latinLnBrk="0" hangingPunct="1">
       <a:defRPr sz="1200" kern="1200">
         <a:solidFill>
           <a:schemeClr val="tx1"/>
@@ -176,7 +192,7 @@
         <a:cs typeface="+mn-cs"/>
       </a:defRPr>
     </a:lvl2pPr>
-    <a:lvl3pPr marL="914400" algn="l" defTabSz="914400" rtl="0" eaLnBrk="1" latinLnBrk="0" hangingPunct="1">
+    <a:lvl3pPr marL="914332" algn="l" defTabSz="914332" rtl="0" eaLnBrk="1" latinLnBrk="0" hangingPunct="1">
       <a:defRPr sz="1200" kern="1200">
         <a:solidFill>
           <a:schemeClr val="tx1"/>
@@ -186,7 +202,7 @@
         <a:cs typeface="+mn-cs"/>
       </a:defRPr>
     </a:lvl3pPr>
-    <a:lvl4pPr marL="1371600" algn="l" defTabSz="914400" rtl="0" eaLnBrk="1" latinLnBrk="0" hangingPunct="1">
+    <a:lvl4pPr marL="1371498" algn="l" defTabSz="914332" rtl="0" eaLnBrk="1" latinLnBrk="0" hangingPunct="1">
       <a:defRPr sz="1200" kern="1200">
         <a:solidFill>
           <a:schemeClr val="tx1"/>
@@ -196,7 +212,7 @@
         <a:cs typeface="+mn-cs"/>
       </a:defRPr>
     </a:lvl4pPr>
-    <a:lvl5pPr marL="1828800" algn="l" defTabSz="914400" rtl="0" eaLnBrk="1" latinLnBrk="0" hangingPunct="1">
+    <a:lvl5pPr marL="1828664" algn="l" defTabSz="914332" rtl="0" eaLnBrk="1" latinLnBrk="0" hangingPunct="1">
       <a:defRPr sz="1200" kern="1200">
         <a:solidFill>
           <a:schemeClr val="tx1"/>
@@ -206,7 +222,7 @@
         <a:cs typeface="+mn-cs"/>
       </a:defRPr>
     </a:lvl5pPr>
-    <a:lvl6pPr marL="2286000" algn="l" defTabSz="914400" rtl="0" eaLnBrk="1" latinLnBrk="0" hangingPunct="1">
+    <a:lvl6pPr marL="2285830" algn="l" defTabSz="914332" rtl="0" eaLnBrk="1" latinLnBrk="0" hangingPunct="1">
       <a:defRPr sz="1200" kern="1200">
         <a:solidFill>
           <a:schemeClr val="tx1"/>
@@ -216,7 +232,7 @@
         <a:cs typeface="+mn-cs"/>
       </a:defRPr>
     </a:lvl6pPr>
-    <a:lvl7pPr marL="2743200" algn="l" defTabSz="914400" rtl="0" eaLnBrk="1" latinLnBrk="0" hangingPunct="1">
+    <a:lvl7pPr marL="2742994" algn="l" defTabSz="914332" rtl="0" eaLnBrk="1" latinLnBrk="0" hangingPunct="1">
       <a:defRPr sz="1200" kern="1200">
         <a:solidFill>
           <a:schemeClr val="tx1"/>
@@ -226,7 +242,7 @@
         <a:cs typeface="+mn-cs"/>
       </a:defRPr>
     </a:lvl7pPr>
-    <a:lvl8pPr marL="3200400" algn="l" defTabSz="914400" rtl="0" eaLnBrk="1" latinLnBrk="0" hangingPunct="1">
+    <a:lvl8pPr marL="3200160" algn="l" defTabSz="914332" rtl="0" eaLnBrk="1" latinLnBrk="0" hangingPunct="1">
       <a:defRPr sz="1200" kern="1200">
         <a:solidFill>
           <a:schemeClr val="tx1"/>
@@ -236,7 +252,7 @@
         <a:cs typeface="+mn-cs"/>
       </a:defRPr>
     </a:lvl8pPr>
-    <a:lvl9pPr marL="3657600" algn="l" defTabSz="914400" rtl="0" eaLnBrk="1" latinLnBrk="0" hangingPunct="1">
+    <a:lvl9pPr marL="3657327" algn="l" defTabSz="914332" rtl="0" eaLnBrk="1" latinLnBrk="0" hangingPunct="1">
       <a:defRPr sz="1200" kern="1200">
         <a:solidFill>
           <a:schemeClr val="tx1"/>
@@ -322,6 +338,7 @@
           <a:p>
             <a:fld id="{F7021451-1387-4CA6-816F-3879F97B5CBC}" type="slidenum">
               <a:rPr lang="en-US"/>
+              <a:pPr/>
               <a:t>1</a:t>
             </a:fld>
             <a:endParaRPr lang="en-US"/>
@@ -388,7 +405,9 @@
             <a:r>
               <a:rPr lang="en-US" dirty="0"/>
               <a:t>[Sources]
-- Divider styling inspired by the user-provided deck "Trupti_Product+Growth_CPGO.pptx".</a:t>
+- Mentoring and cross-functional evidence from CV: turn6search1.
+- Industry breadth from portfolio categories on https://omarsaab.net/ (turn3view0 L52-L55, L56-L265).
+- Education and languages from CV: turn6search1.</a:t>
             </a:r>
           </a:p>
         </p:txBody>
@@ -410,6 +429,7 @@
           <a:p>
             <a:fld id="{F7021451-1387-4CA6-816F-3879F97B5CBC}" type="slidenum">
               <a:rPr lang="en-US"/>
+              <a:pPr/>
               <a:t>10</a:t>
             </a:fld>
             <a:endParaRPr lang="en-US"/>
@@ -476,7 +496,7 @@
             <a:r>
               <a:rPr lang="en-US" dirty="0"/>
               <a:t>[Sources]
-- Operating model is a strategic synthesis created for this deck based on the user request and Omar Saab's end-to-end delivery background documented in turn6search1 and turn3view0 L15-L18.</a:t>
+- Divider styling inspired by the user-provided deck "Trupti_Product+Growth_CPGO.pptx".</a:t>
             </a:r>
           </a:p>
         </p:txBody>
@@ -498,6 +518,7 @@
           <a:p>
             <a:fld id="{F7021451-1387-4CA6-816F-3879F97B5CBC}" type="slidenum">
               <a:rPr lang="en-US"/>
+              <a:pPr/>
               <a:t>11</a:t>
             </a:fld>
             <a:endParaRPr lang="en-US"/>
@@ -564,8 +585,7 @@
             <a:r>
               <a:rPr lang="en-US" dirty="0"/>
               <a:t>[Sources]
-- Metrics, mentoring, experience, education, and languages sourced from CV: https://omarsaab.net/omarsaab_cv.pdf (turn6search1).
-- Industry breadth sourced from https://omarsaab.net/ (turn3view0 L52-L55, L56-L265).</a:t>
+- Operating model is a strategic synthesis created for this deck based on the user request and Omar Saab's end-to-end delivery background documented in turn6search1 and turn3view0 L15-L18.</a:t>
             </a:r>
           </a:p>
         </p:txBody>
@@ -587,6 +607,7 @@
           <a:p>
             <a:fld id="{F7021451-1387-4CA6-816F-3879F97B5CBC}" type="slidenum">
               <a:rPr lang="en-US"/>
+              <a:pPr/>
               <a:t>12</a:t>
             </a:fld>
             <a:endParaRPr lang="en-US"/>
@@ -611,7 +632,13 @@
   <p:cSld>
     <p:spTree>
       <p:nvGrpSpPr>
-        <p:cNvPr id="1" name=""/>
+        <p:cNvPr id="1" name="">
+          <a:extLst>
+            <a:ext uri="{FF2B5EF4-FFF2-40B4-BE49-F238E27FC236}">
+              <a16:creationId xmlns:a16="http://schemas.microsoft.com/office/drawing/2014/main" id="{B47C0488-7882-AC6B-5311-7EEC60FA8EB6}"/>
+            </a:ext>
+          </a:extLst>
+        </p:cNvPr>
         <p:cNvGrpSpPr/>
         <p:nvPr/>
       </p:nvGrpSpPr>
@@ -625,7 +652,13 @@
       </p:grpSpPr>
       <p:sp>
         <p:nvSpPr>
-          <p:cNvPr id="2" name="Slide Image Placeholder 1"/>
+          <p:cNvPr id="2" name="Slide Image Placeholder 1">
+            <a:extLst>
+              <a:ext uri="{FF2B5EF4-FFF2-40B4-BE49-F238E27FC236}">
+                <a16:creationId xmlns:a16="http://schemas.microsoft.com/office/drawing/2014/main" id="{90C08BA8-CDE3-B3B7-744C-1C1CF3B0EB0E}"/>
+              </a:ext>
+            </a:extLst>
+          </p:cNvPr>
           <p:cNvSpPr>
             <a:spLocks noGrp="1" noRot="1" noChangeAspect="1"/>
           </p:cNvSpPr>
@@ -637,7 +670,13 @@
       </p:sp>
       <p:sp>
         <p:nvSpPr>
-          <p:cNvPr id="3" name="Notes Placeholder 2"/>
+          <p:cNvPr id="3" name="Notes Placeholder 2">
+            <a:extLst>
+              <a:ext uri="{FF2B5EF4-FFF2-40B4-BE49-F238E27FC236}">
+                <a16:creationId xmlns:a16="http://schemas.microsoft.com/office/drawing/2014/main" id="{CDCC826E-B066-2416-DDD7-1E6282986B58}"/>
+              </a:ext>
+            </a:extLst>
+          </p:cNvPr>
           <p:cNvSpPr>
             <a:spLocks noGrp="1"/>
           </p:cNvSpPr>
@@ -653,15 +692,20 @@
             <a:r>
               <a:rPr lang="en-US" dirty="0"/>
               <a:t>[Sources]
-- Contact details from https://omarsaab.net/ (turn3view0 L2-L10).
-- Headshot image on this slide sourced from The Org profile for Omar Saab at Born Interactive: https://theorg.com/org/born-interactive/org-chart/omar-saab (turn14image1).</a:t>
-            </a:r>
-          </a:p>
-        </p:txBody>
-      </p:sp>
-      <p:sp>
-        <p:nvSpPr>
-          <p:cNvPr id="4" name="Slide Number Placeholder 3"/>
+- Divider styling inspired by the user-provided deck "Trupti_Product+Growth_CPGO.pptx".</a:t>
+            </a:r>
+          </a:p>
+        </p:txBody>
+      </p:sp>
+      <p:sp>
+        <p:nvSpPr>
+          <p:cNvPr id="4" name="Slide Number Placeholder 3">
+            <a:extLst>
+              <a:ext uri="{FF2B5EF4-FFF2-40B4-BE49-F238E27FC236}">
+                <a16:creationId xmlns:a16="http://schemas.microsoft.com/office/drawing/2014/main" id="{EDA41C47-D59E-5DA6-B8A0-5837D05AB43A}"/>
+              </a:ext>
+            </a:extLst>
+          </p:cNvPr>
           <p:cNvSpPr>
             <a:spLocks noGrp="1"/>
           </p:cNvSpPr>
@@ -676,7 +720,8 @@
           <a:p>
             <a:fld id="{F7021451-1387-4CA6-816F-3879F97B5CBC}" type="slidenum">
               <a:rPr lang="en-US"/>
-              <a:t>13</a:t>
+              <a:pPr/>
+              <a:t>14</a:t>
             </a:fld>
             <a:endParaRPr lang="en-US"/>
           </a:p>
@@ -685,7 +730,7 @@
     </p:spTree>
     <p:extLst>
       <p:ext uri="{BB962C8B-B14F-4D97-AF65-F5344CB8AC3E}">
-        <p14:creationId xmlns:p14="http://schemas.microsoft.com/office/powerpoint/2010/main" val="1024086991"/>
+        <p14:creationId xmlns:p14="http://schemas.microsoft.com/office/powerpoint/2010/main" val="2824952987"/>
       </p:ext>
     </p:extLst>
   </p:cSld>
@@ -742,7 +787,8 @@
             <a:r>
               <a:rPr lang="en-US" dirty="0"/>
               <a:t>[Sources]
-- Contact details from https://omarsaab.net/ (turn3view0 L2-L10).</a:t>
+- Metrics, mentoring, experience, education, and languages sourced from CV: https://omarsaab.net/omarsaab_cv.pdf (turn6search1).
+- Industry breadth sourced from https://omarsaab.net/ (turn3view0 L52-L55, L56-L265).</a:t>
             </a:r>
           </a:p>
         </p:txBody>
@@ -764,7 +810,300 @@
           <a:p>
             <a:fld id="{F7021451-1387-4CA6-816F-3879F97B5CBC}" type="slidenum">
               <a:rPr lang="en-US"/>
-              <a:t>14</a:t>
+              <a:pPr/>
+              <a:t>15</a:t>
+            </a:fld>
+            <a:endParaRPr lang="en-US"/>
+          </a:p>
+        </p:txBody>
+      </p:sp>
+    </p:spTree>
+    <p:extLst>
+      <p:ext uri="{BB962C8B-B14F-4D97-AF65-F5344CB8AC3E}">
+        <p14:creationId xmlns:p14="http://schemas.microsoft.com/office/powerpoint/2010/main" val="1024086991"/>
+      </p:ext>
+    </p:extLst>
+  </p:cSld>
+  <p:clrMapOvr>
+    <a:masterClrMapping/>
+  </p:clrMapOvr>
+</p:notes>
+</file>
+
+<file path=ppt/notesSlides/notesSlide15.xml><?xml version="1.0" encoding="utf-8"?>
+<p:notes xmlns:a="http://schemas.openxmlformats.org/drawingml/2006/main" xmlns:r="http://schemas.openxmlformats.org/officeDocument/2006/relationships" xmlns:p="http://schemas.openxmlformats.org/presentationml/2006/main">
+  <p:cSld>
+    <p:spTree>
+      <p:nvGrpSpPr>
+        <p:cNvPr id="1" name="">
+          <a:extLst>
+            <a:ext uri="{FF2B5EF4-FFF2-40B4-BE49-F238E27FC236}">
+              <a16:creationId xmlns:a16="http://schemas.microsoft.com/office/drawing/2014/main" id="{EA28FE07-3E4B-7A6E-9C46-5E974EA9C636}"/>
+            </a:ext>
+          </a:extLst>
+        </p:cNvPr>
+        <p:cNvGrpSpPr/>
+        <p:nvPr/>
+      </p:nvGrpSpPr>
+      <p:grpSpPr>
+        <a:xfrm>
+          <a:off x="0" y="0"/>
+          <a:ext cx="0" cy="0"/>
+          <a:chOff x="0" y="0"/>
+          <a:chExt cx="0" cy="0"/>
+        </a:xfrm>
+      </p:grpSpPr>
+      <p:sp>
+        <p:nvSpPr>
+          <p:cNvPr id="2" name="Slide Image Placeholder 1">
+            <a:extLst>
+              <a:ext uri="{FF2B5EF4-FFF2-40B4-BE49-F238E27FC236}">
+                <a16:creationId xmlns:a16="http://schemas.microsoft.com/office/drawing/2014/main" id="{A1286F19-D0CC-CA0E-1926-0DF3D0F877DB}"/>
+              </a:ext>
+            </a:extLst>
+          </p:cNvPr>
+          <p:cNvSpPr>
+            <a:spLocks noGrp="1" noRot="1" noChangeAspect="1"/>
+          </p:cNvSpPr>
+          <p:nvPr>
+            <p:ph type="sldImg"/>
+          </p:nvPr>
+        </p:nvSpPr>
+        <p:spPr/>
+      </p:sp>
+      <p:sp>
+        <p:nvSpPr>
+          <p:cNvPr id="3" name="Notes Placeholder 2">
+            <a:extLst>
+              <a:ext uri="{FF2B5EF4-FFF2-40B4-BE49-F238E27FC236}">
+                <a16:creationId xmlns:a16="http://schemas.microsoft.com/office/drawing/2014/main" id="{0AB5B4DF-1F35-DB41-11A6-0FF01E51A4B1}"/>
+              </a:ext>
+            </a:extLst>
+          </p:cNvPr>
+          <p:cNvSpPr>
+            <a:spLocks noGrp="1"/>
+          </p:cNvSpPr>
+          <p:nvPr>
+            <p:ph type="body" idx="1"/>
+          </p:nvPr>
+        </p:nvSpPr>
+        <p:spPr/>
+        <p:txBody>
+          <a:bodyPr/>
+          <a:lstStyle/>
+          <a:p>
+            <a:r>
+              <a:rPr lang="en-US" dirty="0"/>
+              <a:t>[Sources]
+- Divider styling inspired by the user-provided deck "Trupti_Product+Growth_CPGO.pptx".</a:t>
+            </a:r>
+          </a:p>
+        </p:txBody>
+      </p:sp>
+      <p:sp>
+        <p:nvSpPr>
+          <p:cNvPr id="4" name="Slide Number Placeholder 3">
+            <a:extLst>
+              <a:ext uri="{FF2B5EF4-FFF2-40B4-BE49-F238E27FC236}">
+                <a16:creationId xmlns:a16="http://schemas.microsoft.com/office/drawing/2014/main" id="{F76F452E-0269-B3FD-93AD-AD2C8F01E0F6}"/>
+              </a:ext>
+            </a:extLst>
+          </p:cNvPr>
+          <p:cNvSpPr>
+            <a:spLocks noGrp="1"/>
+          </p:cNvSpPr>
+          <p:nvPr>
+            <p:ph type="sldNum" sz="quarter" idx="10"/>
+          </p:nvPr>
+        </p:nvSpPr>
+        <p:spPr/>
+        <p:txBody>
+          <a:bodyPr/>
+          <a:lstStyle/>
+          <a:p>
+            <a:fld id="{F7021451-1387-4CA6-816F-3879F97B5CBC}" type="slidenum">
+              <a:rPr lang="en-US"/>
+              <a:pPr/>
+              <a:t>17</a:t>
+            </a:fld>
+            <a:endParaRPr lang="en-US"/>
+          </a:p>
+        </p:txBody>
+      </p:sp>
+    </p:spTree>
+    <p:extLst>
+      <p:ext uri="{BB962C8B-B14F-4D97-AF65-F5344CB8AC3E}">
+        <p14:creationId xmlns:p14="http://schemas.microsoft.com/office/powerpoint/2010/main" val="690960204"/>
+      </p:ext>
+    </p:extLst>
+  </p:cSld>
+  <p:clrMapOvr>
+    <a:masterClrMapping/>
+  </p:clrMapOvr>
+</p:notes>
+</file>
+
+<file path=ppt/notesSlides/notesSlide16.xml><?xml version="1.0" encoding="utf-8"?>
+<p:notes xmlns:a="http://schemas.openxmlformats.org/drawingml/2006/main" xmlns:r="http://schemas.openxmlformats.org/officeDocument/2006/relationships" xmlns:p="http://schemas.openxmlformats.org/presentationml/2006/main">
+  <p:cSld>
+    <p:spTree>
+      <p:nvGrpSpPr>
+        <p:cNvPr id="1" name=""/>
+        <p:cNvGrpSpPr/>
+        <p:nvPr/>
+      </p:nvGrpSpPr>
+      <p:grpSpPr>
+        <a:xfrm>
+          <a:off x="0" y="0"/>
+          <a:ext cx="0" cy="0"/>
+          <a:chOff x="0" y="0"/>
+          <a:chExt cx="0" cy="0"/>
+        </a:xfrm>
+      </p:grpSpPr>
+      <p:sp>
+        <p:nvSpPr>
+          <p:cNvPr id="2" name="Slide Image Placeholder 1"/>
+          <p:cNvSpPr>
+            <a:spLocks noGrp="1" noRot="1" noChangeAspect="1"/>
+          </p:cNvSpPr>
+          <p:nvPr>
+            <p:ph type="sldImg"/>
+          </p:nvPr>
+        </p:nvSpPr>
+        <p:spPr/>
+      </p:sp>
+      <p:sp>
+        <p:nvSpPr>
+          <p:cNvPr id="3" name="Notes Placeholder 2"/>
+          <p:cNvSpPr>
+            <a:spLocks noGrp="1"/>
+          </p:cNvSpPr>
+          <p:nvPr>
+            <p:ph type="body" idx="1"/>
+          </p:nvPr>
+        </p:nvSpPr>
+        <p:spPr/>
+        <p:txBody>
+          <a:bodyPr/>
+          <a:lstStyle/>
+          <a:p>
+            <a:r>
+              <a:rPr lang="en-US" dirty="0"/>
+              <a:t>[Sources]
+- Contact details from https://omarsaab.net/ (turn3view0 L2-L10).
+- Headshot image on this slide sourced from The Org profile for Omar Saab at Born Interactive: https://theorg.com/org/born-interactive/org-chart/omar-saab (turn14image1).</a:t>
+            </a:r>
+          </a:p>
+        </p:txBody>
+      </p:sp>
+      <p:sp>
+        <p:nvSpPr>
+          <p:cNvPr id="4" name="Slide Number Placeholder 3"/>
+          <p:cNvSpPr>
+            <a:spLocks noGrp="1"/>
+          </p:cNvSpPr>
+          <p:nvPr>
+            <p:ph type="sldNum" sz="quarter" idx="10"/>
+          </p:nvPr>
+        </p:nvSpPr>
+        <p:spPr/>
+        <p:txBody>
+          <a:bodyPr/>
+          <a:lstStyle/>
+          <a:p>
+            <a:fld id="{F7021451-1387-4CA6-816F-3879F97B5CBC}" type="slidenum">
+              <a:rPr lang="en-US"/>
+              <a:pPr/>
+              <a:t>18</a:t>
+            </a:fld>
+            <a:endParaRPr lang="en-US"/>
+          </a:p>
+        </p:txBody>
+      </p:sp>
+    </p:spTree>
+    <p:extLst>
+      <p:ext uri="{BB962C8B-B14F-4D97-AF65-F5344CB8AC3E}">
+        <p14:creationId xmlns:p14="http://schemas.microsoft.com/office/powerpoint/2010/main" val="1024086991"/>
+      </p:ext>
+    </p:extLst>
+  </p:cSld>
+  <p:clrMapOvr>
+    <a:masterClrMapping/>
+  </p:clrMapOvr>
+</p:notes>
+</file>
+
+<file path=ppt/notesSlides/notesSlide17.xml><?xml version="1.0" encoding="utf-8"?>
+<p:notes xmlns:a="http://schemas.openxmlformats.org/drawingml/2006/main" xmlns:r="http://schemas.openxmlformats.org/officeDocument/2006/relationships" xmlns:p="http://schemas.openxmlformats.org/presentationml/2006/main">
+  <p:cSld>
+    <p:spTree>
+      <p:nvGrpSpPr>
+        <p:cNvPr id="1" name=""/>
+        <p:cNvGrpSpPr/>
+        <p:nvPr/>
+      </p:nvGrpSpPr>
+      <p:grpSpPr>
+        <a:xfrm>
+          <a:off x="0" y="0"/>
+          <a:ext cx="0" cy="0"/>
+          <a:chOff x="0" y="0"/>
+          <a:chExt cx="0" cy="0"/>
+        </a:xfrm>
+      </p:grpSpPr>
+      <p:sp>
+        <p:nvSpPr>
+          <p:cNvPr id="2" name="Slide Image Placeholder 1"/>
+          <p:cNvSpPr>
+            <a:spLocks noGrp="1" noRot="1" noChangeAspect="1"/>
+          </p:cNvSpPr>
+          <p:nvPr>
+            <p:ph type="sldImg"/>
+          </p:nvPr>
+        </p:nvSpPr>
+        <p:spPr/>
+      </p:sp>
+      <p:sp>
+        <p:nvSpPr>
+          <p:cNvPr id="3" name="Notes Placeholder 2"/>
+          <p:cNvSpPr>
+            <a:spLocks noGrp="1"/>
+          </p:cNvSpPr>
+          <p:nvPr>
+            <p:ph type="body" idx="1"/>
+          </p:nvPr>
+        </p:nvSpPr>
+        <p:spPr/>
+        <p:txBody>
+          <a:bodyPr/>
+          <a:lstStyle/>
+          <a:p>
+            <a:r>
+              <a:rPr lang="en-US" dirty="0"/>
+              <a:t>[Sources]
+- Contact details from https://omarsaab.net/ (turn3view0 L2-L10).</a:t>
+            </a:r>
+          </a:p>
+        </p:txBody>
+      </p:sp>
+      <p:sp>
+        <p:nvSpPr>
+          <p:cNvPr id="4" name="Slide Number Placeholder 3"/>
+          <p:cNvSpPr>
+            <a:spLocks noGrp="1"/>
+          </p:cNvSpPr>
+          <p:nvPr>
+            <p:ph type="sldNum" sz="quarter" idx="10"/>
+          </p:nvPr>
+        </p:nvSpPr>
+        <p:spPr/>
+        <p:txBody>
+          <a:bodyPr/>
+          <a:lstStyle/>
+          <a:p>
+            <a:fld id="{F7021451-1387-4CA6-816F-3879F97B5CBC}" type="slidenum">
+              <a:rPr lang="en-US"/>
+              <a:pPr/>
+              <a:t>19</a:t>
             </a:fld>
             <a:endParaRPr lang="en-US"/>
           </a:p>
@@ -852,6 +1191,7 @@
           <a:p>
             <a:fld id="{F7021451-1387-4CA6-816F-3879F97B5CBC}" type="slidenum">
               <a:rPr lang="en-US"/>
+              <a:pPr/>
               <a:t>2</a:t>
             </a:fld>
             <a:endParaRPr lang="en-US"/>
@@ -940,6 +1280,7 @@
           <a:p>
             <a:fld id="{F7021451-1387-4CA6-816F-3879F97B5CBC}" type="slidenum">
               <a:rPr lang="en-US"/>
+              <a:pPr/>
               <a:t>3</a:t>
             </a:fld>
             <a:endParaRPr lang="en-US"/>
@@ -1029,6 +1370,7 @@
           <a:p>
             <a:fld id="{F7021451-1387-4CA6-816F-3879F97B5CBC}" type="slidenum">
               <a:rPr lang="en-US"/>
+              <a:pPr/>
               <a:t>4</a:t>
             </a:fld>
             <a:endParaRPr lang="en-US"/>
@@ -1095,8 +1437,7 @@
             <a:r>
               <a:rPr lang="en-US" dirty="0"/>
               <a:t>[Sources]
-- User requested a deck that showcases CTO suitability rather than specific projects.
-- Positioning supported by Omar Saab profile summary and cross-functional delivery evidence: turn3view0 L15-L18; turn6search1.</a:t>
+- Divider styling inspired by the user-provided deck "Trupti_Product+Growth_CPGO.pptx".</a:t>
             </a:r>
           </a:p>
         </p:txBody>
@@ -1118,6 +1459,7 @@
           <a:p>
             <a:fld id="{F7021451-1387-4CA6-816F-3879F97B5CBC}" type="slidenum">
               <a:rPr lang="en-US"/>
+              <a:pPr/>
               <a:t>5</a:t>
             </a:fld>
             <a:endParaRPr lang="en-US"/>
@@ -1184,7 +1526,8 @@
             <a:r>
               <a:rPr lang="en-US" dirty="0"/>
               <a:t>[Sources]
-- Divider styling inspired by the user-provided deck "Trupti_Product+Growth_CPGO.pptx".</a:t>
+- User requested a deck that showcases CTO suitability rather than specific projects.
+- Positioning supported by Omar Saab profile summary and cross-functional delivery evidence: turn3view0 L15-L18; turn6search1.</a:t>
             </a:r>
           </a:p>
         </p:txBody>
@@ -1206,6 +1549,7 @@
           <a:p>
             <a:fld id="{F7021451-1387-4CA6-816F-3879F97B5CBC}" type="slidenum">
               <a:rPr lang="en-US"/>
+              <a:pPr/>
               <a:t>6</a:t>
             </a:fld>
             <a:endParaRPr lang="en-US"/>
@@ -1230,6 +1574,119 @@
   <p:cSld>
     <p:spTree>
       <p:nvGrpSpPr>
+        <p:cNvPr id="1" name="">
+          <a:extLst>
+            <a:ext uri="{FF2B5EF4-FFF2-40B4-BE49-F238E27FC236}">
+              <a16:creationId xmlns:a16="http://schemas.microsoft.com/office/drawing/2014/main" id="{8EF10F3E-30E6-664B-DF7F-D4B12104579B}"/>
+            </a:ext>
+          </a:extLst>
+        </p:cNvPr>
+        <p:cNvGrpSpPr/>
+        <p:nvPr/>
+      </p:nvGrpSpPr>
+      <p:grpSpPr>
+        <a:xfrm>
+          <a:off x="0" y="0"/>
+          <a:ext cx="0" cy="0"/>
+          <a:chOff x="0" y="0"/>
+          <a:chExt cx="0" cy="0"/>
+        </a:xfrm>
+      </p:grpSpPr>
+      <p:sp>
+        <p:nvSpPr>
+          <p:cNvPr id="2" name="Slide Image Placeholder 1">
+            <a:extLst>
+              <a:ext uri="{FF2B5EF4-FFF2-40B4-BE49-F238E27FC236}">
+                <a16:creationId xmlns:a16="http://schemas.microsoft.com/office/drawing/2014/main" id="{012C657F-C049-3684-3C36-59B1F9E04726}"/>
+              </a:ext>
+            </a:extLst>
+          </p:cNvPr>
+          <p:cNvSpPr>
+            <a:spLocks noGrp="1" noRot="1" noChangeAspect="1"/>
+          </p:cNvSpPr>
+          <p:nvPr>
+            <p:ph type="sldImg"/>
+          </p:nvPr>
+        </p:nvSpPr>
+        <p:spPr/>
+      </p:sp>
+      <p:sp>
+        <p:nvSpPr>
+          <p:cNvPr id="3" name="Notes Placeholder 2">
+            <a:extLst>
+              <a:ext uri="{FF2B5EF4-FFF2-40B4-BE49-F238E27FC236}">
+                <a16:creationId xmlns:a16="http://schemas.microsoft.com/office/drawing/2014/main" id="{262A09EB-E8BC-7F00-AAC7-42CD32DC3A25}"/>
+              </a:ext>
+            </a:extLst>
+          </p:cNvPr>
+          <p:cNvSpPr>
+            <a:spLocks noGrp="1"/>
+          </p:cNvSpPr>
+          <p:nvPr>
+            <p:ph type="body" idx="1"/>
+          </p:nvPr>
+        </p:nvSpPr>
+        <p:spPr/>
+        <p:txBody>
+          <a:bodyPr/>
+          <a:lstStyle/>
+          <a:p>
+            <a:r>
+              <a:rPr lang="en-US" dirty="0"/>
+              <a:t>[Sources]
+- Divider styling inspired by the user-provided deck "Trupti_Product+Growth_CPGO.pptx".</a:t>
+            </a:r>
+          </a:p>
+        </p:txBody>
+      </p:sp>
+      <p:sp>
+        <p:nvSpPr>
+          <p:cNvPr id="4" name="Slide Number Placeholder 3">
+            <a:extLst>
+              <a:ext uri="{FF2B5EF4-FFF2-40B4-BE49-F238E27FC236}">
+                <a16:creationId xmlns:a16="http://schemas.microsoft.com/office/drawing/2014/main" id="{45F20BF7-33F7-0B0E-62DA-6AE4DCCBBE2D}"/>
+              </a:ext>
+            </a:extLst>
+          </p:cNvPr>
+          <p:cNvSpPr>
+            <a:spLocks noGrp="1"/>
+          </p:cNvSpPr>
+          <p:nvPr>
+            <p:ph type="sldNum" sz="quarter" idx="10"/>
+          </p:nvPr>
+        </p:nvSpPr>
+        <p:spPr/>
+        <p:txBody>
+          <a:bodyPr/>
+          <a:lstStyle/>
+          <a:p>
+            <a:fld id="{F7021451-1387-4CA6-816F-3879F97B5CBC}" type="slidenum">
+              <a:rPr lang="en-US"/>
+              <a:pPr/>
+              <a:t>7</a:t>
+            </a:fld>
+            <a:endParaRPr lang="en-US"/>
+          </a:p>
+        </p:txBody>
+      </p:sp>
+    </p:spTree>
+    <p:extLst>
+      <p:ext uri="{BB962C8B-B14F-4D97-AF65-F5344CB8AC3E}">
+        <p14:creationId xmlns:p14="http://schemas.microsoft.com/office/powerpoint/2010/main" val="1026152704"/>
+      </p:ext>
+    </p:extLst>
+  </p:cSld>
+  <p:clrMapOvr>
+    <a:masterClrMapping/>
+  </p:clrMapOvr>
+</p:notes>
+</file>
+
+<file path=ppt/notesSlides/notesSlide8.xml><?xml version="1.0" encoding="utf-8"?>
+<p:notes xmlns:a="http://schemas.openxmlformats.org/drawingml/2006/main" xmlns:r="http://schemas.openxmlformats.org/officeDocument/2006/relationships" xmlns:p="http://schemas.openxmlformats.org/presentationml/2006/main">
+  <p:cSld>
+    <p:spTree>
+      <p:nvGrpSpPr>
         <p:cNvPr id="1" name=""/>
         <p:cNvGrpSpPr/>
         <p:nvPr/>
@@ -1295,7 +1752,8 @@
           <a:p>
             <a:fld id="{F7021451-1387-4CA6-816F-3879F97B5CBC}" type="slidenum">
               <a:rPr lang="en-US"/>
-              <a:t>7</a:t>
+              <a:pPr/>
+              <a:t>8</a:t>
             </a:fld>
             <a:endParaRPr lang="en-US"/>
           </a:p>
@@ -1314,7 +1772,7 @@
 </p:notes>
 </file>
 
-<file path=ppt/notesSlides/notesSlide8.xml><?xml version="1.0" encoding="utf-8"?>
+<file path=ppt/notesSlides/notesSlide9.xml><?xml version="1.0" encoding="utf-8"?>
 <p:notes xmlns:a="http://schemas.openxmlformats.org/drawingml/2006/main" xmlns:r="http://schemas.openxmlformats.org/officeDocument/2006/relationships" xmlns:p="http://schemas.openxmlformats.org/presentationml/2006/main">
   <p:cSld>
     <p:spTree>
@@ -1408,7 +1866,8 @@
           <a:p>
             <a:fld id="{F7021451-1387-4CA6-816F-3879F97B5CBC}" type="slidenum">
               <a:rPr lang="en-US"/>
-              <a:t>8</a:t>
+              <a:pPr/>
+              <a:t>9</a:t>
             </a:fld>
             <a:endParaRPr lang="en-US"/>
           </a:p>
@@ -1418,96 +1877,6 @@
     <p:extLst>
       <p:ext uri="{BB962C8B-B14F-4D97-AF65-F5344CB8AC3E}">
         <p14:creationId xmlns:p14="http://schemas.microsoft.com/office/powerpoint/2010/main" val="2539992220"/>
-      </p:ext>
-    </p:extLst>
-  </p:cSld>
-  <p:clrMapOvr>
-    <a:masterClrMapping/>
-  </p:clrMapOvr>
-</p:notes>
-</file>
-
-<file path=ppt/notesSlides/notesSlide9.xml><?xml version="1.0" encoding="utf-8"?>
-<p:notes xmlns:a="http://schemas.openxmlformats.org/drawingml/2006/main" xmlns:r="http://schemas.openxmlformats.org/officeDocument/2006/relationships" xmlns:p="http://schemas.openxmlformats.org/presentationml/2006/main">
-  <p:cSld>
-    <p:spTree>
-      <p:nvGrpSpPr>
-        <p:cNvPr id="1" name=""/>
-        <p:cNvGrpSpPr/>
-        <p:nvPr/>
-      </p:nvGrpSpPr>
-      <p:grpSpPr>
-        <a:xfrm>
-          <a:off x="0" y="0"/>
-          <a:ext cx="0" cy="0"/>
-          <a:chOff x="0" y="0"/>
-          <a:chExt cx="0" cy="0"/>
-        </a:xfrm>
-      </p:grpSpPr>
-      <p:sp>
-        <p:nvSpPr>
-          <p:cNvPr id="2" name="Slide Image Placeholder 1"/>
-          <p:cNvSpPr>
-            <a:spLocks noGrp="1" noRot="1" noChangeAspect="1"/>
-          </p:cNvSpPr>
-          <p:nvPr>
-            <p:ph type="sldImg"/>
-          </p:nvPr>
-        </p:nvSpPr>
-        <p:spPr/>
-      </p:sp>
-      <p:sp>
-        <p:nvSpPr>
-          <p:cNvPr id="3" name="Notes Placeholder 2"/>
-          <p:cNvSpPr>
-            <a:spLocks noGrp="1"/>
-          </p:cNvSpPr>
-          <p:nvPr>
-            <p:ph type="body" idx="1"/>
-          </p:nvPr>
-        </p:nvSpPr>
-        <p:spPr/>
-        <p:txBody>
-          <a:bodyPr/>
-          <a:lstStyle/>
-          <a:p>
-            <a:r>
-              <a:rPr lang="en-US" dirty="0"/>
-              <a:t>[Sources]
-- Mentoring and cross-functional evidence from CV: turn6search1.
-- Industry breadth from portfolio categories on https://omarsaab.net/ (turn3view0 L52-L55, L56-L265).
-- Education and languages from CV: turn6search1.</a:t>
-            </a:r>
-          </a:p>
-        </p:txBody>
-      </p:sp>
-      <p:sp>
-        <p:nvSpPr>
-          <p:cNvPr id="4" name="Slide Number Placeholder 3"/>
-          <p:cNvSpPr>
-            <a:spLocks noGrp="1"/>
-          </p:cNvSpPr>
-          <p:nvPr>
-            <p:ph type="sldNum" sz="quarter" idx="10"/>
-          </p:nvPr>
-        </p:nvSpPr>
-        <p:spPr/>
-        <p:txBody>
-          <a:bodyPr/>
-          <a:lstStyle/>
-          <a:p>
-            <a:fld id="{F7021451-1387-4CA6-816F-3879F97B5CBC}" type="slidenum">
-              <a:rPr lang="en-US"/>
-              <a:t>9</a:t>
-            </a:fld>
-            <a:endParaRPr lang="en-US"/>
-          </a:p>
-        </p:txBody>
-      </p:sp>
-    </p:spTree>
-    <p:extLst>
-      <p:ext uri="{BB962C8B-B14F-4D97-AF65-F5344CB8AC3E}">
-        <p14:creationId xmlns:p14="http://schemas.microsoft.com/office/powerpoint/2010/main" val="1024086991"/>
       </p:ext>
     </p:extLst>
   </p:cSld>
@@ -1547,6 +1916,389 @@
 </p:sldLayout>
 </file>
 
+<file path=ppt/slideLayouts/slideLayout2.xml><?xml version="1.0" encoding="utf-8"?>
+<p:sldLayout xmlns:a="http://schemas.openxmlformats.org/drawingml/2006/main" xmlns:r="http://schemas.openxmlformats.org/officeDocument/2006/relationships" xmlns:p="http://schemas.openxmlformats.org/presentationml/2006/main" matchingName="Title slide" type="title">
+  <p:cSld name="Title slide">
+    <p:spTree>
+      <p:nvGrpSpPr>
+        <p:cNvPr id="1" name="Shape 8"/>
+        <p:cNvGrpSpPr/>
+        <p:nvPr/>
+      </p:nvGrpSpPr>
+      <p:grpSpPr>
+        <a:xfrm>
+          <a:off x="0" y="0"/>
+          <a:ext cx="0" cy="0"/>
+          <a:chOff x="0" y="0"/>
+          <a:chExt cx="0" cy="0"/>
+        </a:xfrm>
+      </p:grpSpPr>
+      <p:sp>
+        <p:nvSpPr>
+          <p:cNvPr id="10" name="Google Shape;10;p2"/>
+          <p:cNvSpPr txBox="1">
+            <a:spLocks noGrp="1"/>
+          </p:cNvSpPr>
+          <p:nvPr>
+            <p:ph type="ctrTitle"/>
+          </p:nvPr>
+        </p:nvSpPr>
+        <p:spPr>
+          <a:xfrm>
+            <a:off x="2129867" y="890467"/>
+            <a:ext cx="8528400" cy="3062000"/>
+          </a:xfrm>
+          <a:prstGeom prst="rect">
+            <a:avLst/>
+          </a:prstGeom>
+        </p:spPr>
+        <p:txBody>
+          <a:bodyPr spcFirstLastPara="1" wrap="square" lIns="121889" tIns="121889" rIns="121889" bIns="121889" anchor="b" anchorCtr="0">
+            <a:noAutofit/>
+          </a:bodyPr>
+          <a:lstStyle>
+            <a:lvl1pPr lvl="0" algn="r">
+              <a:spcBef>
+                <a:spcPts val="0"/>
+              </a:spcBef>
+              <a:spcAft>
+                <a:spcPts val="0"/>
+              </a:spcAft>
+              <a:buClr>
+                <a:srgbClr val="191919"/>
+              </a:buClr>
+              <a:buSzPts val="5200"/>
+              <a:buNone/>
+              <a:defRPr sz="6700" b="0">
+                <a:latin typeface="Castoro"/>
+                <a:ea typeface="Castoro"/>
+                <a:cs typeface="Castoro"/>
+                <a:sym typeface="Castoro"/>
+              </a:defRPr>
+            </a:lvl1pPr>
+            <a:lvl2pPr lvl="1" algn="ctr">
+              <a:spcBef>
+                <a:spcPts val="0"/>
+              </a:spcBef>
+              <a:spcAft>
+                <a:spcPts val="0"/>
+              </a:spcAft>
+              <a:buClr>
+                <a:srgbClr val="191919"/>
+              </a:buClr>
+              <a:buSzPts val="5200"/>
+              <a:buNone/>
+              <a:defRPr sz="6900">
+                <a:solidFill>
+                  <a:srgbClr val="191919"/>
+                </a:solidFill>
+              </a:defRPr>
+            </a:lvl2pPr>
+            <a:lvl3pPr lvl="2" algn="ctr">
+              <a:spcBef>
+                <a:spcPts val="0"/>
+              </a:spcBef>
+              <a:spcAft>
+                <a:spcPts val="0"/>
+              </a:spcAft>
+              <a:buClr>
+                <a:srgbClr val="191919"/>
+              </a:buClr>
+              <a:buSzPts val="5200"/>
+              <a:buNone/>
+              <a:defRPr sz="6900">
+                <a:solidFill>
+                  <a:srgbClr val="191919"/>
+                </a:solidFill>
+              </a:defRPr>
+            </a:lvl3pPr>
+            <a:lvl4pPr lvl="3" algn="ctr">
+              <a:spcBef>
+                <a:spcPts val="0"/>
+              </a:spcBef>
+              <a:spcAft>
+                <a:spcPts val="0"/>
+              </a:spcAft>
+              <a:buClr>
+                <a:srgbClr val="191919"/>
+              </a:buClr>
+              <a:buSzPts val="5200"/>
+              <a:buNone/>
+              <a:defRPr sz="6900">
+                <a:solidFill>
+                  <a:srgbClr val="191919"/>
+                </a:solidFill>
+              </a:defRPr>
+            </a:lvl4pPr>
+            <a:lvl5pPr lvl="4" algn="ctr">
+              <a:spcBef>
+                <a:spcPts val="0"/>
+              </a:spcBef>
+              <a:spcAft>
+                <a:spcPts val="0"/>
+              </a:spcAft>
+              <a:buClr>
+                <a:srgbClr val="191919"/>
+              </a:buClr>
+              <a:buSzPts val="5200"/>
+              <a:buNone/>
+              <a:defRPr sz="6900">
+                <a:solidFill>
+                  <a:srgbClr val="191919"/>
+                </a:solidFill>
+              </a:defRPr>
+            </a:lvl5pPr>
+            <a:lvl6pPr lvl="5" algn="ctr">
+              <a:spcBef>
+                <a:spcPts val="0"/>
+              </a:spcBef>
+              <a:spcAft>
+                <a:spcPts val="0"/>
+              </a:spcAft>
+              <a:buClr>
+                <a:srgbClr val="191919"/>
+              </a:buClr>
+              <a:buSzPts val="5200"/>
+              <a:buNone/>
+              <a:defRPr sz="6900">
+                <a:solidFill>
+                  <a:srgbClr val="191919"/>
+                </a:solidFill>
+              </a:defRPr>
+            </a:lvl6pPr>
+            <a:lvl7pPr lvl="6" algn="ctr">
+              <a:spcBef>
+                <a:spcPts val="0"/>
+              </a:spcBef>
+              <a:spcAft>
+                <a:spcPts val="0"/>
+              </a:spcAft>
+              <a:buClr>
+                <a:srgbClr val="191919"/>
+              </a:buClr>
+              <a:buSzPts val="5200"/>
+              <a:buNone/>
+              <a:defRPr sz="6900">
+                <a:solidFill>
+                  <a:srgbClr val="191919"/>
+                </a:solidFill>
+              </a:defRPr>
+            </a:lvl7pPr>
+            <a:lvl8pPr lvl="7" algn="ctr">
+              <a:spcBef>
+                <a:spcPts val="0"/>
+              </a:spcBef>
+              <a:spcAft>
+                <a:spcPts val="0"/>
+              </a:spcAft>
+              <a:buClr>
+                <a:srgbClr val="191919"/>
+              </a:buClr>
+              <a:buSzPts val="5200"/>
+              <a:buNone/>
+              <a:defRPr sz="6900">
+                <a:solidFill>
+                  <a:srgbClr val="191919"/>
+                </a:solidFill>
+              </a:defRPr>
+            </a:lvl8pPr>
+            <a:lvl9pPr lvl="8" algn="ctr">
+              <a:spcBef>
+                <a:spcPts val="0"/>
+              </a:spcBef>
+              <a:spcAft>
+                <a:spcPts val="0"/>
+              </a:spcAft>
+              <a:buClr>
+                <a:srgbClr val="191919"/>
+              </a:buClr>
+              <a:buSzPts val="5200"/>
+              <a:buNone/>
+              <a:defRPr sz="6900">
+                <a:solidFill>
+                  <a:srgbClr val="191919"/>
+                </a:solidFill>
+              </a:defRPr>
+            </a:lvl9pPr>
+          </a:lstStyle>
+          <a:p>
+            <a:endParaRPr/>
+          </a:p>
+        </p:txBody>
+      </p:sp>
+      <p:sp>
+        <p:nvSpPr>
+          <p:cNvPr id="11" name="Google Shape;11;p2"/>
+          <p:cNvSpPr txBox="1">
+            <a:spLocks noGrp="1"/>
+          </p:cNvSpPr>
+          <p:nvPr>
+            <p:ph type="subTitle" idx="1"/>
+          </p:nvPr>
+        </p:nvSpPr>
+        <p:spPr>
+          <a:xfrm>
+            <a:off x="7285067" y="4641189"/>
+            <a:ext cx="3373200" cy="906000"/>
+          </a:xfrm>
+          <a:prstGeom prst="rect">
+            <a:avLst/>
+          </a:prstGeom>
+        </p:spPr>
+        <p:txBody>
+          <a:bodyPr spcFirstLastPara="1" wrap="square" lIns="121889" tIns="121889" rIns="121889" bIns="121889" anchor="t" anchorCtr="0">
+            <a:noAutofit/>
+          </a:bodyPr>
+          <a:lstStyle>
+            <a:lvl1pPr lvl="0" algn="r">
+              <a:lnSpc>
+                <a:spcPct val="100000"/>
+              </a:lnSpc>
+              <a:spcBef>
+                <a:spcPts val="0"/>
+              </a:spcBef>
+              <a:spcAft>
+                <a:spcPts val="0"/>
+              </a:spcAft>
+              <a:buSzPts val="1200"/>
+              <a:buNone/>
+              <a:defRPr sz="2100">
+                <a:solidFill>
+                  <a:schemeClr val="dk1"/>
+                </a:solidFill>
+              </a:defRPr>
+            </a:lvl1pPr>
+            <a:lvl2pPr lvl="1" algn="ctr">
+              <a:lnSpc>
+                <a:spcPct val="100000"/>
+              </a:lnSpc>
+              <a:spcBef>
+                <a:spcPts val="0"/>
+              </a:spcBef>
+              <a:spcAft>
+                <a:spcPts val="0"/>
+              </a:spcAft>
+              <a:buSzPts val="1800"/>
+              <a:buNone/>
+              <a:defRPr sz="2400"/>
+            </a:lvl2pPr>
+            <a:lvl3pPr lvl="2" algn="ctr">
+              <a:lnSpc>
+                <a:spcPct val="100000"/>
+              </a:lnSpc>
+              <a:spcBef>
+                <a:spcPts val="0"/>
+              </a:spcBef>
+              <a:spcAft>
+                <a:spcPts val="0"/>
+              </a:spcAft>
+              <a:buSzPts val="1800"/>
+              <a:buNone/>
+              <a:defRPr sz="2400"/>
+            </a:lvl3pPr>
+            <a:lvl4pPr lvl="3" algn="ctr">
+              <a:lnSpc>
+                <a:spcPct val="100000"/>
+              </a:lnSpc>
+              <a:spcBef>
+                <a:spcPts val="0"/>
+              </a:spcBef>
+              <a:spcAft>
+                <a:spcPts val="0"/>
+              </a:spcAft>
+              <a:buSzPts val="1800"/>
+              <a:buNone/>
+              <a:defRPr sz="2400"/>
+            </a:lvl4pPr>
+            <a:lvl5pPr lvl="4" algn="ctr">
+              <a:lnSpc>
+                <a:spcPct val="100000"/>
+              </a:lnSpc>
+              <a:spcBef>
+                <a:spcPts val="0"/>
+              </a:spcBef>
+              <a:spcAft>
+                <a:spcPts val="0"/>
+              </a:spcAft>
+              <a:buSzPts val="1800"/>
+              <a:buNone/>
+              <a:defRPr sz="2400"/>
+            </a:lvl5pPr>
+            <a:lvl6pPr lvl="5" algn="ctr">
+              <a:lnSpc>
+                <a:spcPct val="100000"/>
+              </a:lnSpc>
+              <a:spcBef>
+                <a:spcPts val="0"/>
+              </a:spcBef>
+              <a:spcAft>
+                <a:spcPts val="0"/>
+              </a:spcAft>
+              <a:buSzPts val="1800"/>
+              <a:buNone/>
+              <a:defRPr sz="2400"/>
+            </a:lvl6pPr>
+            <a:lvl7pPr lvl="6" algn="ctr">
+              <a:lnSpc>
+                <a:spcPct val="100000"/>
+              </a:lnSpc>
+              <a:spcBef>
+                <a:spcPts val="0"/>
+              </a:spcBef>
+              <a:spcAft>
+                <a:spcPts val="0"/>
+              </a:spcAft>
+              <a:buSzPts val="1800"/>
+              <a:buNone/>
+              <a:defRPr sz="2400"/>
+            </a:lvl7pPr>
+            <a:lvl8pPr lvl="7" algn="ctr">
+              <a:lnSpc>
+                <a:spcPct val="100000"/>
+              </a:lnSpc>
+              <a:spcBef>
+                <a:spcPts val="0"/>
+              </a:spcBef>
+              <a:spcAft>
+                <a:spcPts val="0"/>
+              </a:spcAft>
+              <a:buSzPts val="1800"/>
+              <a:buNone/>
+              <a:defRPr sz="2400"/>
+            </a:lvl8pPr>
+            <a:lvl9pPr lvl="8" algn="ctr">
+              <a:lnSpc>
+                <a:spcPct val="100000"/>
+              </a:lnSpc>
+              <a:spcBef>
+                <a:spcPts val="0"/>
+              </a:spcBef>
+              <a:spcAft>
+                <a:spcPts val="0"/>
+              </a:spcAft>
+              <a:buSzPts val="1800"/>
+              <a:buNone/>
+              <a:defRPr sz="2400"/>
+            </a:lvl9pPr>
+          </a:lstStyle>
+          <a:p>
+            <a:endParaRPr/>
+          </a:p>
+        </p:txBody>
+      </p:sp>
+    </p:spTree>
+    <p:extLst>
+      <p:ext uri="{BB962C8B-B14F-4D97-AF65-F5344CB8AC3E}">
+        <p14:creationId xmlns:p14="http://schemas.microsoft.com/office/powerpoint/2010/main" val="4077169384"/>
+      </p:ext>
+    </p:extLst>
+  </p:cSld>
+  <p:clrMapOvr>
+    <a:masterClrMapping/>
+  </p:clrMapOvr>
+</p:sldLayout>
+</file>
+
 <file path=ppt/slideMasters/slideMaster1.xml><?xml version="1.0" encoding="utf-8"?>
 <p:sldMaster xmlns:a="http://schemas.openxmlformats.org/drawingml/2006/main" xmlns:r="http://schemas.openxmlformats.org/officeDocument/2006/relationships" xmlns:p="http://schemas.openxmlformats.org/presentationml/2006/main">
   <p:cSld>
@@ -1574,11 +2326,12 @@
   <p:clrMap bg1="lt1" tx1="dk1" bg2="lt2" tx2="dk2" accent1="accent1" accent2="accent2" accent3="accent3" accent4="accent4" accent5="accent5" accent6="accent6" hlink="hlink" folHlink="folHlink"/>
   <p:sldLayoutIdLst>
     <p:sldLayoutId id="2147483649" r:id="rId1"/>
+    <p:sldLayoutId id="2147483682" r:id="rId2"/>
   </p:sldLayoutIdLst>
   <p:hf sldNum="0" hdr="0" ftr="0" dt="0"/>
   <p:txStyles>
     <p:titleStyle>
-      <a:lvl1pPr algn="ctr" defTabSz="914400" rtl="0" eaLnBrk="1" latinLnBrk="0" hangingPunct="1">
+      <a:lvl1pPr algn="ctr" defTabSz="914332" rtl="0" eaLnBrk="1" latinLnBrk="0" hangingPunct="1">
         <a:spcBef>
           <a:spcPct val="0"/>
         </a:spcBef>
@@ -1594,7 +2347,7 @@
       </a:lvl1pPr>
     </p:titleStyle>
     <p:bodyStyle>
-      <a:lvl1pPr marL="342900" indent="-342900" algn="l" defTabSz="914400" rtl="0" eaLnBrk="1" latinLnBrk="0" hangingPunct="1">
+      <a:lvl1pPr marL="342874" indent="-342874" algn="l" defTabSz="914332" rtl="0" eaLnBrk="1" latinLnBrk="0" hangingPunct="1">
         <a:spcBef>
           <a:spcPct val="20000"/>
         </a:spcBef>
@@ -1609,7 +2362,7 @@
           <a:cs typeface="+mn-cs"/>
         </a:defRPr>
       </a:lvl1pPr>
-      <a:lvl2pPr marL="742950" indent="-285750" algn="l" defTabSz="914400" rtl="0" eaLnBrk="1" latinLnBrk="0" hangingPunct="1">
+      <a:lvl2pPr marL="742895" indent="-285730" algn="l" defTabSz="914332" rtl="0" eaLnBrk="1" latinLnBrk="0" hangingPunct="1">
         <a:spcBef>
           <a:spcPct val="20000"/>
         </a:spcBef>
@@ -1624,7 +2377,7 @@
           <a:cs typeface="+mn-cs"/>
         </a:defRPr>
       </a:lvl2pPr>
-      <a:lvl3pPr marL="1143000" indent="-228600" algn="l" defTabSz="914400" rtl="0" eaLnBrk="1" latinLnBrk="0" hangingPunct="1">
+      <a:lvl3pPr marL="1142914" indent="-228584" algn="l" defTabSz="914332" rtl="0" eaLnBrk="1" latinLnBrk="0" hangingPunct="1">
         <a:spcBef>
           <a:spcPct val="20000"/>
         </a:spcBef>
@@ -1639,7 +2392,7 @@
           <a:cs typeface="+mn-cs"/>
         </a:defRPr>
       </a:lvl3pPr>
-      <a:lvl4pPr marL="1600200" indent="-228600" algn="l" defTabSz="914400" rtl="0" eaLnBrk="1" latinLnBrk="0" hangingPunct="1">
+      <a:lvl4pPr marL="1600080" indent="-228584" algn="l" defTabSz="914332" rtl="0" eaLnBrk="1" latinLnBrk="0" hangingPunct="1">
         <a:spcBef>
           <a:spcPct val="20000"/>
         </a:spcBef>
@@ -1654,7 +2407,7 @@
           <a:cs typeface="+mn-cs"/>
         </a:defRPr>
       </a:lvl4pPr>
-      <a:lvl5pPr marL="2057400" indent="-228600" algn="l" defTabSz="914400" rtl="0" eaLnBrk="1" latinLnBrk="0" hangingPunct="1">
+      <a:lvl5pPr marL="2057247" indent="-228584" algn="l" defTabSz="914332" rtl="0" eaLnBrk="1" latinLnBrk="0" hangingPunct="1">
         <a:spcBef>
           <a:spcPct val="20000"/>
         </a:spcBef>
@@ -1669,7 +2422,7 @@
           <a:cs typeface="+mn-cs"/>
         </a:defRPr>
       </a:lvl5pPr>
-      <a:lvl6pPr marL="2514600" indent="-228600" algn="l" defTabSz="914400" rtl="0" eaLnBrk="1" latinLnBrk="0" hangingPunct="1">
+      <a:lvl6pPr marL="2514412" indent="-228584" algn="l" defTabSz="914332" rtl="0" eaLnBrk="1" latinLnBrk="0" hangingPunct="1">
         <a:spcBef>
           <a:spcPct val="20000"/>
         </a:spcBef>
@@ -1684,7 +2437,7 @@
           <a:cs typeface="+mn-cs"/>
         </a:defRPr>
       </a:lvl6pPr>
-      <a:lvl7pPr marL="2971800" indent="-228600" algn="l" defTabSz="914400" rtl="0" eaLnBrk="1" latinLnBrk="0" hangingPunct="1">
+      <a:lvl7pPr marL="2971578" indent="-228584" algn="l" defTabSz="914332" rtl="0" eaLnBrk="1" latinLnBrk="0" hangingPunct="1">
         <a:spcBef>
           <a:spcPct val="20000"/>
         </a:spcBef>
@@ -1699,7 +2452,7 @@
           <a:cs typeface="+mn-cs"/>
         </a:defRPr>
       </a:lvl7pPr>
-      <a:lvl8pPr marL="3429000" indent="-228600" algn="l" defTabSz="914400" rtl="0" eaLnBrk="1" latinLnBrk="0" hangingPunct="1">
+      <a:lvl8pPr marL="3428744" indent="-228584" algn="l" defTabSz="914332" rtl="0" eaLnBrk="1" latinLnBrk="0" hangingPunct="1">
         <a:spcBef>
           <a:spcPct val="20000"/>
         </a:spcBef>
@@ -1714,7 +2467,7 @@
           <a:cs typeface="+mn-cs"/>
         </a:defRPr>
       </a:lvl8pPr>
-      <a:lvl9pPr marL="3886200" indent="-228600" algn="l" defTabSz="914400" rtl="0" eaLnBrk="1" latinLnBrk="0" hangingPunct="1">
+      <a:lvl9pPr marL="3885910" indent="-228584" algn="l" defTabSz="914332" rtl="0" eaLnBrk="1" latinLnBrk="0" hangingPunct="1">
         <a:spcBef>
           <a:spcPct val="20000"/>
         </a:spcBef>
@@ -1734,8 +2487,8 @@
       <a:defPPr>
         <a:defRPr lang="en-US"/>
       </a:defPPr>
-      <a:lvl1pPr marL="0" algn="l" defTabSz="914400" rtl="0" eaLnBrk="1" latinLnBrk="0" hangingPunct="1">
-        <a:defRPr sz="1800" kern="1200">
+      <a:lvl1pPr marL="0" algn="l" defTabSz="914332" rtl="0" eaLnBrk="1" latinLnBrk="0" hangingPunct="1">
+        <a:defRPr sz="1900" kern="1200">
           <a:solidFill>
             <a:schemeClr val="tx1"/>
           </a:solidFill>
@@ -1744,8 +2497,8 @@
           <a:cs typeface="+mn-cs"/>
         </a:defRPr>
       </a:lvl1pPr>
-      <a:lvl2pPr marL="457200" algn="l" defTabSz="914400" rtl="0" eaLnBrk="1" latinLnBrk="0" hangingPunct="1">
-        <a:defRPr sz="1800" kern="1200">
+      <a:lvl2pPr marL="457167" algn="l" defTabSz="914332" rtl="0" eaLnBrk="1" latinLnBrk="0" hangingPunct="1">
+        <a:defRPr sz="1900" kern="1200">
           <a:solidFill>
             <a:schemeClr val="tx1"/>
           </a:solidFill>
@@ -1754,8 +2507,8 @@
           <a:cs typeface="+mn-cs"/>
         </a:defRPr>
       </a:lvl2pPr>
-      <a:lvl3pPr marL="914400" algn="l" defTabSz="914400" rtl="0" eaLnBrk="1" latinLnBrk="0" hangingPunct="1">
-        <a:defRPr sz="1800" kern="1200">
+      <a:lvl3pPr marL="914332" algn="l" defTabSz="914332" rtl="0" eaLnBrk="1" latinLnBrk="0" hangingPunct="1">
+        <a:defRPr sz="1900" kern="1200">
           <a:solidFill>
             <a:schemeClr val="tx1"/>
           </a:solidFill>
@@ -1764,8 +2517,8 @@
           <a:cs typeface="+mn-cs"/>
         </a:defRPr>
       </a:lvl3pPr>
-      <a:lvl4pPr marL="1371600" algn="l" defTabSz="914400" rtl="0" eaLnBrk="1" latinLnBrk="0" hangingPunct="1">
-        <a:defRPr sz="1800" kern="1200">
+      <a:lvl4pPr marL="1371498" algn="l" defTabSz="914332" rtl="0" eaLnBrk="1" latinLnBrk="0" hangingPunct="1">
+        <a:defRPr sz="1900" kern="1200">
           <a:solidFill>
             <a:schemeClr val="tx1"/>
           </a:solidFill>
@@ -1774,8 +2527,8 @@
           <a:cs typeface="+mn-cs"/>
         </a:defRPr>
       </a:lvl4pPr>
-      <a:lvl5pPr marL="1828800" algn="l" defTabSz="914400" rtl="0" eaLnBrk="1" latinLnBrk="0" hangingPunct="1">
-        <a:defRPr sz="1800" kern="1200">
+      <a:lvl5pPr marL="1828664" algn="l" defTabSz="914332" rtl="0" eaLnBrk="1" latinLnBrk="0" hangingPunct="1">
+        <a:defRPr sz="1900" kern="1200">
           <a:solidFill>
             <a:schemeClr val="tx1"/>
           </a:solidFill>
@@ -1784,8 +2537,8 @@
           <a:cs typeface="+mn-cs"/>
         </a:defRPr>
       </a:lvl5pPr>
-      <a:lvl6pPr marL="2286000" algn="l" defTabSz="914400" rtl="0" eaLnBrk="1" latinLnBrk="0" hangingPunct="1">
-        <a:defRPr sz="1800" kern="1200">
+      <a:lvl6pPr marL="2285830" algn="l" defTabSz="914332" rtl="0" eaLnBrk="1" latinLnBrk="0" hangingPunct="1">
+        <a:defRPr sz="1900" kern="1200">
           <a:solidFill>
             <a:schemeClr val="tx1"/>
           </a:solidFill>
@@ -1794,8 +2547,8 @@
           <a:cs typeface="+mn-cs"/>
         </a:defRPr>
       </a:lvl6pPr>
-      <a:lvl7pPr marL="2743200" algn="l" defTabSz="914400" rtl="0" eaLnBrk="1" latinLnBrk="0" hangingPunct="1">
-        <a:defRPr sz="1800" kern="1200">
+      <a:lvl7pPr marL="2742994" algn="l" defTabSz="914332" rtl="0" eaLnBrk="1" latinLnBrk="0" hangingPunct="1">
+        <a:defRPr sz="1900" kern="1200">
           <a:solidFill>
             <a:schemeClr val="tx1"/>
           </a:solidFill>
@@ -1804,8 +2557,8 @@
           <a:cs typeface="+mn-cs"/>
         </a:defRPr>
       </a:lvl7pPr>
-      <a:lvl8pPr marL="3200400" algn="l" defTabSz="914400" rtl="0" eaLnBrk="1" latinLnBrk="0" hangingPunct="1">
-        <a:defRPr sz="1800" kern="1200">
+      <a:lvl8pPr marL="3200160" algn="l" defTabSz="914332" rtl="0" eaLnBrk="1" latinLnBrk="0" hangingPunct="1">
+        <a:defRPr sz="1900" kern="1200">
           <a:solidFill>
             <a:schemeClr val="tx1"/>
           </a:solidFill>
@@ -1814,8 +2567,8 @@
           <a:cs typeface="+mn-cs"/>
         </a:defRPr>
       </a:lvl8pPr>
-      <a:lvl9pPr marL="3657600" algn="l" defTabSz="914400" rtl="0" eaLnBrk="1" latinLnBrk="0" hangingPunct="1">
-        <a:defRPr sz="1800" kern="1200">
+      <a:lvl9pPr marL="3657327" algn="l" defTabSz="914332" rtl="0" eaLnBrk="1" latinLnBrk="0" hangingPunct="1">
+        <a:defRPr sz="1900" kern="1200">
           <a:solidFill>
             <a:schemeClr val="tx1"/>
           </a:solidFill>
@@ -1862,7 +2615,7 @@
         </p:blipFill>
         <p:spPr>
           <a:xfrm>
-            <a:off x="0" y="0"/>
+            <a:off x="5" y="0"/>
             <a:ext cx="12191695" cy="6858000"/>
           </a:xfrm>
           <a:prstGeom prst="rect">
@@ -1878,7 +2631,7 @@
         </p:nvSpPr>
         <p:spPr>
           <a:xfrm>
-            <a:off x="0" y="0"/>
+            <a:off x="5" y="0"/>
             <a:ext cx="12191695" cy="6858000"/>
           </a:xfrm>
           <a:prstGeom prst="rect">
@@ -1899,7 +2652,7 @@
           </a:ln>
         </p:spPr>
         <p:txBody>
-          <a:bodyPr/>
+          <a:bodyPr lIns="91434" tIns="45718" rIns="91434" bIns="45718"/>
           <a:lstStyle/>
           <a:p>
             <a:endParaRPr lang="en-US"/>
@@ -1972,9 +2725,6 @@
           <a:bodyPr wrap="square" lIns="0" tIns="0" rIns="0" bIns="0" rtlCol="0" anchor="ctr"/>
           <a:lstStyle/>
           <a:p>
-            <a:pPr marL="0" indent="0">
-              <a:buNone/>
-            </a:pPr>
             <a:r>
               <a:rPr lang="en-US" sz="4800" b="1" dirty="0">
                 <a:solidFill>
@@ -1984,7 +2734,7 @@
                 <a:ea typeface="Akatab" pitchFamily="34" charset="-122"/>
                 <a:cs typeface="Akatab" pitchFamily="34" charset="-120"/>
               </a:rPr>
-              <a:t>Omar Saab</a:t>
+              <a:t>Omar N. Saab</a:t>
             </a:r>
             <a:endParaRPr lang="en-US" sz="4800" dirty="0"/>
           </a:p>
@@ -1999,7 +2749,7 @@
         <p:spPr>
           <a:xfrm>
             <a:off x="3410712" y="1912031"/>
-            <a:ext cx="1600200" cy="27432"/>
+            <a:ext cx="2160000" cy="27432"/>
           </a:xfrm>
           <a:prstGeom prst="roundRect">
             <a:avLst>
@@ -2019,7 +2769,7 @@
           </a:ln>
         </p:spPr>
         <p:txBody>
-          <a:bodyPr/>
+          <a:bodyPr lIns="91434" tIns="45718" rIns="91434" bIns="45718"/>
           <a:lstStyle/>
           <a:p>
             <a:endParaRPr lang="en-US"/>
@@ -2047,9 +2797,6 @@
           <a:bodyPr wrap="square" lIns="0" tIns="0" rIns="0" bIns="0" rtlCol="0" anchor="ctr"/>
           <a:lstStyle/>
           <a:p>
-            <a:pPr marL="0" indent="0">
-              <a:buNone/>
-            </a:pPr>
             <a:r>
               <a:rPr lang="en-US" sz="1600" dirty="0">
                 <a:solidFill>
@@ -2059,7 +2806,7 @@
                 <a:ea typeface="Akatab" pitchFamily="34" charset="-122"/>
                 <a:cs typeface="Akatab" pitchFamily="34" charset="-120"/>
               </a:rPr>
-              <a:t>CTO Portfolio</a:t>
+              <a:t>CTO</a:t>
             </a:r>
             <a:endParaRPr lang="en-US" sz="1600" dirty="0"/>
           </a:p>
@@ -2073,8 +2820,8 @@
         </p:nvSpPr>
         <p:spPr>
           <a:xfrm>
-            <a:off x="3383280" y="2423160"/>
-            <a:ext cx="4937760" cy="822960"/>
+            <a:off x="3383279" y="2423160"/>
+            <a:ext cx="6807855" cy="1179576"/>
           </a:xfrm>
           <a:prstGeom prst="rect">
             <a:avLst/>
@@ -2086,11 +2833,8 @@
           <a:bodyPr wrap="square" lIns="0" tIns="0" rIns="0" bIns="0" rtlCol="0" anchor="ctr"/>
           <a:lstStyle/>
           <a:p>
-            <a:pPr marL="0" indent="0">
-              <a:buNone/>
-            </a:pPr>
-            <a:r>
-              <a:rPr lang="en-US" sz="1420" dirty="0">
+            <a:r>
+              <a:rPr lang="en-US" sz="1500" dirty="0">
                 <a:solidFill>
                   <a:srgbClr val="E6EDF8"/>
                 </a:solidFill>
@@ -2098,22 +2842,73 @@
                 <a:ea typeface="Akatab" pitchFamily="34" charset="-122"/>
                 <a:cs typeface="Akatab" pitchFamily="34" charset="-120"/>
               </a:rPr>
-              <a:t>Technology strategy, scalable architecture, and hands-on execution for companies that need a builder who can also lead.</a:t>
-            </a:r>
-            <a:endParaRPr lang="en-US" sz="1420" dirty="0"/>
-          </a:p>
-        </p:txBody>
-      </p:sp>
-      <p:sp>
-        <p:nvSpPr>
-          <p:cNvPr id="10" name="Shape 6"/>
-          <p:cNvSpPr/>
-          <p:nvPr/>
-        </p:nvSpPr>
-        <p:spPr>
-          <a:xfrm>
-            <a:off x="3383280" y="3749040"/>
-            <a:ext cx="1783080" cy="822960"/>
+              <a:t>Technology strategy, scalable architecture, and hands-on execution for companies that need a builder who can also lead. </a:t>
+            </a:r>
+          </a:p>
+          <a:p>
+            <a:br>
+              <a:rPr lang="en-US" sz="1500" dirty="0">
+                <a:solidFill>
+                  <a:srgbClr val="E6EDF8"/>
+                </a:solidFill>
+                <a:latin typeface="Akatab" pitchFamily="34" charset="0"/>
+                <a:ea typeface="Akatab" pitchFamily="34" charset="-122"/>
+                <a:cs typeface="Akatab" pitchFamily="34" charset="-120"/>
+              </a:rPr>
+            </a:br>
+            <a:r>
+              <a:rPr lang="en-US" sz="1500" dirty="0">
+                <a:solidFill>
+                  <a:srgbClr val="E6EDF8"/>
+                </a:solidFill>
+                <a:latin typeface="Akatab" pitchFamily="34" charset="0"/>
+                <a:ea typeface="Akatab" pitchFamily="34" charset="-122"/>
+                <a:cs typeface="Akatab" pitchFamily="34" charset="-120"/>
+              </a:rPr>
+              <a:t>🏆  Recognized by 10+ customers for delivering transformative Technology outcomes.</a:t>
+            </a:r>
+          </a:p>
+          <a:p>
+            <a:endParaRPr lang="en-US" sz="1500" dirty="0"/>
+          </a:p>
+        </p:txBody>
+      </p:sp>
+      <p:sp>
+        <p:nvSpPr>
+          <p:cNvPr id="11" name="Text 7"/>
+          <p:cNvSpPr/>
+          <p:nvPr/>
+        </p:nvSpPr>
+        <p:spPr>
+          <a:xfrm>
+            <a:off x="3493008" y="3822192"/>
+            <a:ext cx="1563624" cy="274320"/>
+          </a:xfrm>
+          <a:prstGeom prst="rect">
+            <a:avLst/>
+          </a:prstGeom>
+          <a:noFill/>
+          <a:ln/>
+        </p:spPr>
+        <p:txBody>
+          <a:bodyPr wrap="square" lIns="0" tIns="0" rIns="0" bIns="0" rtlCol="0" anchor="ctr"/>
+          <a:lstStyle/>
+          <a:p>
+            <a:pPr algn="ctr"/>
+            <a:endParaRPr lang="en-US" sz="2000" dirty="0"/>
+          </a:p>
+        </p:txBody>
+      </p:sp>
+      <p:sp>
+        <p:nvSpPr>
+          <p:cNvPr id="13" name="Shape 9"/>
+          <p:cNvSpPr/>
+          <p:nvPr/>
+        </p:nvSpPr>
+        <p:spPr>
+          <a:xfrm>
+            <a:off x="3410712" y="3948525"/>
+            <a:ext cx="2459146" cy="674973"/>
           </a:xfrm>
           <a:prstGeom prst="roundRect">
             <a:avLst>
@@ -2135,7 +2930,7 @@
           </a:ln>
         </p:spPr>
         <p:txBody>
-          <a:bodyPr/>
+          <a:bodyPr lIns="91434" tIns="45718" rIns="91434" bIns="45718"/>
           <a:lstStyle/>
           <a:p>
             <a:endParaRPr lang="en-US"/>
@@ -2144,14 +2939,14 @@
       </p:sp>
       <p:sp>
         <p:nvSpPr>
-          <p:cNvPr id="11" name="Text 7"/>
-          <p:cNvSpPr/>
-          <p:nvPr/>
-        </p:nvSpPr>
-        <p:spPr>
-          <a:xfrm>
-            <a:off x="3493008" y="3822192"/>
-            <a:ext cx="1563624" cy="274320"/>
+          <p:cNvPr id="14" name="Text 10"/>
+          <p:cNvSpPr/>
+          <p:nvPr/>
+        </p:nvSpPr>
+        <p:spPr>
+          <a:xfrm>
+            <a:off x="3520440" y="4021677"/>
+            <a:ext cx="2242686" cy="274320"/>
           </a:xfrm>
           <a:prstGeom prst="rect">
             <a:avLst/>
@@ -2163,9 +2958,7 @@
           <a:bodyPr wrap="square" lIns="0" tIns="0" rIns="0" bIns="0" rtlCol="0" anchor="ctr"/>
           <a:lstStyle/>
           <a:p>
-            <a:pPr marL="0" indent="0" algn="ctr">
-              <a:buNone/>
-            </a:pPr>
+            <a:pPr algn="ctr"/>
             <a:r>
               <a:rPr lang="en-US" sz="2000" b="1" dirty="0">
                 <a:solidFill>
@@ -2175,7 +2968,7 @@
                 <a:ea typeface="Akatab" pitchFamily="34" charset="-122"/>
                 <a:cs typeface="Akatab" pitchFamily="34" charset="-120"/>
               </a:rPr>
-              <a:t>7+</a:t>
+              <a:t>120+</a:t>
             </a:r>
             <a:endParaRPr lang="en-US" sz="2000" dirty="0"/>
           </a:p>
@@ -2183,14 +2976,14 @@
       </p:sp>
       <p:sp>
         <p:nvSpPr>
-          <p:cNvPr id="12" name="Text 8"/>
-          <p:cNvSpPr/>
-          <p:nvPr/>
-        </p:nvSpPr>
-        <p:spPr>
-          <a:xfrm>
-            <a:off x="3493008" y="4133088"/>
-            <a:ext cx="1563624" cy="219456"/>
+          <p:cNvPr id="15" name="Text 11"/>
+          <p:cNvSpPr/>
+          <p:nvPr/>
+        </p:nvSpPr>
+        <p:spPr>
+          <a:xfrm>
+            <a:off x="3520440" y="4332573"/>
+            <a:ext cx="2156482" cy="219456"/>
           </a:xfrm>
           <a:prstGeom prst="rect">
             <a:avLst/>
@@ -2202,11 +2995,9 @@
           <a:bodyPr wrap="square" lIns="0" tIns="0" rIns="0" bIns="0" rtlCol="0" anchor="ctr"/>
           <a:lstStyle/>
           <a:p>
-            <a:pPr marL="0" indent="0" algn="ctr">
-              <a:buNone/>
-            </a:pPr>
-            <a:r>
-              <a:rPr lang="en-US" sz="950" dirty="0">
+            <a:pPr algn="ctr"/>
+            <a:r>
+              <a:rPr lang="en-US" sz="900" dirty="0">
                 <a:solidFill>
                   <a:srgbClr val="E8EEF8"/>
                 </a:solidFill>
@@ -2214,22 +3005,181 @@
                 <a:ea typeface="Akatab" pitchFamily="34" charset="-122"/>
                 <a:cs typeface="Akatab" pitchFamily="34" charset="-120"/>
               </a:rPr>
-              <a:t>Years in software &amp; digital delivery</a:t>
-            </a:r>
-            <a:endParaRPr lang="en-US" sz="950" dirty="0"/>
-          </a:p>
-        </p:txBody>
-      </p:sp>
-      <p:sp>
-        <p:nvSpPr>
-          <p:cNvPr id="13" name="Shape 9"/>
-          <p:cNvSpPr/>
-          <p:nvPr/>
-        </p:nvSpPr>
-        <p:spPr>
-          <a:xfrm>
-            <a:off x="5303520" y="3749040"/>
-            <a:ext cx="1783080" cy="822960"/>
+              <a:t>Websites &amp; applications delivered</a:t>
+            </a:r>
+            <a:endParaRPr lang="en-US" sz="900" dirty="0"/>
+          </a:p>
+        </p:txBody>
+      </p:sp>
+      <p:sp>
+        <p:nvSpPr>
+          <p:cNvPr id="22" name="Text 18"/>
+          <p:cNvSpPr/>
+          <p:nvPr/>
+        </p:nvSpPr>
+        <p:spPr>
+          <a:xfrm>
+            <a:off x="3383280" y="4917789"/>
+            <a:ext cx="7708392" cy="292608"/>
+          </a:xfrm>
+          <a:prstGeom prst="rect">
+            <a:avLst/>
+          </a:prstGeom>
+          <a:noFill/>
+          <a:ln/>
+        </p:spPr>
+        <p:txBody>
+          <a:bodyPr wrap="square" lIns="0" tIns="0" rIns="0" bIns="0" rtlCol="0" anchor="ctr"/>
+          <a:lstStyle/>
+          <a:p>
+            <a:pPr algn="ctr"/>
+            <a:r>
+              <a:rPr lang="en-US" sz="1100" b="1" dirty="0">
+                <a:solidFill>
+                  <a:srgbClr val="DDE8FA"/>
+                </a:solidFill>
+                <a:latin typeface="Akatab" pitchFamily="34" charset="0"/>
+                <a:ea typeface="Akatab" pitchFamily="34" charset="-122"/>
+                <a:cs typeface="Akatab" pitchFamily="34" charset="-120"/>
+              </a:rPr>
+              <a:t>BANKING • HEALTHCARE • LOGISTICS • RETAIL • AVIATION • EDUCATION • PUBLIC SECTOR</a:t>
+            </a:r>
+            <a:endParaRPr lang="en-US" sz="1100" dirty="0"/>
+          </a:p>
+        </p:txBody>
+      </p:sp>
+      <p:sp>
+        <p:nvSpPr>
+          <p:cNvPr id="23" name="Shape 19"/>
+          <p:cNvSpPr/>
+          <p:nvPr/>
+        </p:nvSpPr>
+        <p:spPr>
+          <a:xfrm>
+            <a:off x="3383280" y="5504688"/>
+            <a:ext cx="7708392" cy="676656"/>
+          </a:xfrm>
+          <a:prstGeom prst="roundRect">
+            <a:avLst>
+              <a:gd name="adj" fmla="val 10811"/>
+            </a:avLst>
+          </a:prstGeom>
+          <a:solidFill>
+            <a:srgbClr val="FFFFFF">
+              <a:alpha val="12000"/>
+            </a:srgbClr>
+          </a:solidFill>
+          <a:ln w="12700">
+            <a:solidFill>
+              <a:srgbClr val="FFFFFF">
+                <a:alpha val="20000"/>
+              </a:srgbClr>
+            </a:solidFill>
+            <a:prstDash val="solid"/>
+          </a:ln>
+        </p:spPr>
+        <p:txBody>
+          <a:bodyPr lIns="91434" tIns="45718" rIns="91434" bIns="45718" anchor="ctr"/>
+          <a:lstStyle/>
+          <a:p>
+            <a:pPr algn="ctr"/>
+            <a:endParaRPr lang="en-US"/>
+          </a:p>
+        </p:txBody>
+      </p:sp>
+      <p:sp>
+        <p:nvSpPr>
+          <p:cNvPr id="24" name="Text 20"/>
+          <p:cNvSpPr/>
+          <p:nvPr/>
+        </p:nvSpPr>
+        <p:spPr>
+          <a:xfrm>
+            <a:off x="3611880" y="5742432"/>
+            <a:ext cx="7286856" cy="228600"/>
+          </a:xfrm>
+          <a:prstGeom prst="rect">
+            <a:avLst/>
+          </a:prstGeom>
+          <a:noFill/>
+          <a:ln/>
+        </p:spPr>
+        <p:txBody>
+          <a:bodyPr wrap="square" lIns="0" tIns="0" rIns="0" bIns="0" rtlCol="0" anchor="ctr"/>
+          <a:lstStyle/>
+          <a:p>
+            <a:pPr algn="ctr"/>
+            <a:r>
+              <a:rPr lang="en-US" sz="1100" dirty="0">
+                <a:solidFill>
+                  <a:schemeClr val="bg1"/>
+                </a:solidFill>
+                <a:latin typeface="Akatab" pitchFamily="34" charset="0"/>
+                <a:ea typeface="Akatab" pitchFamily="34" charset="-122"/>
+                <a:cs typeface="Akatab" pitchFamily="34" charset="-120"/>
+                <a:hlinkClick r:id="rId5">
+                  <a:extLst>
+                    <a:ext uri="{A12FA001-AC4F-418D-AE19-62706E023703}">
+                      <ahyp:hlinkClr xmlns:ahyp="http://schemas.microsoft.com/office/drawing/2018/hyperlinkcolor" val="tx"/>
+                    </a:ext>
+                  </a:extLst>
+                </a:hlinkClick>
+              </a:rPr>
+              <a:t>omarsaab.net</a:t>
+            </a:r>
+            <a:r>
+              <a:rPr lang="en-US" sz="1100" dirty="0">
+                <a:solidFill>
+                  <a:srgbClr val="FFFFFF"/>
+                </a:solidFill>
+                <a:latin typeface="Akatab" pitchFamily="34" charset="0"/>
+                <a:ea typeface="Akatab" pitchFamily="34" charset="-122"/>
+                <a:cs typeface="Akatab" pitchFamily="34" charset="-120"/>
+              </a:rPr>
+              <a:t>  | omar.saab.96@gmail.com   |   +961 70 433863   |   </a:t>
+            </a:r>
+            <a:r>
+              <a:rPr lang="en-US" sz="1100" dirty="0">
+                <a:solidFill>
+                  <a:schemeClr val="bg1"/>
+                </a:solidFill>
+                <a:latin typeface="Akatab" pitchFamily="34" charset="0"/>
+                <a:ea typeface="Akatab" pitchFamily="34" charset="-122"/>
+                <a:cs typeface="Akatab" pitchFamily="34" charset="-120"/>
+                <a:hlinkClick r:id="rId6">
+                  <a:extLst>
+                    <a:ext uri="{A12FA001-AC4F-418D-AE19-62706E023703}">
+                      <ahyp:hlinkClr xmlns:ahyp="http://schemas.microsoft.com/office/drawing/2018/hyperlinkcolor" val="tx"/>
+                    </a:ext>
+                  </a:extLst>
+                </a:hlinkClick>
+              </a:rPr>
+              <a:t>linkedin.com/in/omarsaab96</a:t>
+            </a:r>
+            <a:endParaRPr lang="en-US" sz="1100" dirty="0">
+              <a:solidFill>
+                <a:schemeClr val="bg1"/>
+              </a:solidFill>
+            </a:endParaRPr>
+          </a:p>
+        </p:txBody>
+      </p:sp>
+      <p:sp>
+        <p:nvSpPr>
+          <p:cNvPr id="4" name="Shape 9">
+            <a:extLst>
+              <a:ext uri="{FF2B5EF4-FFF2-40B4-BE49-F238E27FC236}">
+                <a16:creationId xmlns:a16="http://schemas.microsoft.com/office/drawing/2014/main" id="{F32F2405-4F93-E03A-6DA1-4FE84651B6FA}"/>
+              </a:ext>
+            </a:extLst>
+          </p:cNvPr>
+          <p:cNvSpPr/>
+          <p:nvPr/>
+        </p:nvSpPr>
+        <p:spPr>
+          <a:xfrm>
+            <a:off x="6021619" y="3948525"/>
+            <a:ext cx="2459146" cy="674973"/>
           </a:xfrm>
           <a:prstGeom prst="roundRect">
             <a:avLst>
@@ -2251,7 +3201,7 @@
           </a:ln>
         </p:spPr>
         <p:txBody>
-          <a:bodyPr/>
+          <a:bodyPr lIns="91434" tIns="45718" rIns="91434" bIns="45718"/>
           <a:lstStyle/>
           <a:p>
             <a:endParaRPr lang="en-US"/>
@@ -2260,14 +3210,20 @@
       </p:sp>
       <p:sp>
         <p:nvSpPr>
-          <p:cNvPr id="14" name="Text 10"/>
-          <p:cNvSpPr/>
-          <p:nvPr/>
-        </p:nvSpPr>
-        <p:spPr>
-          <a:xfrm>
-            <a:off x="5413248" y="3822192"/>
-            <a:ext cx="1563624" cy="274320"/>
+          <p:cNvPr id="10" name="Text 10">
+            <a:extLst>
+              <a:ext uri="{FF2B5EF4-FFF2-40B4-BE49-F238E27FC236}">
+                <a16:creationId xmlns:a16="http://schemas.microsoft.com/office/drawing/2014/main" id="{E84C1DDA-7390-FC70-4171-2215D4CAE08C}"/>
+              </a:ext>
+            </a:extLst>
+          </p:cNvPr>
+          <p:cNvSpPr/>
+          <p:nvPr/>
+        </p:nvSpPr>
+        <p:spPr>
+          <a:xfrm>
+            <a:off x="6131347" y="4021677"/>
+            <a:ext cx="2236616" cy="274320"/>
           </a:xfrm>
           <a:prstGeom prst="rect">
             <a:avLst/>
@@ -2279,9 +3235,7 @@
           <a:bodyPr wrap="square" lIns="0" tIns="0" rIns="0" bIns="0" rtlCol="0" anchor="ctr"/>
           <a:lstStyle/>
           <a:p>
-            <a:pPr marL="0" indent="0" algn="ctr">
-              <a:buNone/>
-            </a:pPr>
+            <a:pPr algn="ctr"/>
             <a:r>
               <a:rPr lang="en-US" sz="2000" b="1" dirty="0">
                 <a:solidFill>
@@ -2291,7 +3245,7 @@
                 <a:ea typeface="Akatab" pitchFamily="34" charset="-122"/>
                 <a:cs typeface="Akatab" pitchFamily="34" charset="-120"/>
               </a:rPr>
-              <a:t>120+</a:t>
+              <a:t>10,000+</a:t>
             </a:r>
             <a:endParaRPr lang="en-US" sz="2000" dirty="0"/>
           </a:p>
@@ -2299,14 +3253,20 @@
       </p:sp>
       <p:sp>
         <p:nvSpPr>
-          <p:cNvPr id="15" name="Text 11"/>
-          <p:cNvSpPr/>
-          <p:nvPr/>
-        </p:nvSpPr>
-        <p:spPr>
-          <a:xfrm>
-            <a:off x="5413248" y="4133088"/>
-            <a:ext cx="1563624" cy="219456"/>
+          <p:cNvPr id="12" name="Text 11">
+            <a:extLst>
+              <a:ext uri="{FF2B5EF4-FFF2-40B4-BE49-F238E27FC236}">
+                <a16:creationId xmlns:a16="http://schemas.microsoft.com/office/drawing/2014/main" id="{B0EA4C1E-789B-33C2-B311-FE516C4A1013}"/>
+              </a:ext>
+            </a:extLst>
+          </p:cNvPr>
+          <p:cNvSpPr/>
+          <p:nvPr/>
+        </p:nvSpPr>
+        <p:spPr>
+          <a:xfrm>
+            <a:off x="6131347" y="4332573"/>
+            <a:ext cx="2156482" cy="219456"/>
           </a:xfrm>
           <a:prstGeom prst="rect">
             <a:avLst/>
@@ -2318,11 +3278,9 @@
           <a:bodyPr wrap="square" lIns="0" tIns="0" rIns="0" bIns="0" rtlCol="0" anchor="ctr"/>
           <a:lstStyle/>
           <a:p>
-            <a:pPr marL="0" indent="0" algn="ctr">
-              <a:buNone/>
-            </a:pPr>
-            <a:r>
-              <a:rPr lang="en-US" sz="950" dirty="0">
+            <a:pPr algn="ctr"/>
+            <a:r>
+              <a:rPr lang="en-US" sz="900" dirty="0">
                 <a:solidFill>
                   <a:srgbClr val="E8EEF8"/>
                 </a:solidFill>
@@ -2330,22 +3288,28 @@
                 <a:ea typeface="Akatab" pitchFamily="34" charset="-122"/>
                 <a:cs typeface="Akatab" pitchFamily="34" charset="-120"/>
               </a:rPr>
-              <a:t>Websites &amp; applications delivered</a:t>
-            </a:r>
-            <a:endParaRPr lang="en-US" sz="950" dirty="0"/>
-          </a:p>
-        </p:txBody>
-      </p:sp>
-      <p:sp>
-        <p:nvSpPr>
-          <p:cNvPr id="16" name="Shape 12"/>
-          <p:cNvSpPr/>
-          <p:nvPr/>
-        </p:nvSpPr>
-        <p:spPr>
-          <a:xfrm>
-            <a:off x="7223760" y="3749040"/>
-            <a:ext cx="1938528" cy="822960"/>
+              <a:t>Concurrent-user infrastructure exposure</a:t>
+            </a:r>
+            <a:endParaRPr lang="en-US" sz="900" dirty="0"/>
+          </a:p>
+        </p:txBody>
+      </p:sp>
+      <p:sp>
+        <p:nvSpPr>
+          <p:cNvPr id="25" name="Shape 9">
+            <a:extLst>
+              <a:ext uri="{FF2B5EF4-FFF2-40B4-BE49-F238E27FC236}">
+                <a16:creationId xmlns:a16="http://schemas.microsoft.com/office/drawing/2014/main" id="{74AF8C53-9CFD-ED3E-6CC5-C9591013884F}"/>
+              </a:ext>
+            </a:extLst>
+          </p:cNvPr>
+          <p:cNvSpPr/>
+          <p:nvPr/>
+        </p:nvSpPr>
+        <p:spPr>
+          <a:xfrm>
+            <a:off x="8632526" y="3948525"/>
+            <a:ext cx="2459146" cy="674973"/>
           </a:xfrm>
           <a:prstGeom prst="roundRect">
             <a:avLst>
@@ -2367,7 +3331,7 @@
           </a:ln>
         </p:spPr>
         <p:txBody>
-          <a:bodyPr/>
+          <a:bodyPr lIns="91434" tIns="45718" rIns="91434" bIns="45718"/>
           <a:lstStyle/>
           <a:p>
             <a:endParaRPr lang="en-US"/>
@@ -2376,14 +3340,20 @@
       </p:sp>
       <p:sp>
         <p:nvSpPr>
-          <p:cNvPr id="17" name="Text 13"/>
-          <p:cNvSpPr/>
-          <p:nvPr/>
-        </p:nvSpPr>
-        <p:spPr>
-          <a:xfrm>
-            <a:off x="7333488" y="3822192"/>
-            <a:ext cx="1719072" cy="274320"/>
+          <p:cNvPr id="26" name="Text 10">
+            <a:extLst>
+              <a:ext uri="{FF2B5EF4-FFF2-40B4-BE49-F238E27FC236}">
+                <a16:creationId xmlns:a16="http://schemas.microsoft.com/office/drawing/2014/main" id="{B44FAA7A-5BE0-4052-267A-AD985141AF30}"/>
+              </a:ext>
+            </a:extLst>
+          </p:cNvPr>
+          <p:cNvSpPr/>
+          <p:nvPr/>
+        </p:nvSpPr>
+        <p:spPr>
+          <a:xfrm>
+            <a:off x="8742254" y="4021677"/>
+            <a:ext cx="2242578" cy="274320"/>
           </a:xfrm>
           <a:prstGeom prst="rect">
             <a:avLst/>
@@ -2395,125 +3365,7 @@
           <a:bodyPr wrap="square" lIns="0" tIns="0" rIns="0" bIns="0" rtlCol="0" anchor="ctr"/>
           <a:lstStyle/>
           <a:p>
-            <a:pPr marL="0" indent="0" algn="ctr">
-              <a:buNone/>
-            </a:pPr>
-            <a:r>
-              <a:rPr lang="en-US" sz="2000" b="1" dirty="0">
-                <a:solidFill>
-                  <a:srgbClr val="FFFFFF"/>
-                </a:solidFill>
-                <a:latin typeface="Akatab" pitchFamily="34" charset="0"/>
-                <a:ea typeface="Akatab" pitchFamily="34" charset="-122"/>
-                <a:cs typeface="Akatab" pitchFamily="34" charset="-120"/>
-              </a:rPr>
-              <a:t>10,000+</a:t>
-            </a:r>
-            <a:endParaRPr lang="en-US" sz="2000" dirty="0"/>
-          </a:p>
-        </p:txBody>
-      </p:sp>
-      <p:sp>
-        <p:nvSpPr>
-          <p:cNvPr id="18" name="Text 14"/>
-          <p:cNvSpPr/>
-          <p:nvPr/>
-        </p:nvSpPr>
-        <p:spPr>
-          <a:xfrm>
-            <a:off x="7333488" y="4133088"/>
-            <a:ext cx="1719072" cy="219456"/>
-          </a:xfrm>
-          <a:prstGeom prst="rect">
-            <a:avLst/>
-          </a:prstGeom>
-          <a:noFill/>
-          <a:ln/>
-        </p:spPr>
-        <p:txBody>
-          <a:bodyPr wrap="square" lIns="0" tIns="0" rIns="0" bIns="0" rtlCol="0" anchor="ctr"/>
-          <a:lstStyle/>
-          <a:p>
-            <a:pPr marL="0" indent="0" algn="ctr">
-              <a:buNone/>
-            </a:pPr>
-            <a:r>
-              <a:rPr lang="en-US" sz="950" dirty="0">
-                <a:solidFill>
-                  <a:srgbClr val="E8EEF8"/>
-                </a:solidFill>
-                <a:latin typeface="Akatab" pitchFamily="34" charset="0"/>
-                <a:ea typeface="Akatab" pitchFamily="34" charset="-122"/>
-                <a:cs typeface="Akatab" pitchFamily="34" charset="-120"/>
-              </a:rPr>
-              <a:t>Concurrent-user infrastructure exposure</a:t>
-            </a:r>
-            <a:endParaRPr lang="en-US" sz="950" dirty="0"/>
-          </a:p>
-        </p:txBody>
-      </p:sp>
-      <p:sp>
-        <p:nvSpPr>
-          <p:cNvPr id="19" name="Shape 15"/>
-          <p:cNvSpPr/>
-          <p:nvPr/>
-        </p:nvSpPr>
-        <p:spPr>
-          <a:xfrm>
-            <a:off x="9308592" y="3749040"/>
-            <a:ext cx="1783080" cy="822960"/>
-          </a:xfrm>
-          <a:prstGeom prst="roundRect">
-            <a:avLst>
-              <a:gd name="adj" fmla="val 13333"/>
-            </a:avLst>
-          </a:prstGeom>
-          <a:solidFill>
-            <a:srgbClr val="FFFFFF">
-              <a:alpha val="14000"/>
-            </a:srgbClr>
-          </a:solidFill>
-          <a:ln w="12700">
-            <a:solidFill>
-              <a:srgbClr val="FFFFFF">
-                <a:alpha val="15000"/>
-              </a:srgbClr>
-            </a:solidFill>
-            <a:prstDash val="solid"/>
-          </a:ln>
-        </p:spPr>
-        <p:txBody>
-          <a:bodyPr/>
-          <a:lstStyle/>
-          <a:p>
-            <a:endParaRPr lang="en-US"/>
-          </a:p>
-        </p:txBody>
-      </p:sp>
-      <p:sp>
-        <p:nvSpPr>
-          <p:cNvPr id="20" name="Text 16"/>
-          <p:cNvSpPr/>
-          <p:nvPr/>
-        </p:nvSpPr>
-        <p:spPr>
-          <a:xfrm>
-            <a:off x="9418320" y="3822192"/>
-            <a:ext cx="1563624" cy="274320"/>
-          </a:xfrm>
-          <a:prstGeom prst="rect">
-            <a:avLst/>
-          </a:prstGeom>
-          <a:noFill/>
-          <a:ln/>
-        </p:spPr>
-        <p:txBody>
-          <a:bodyPr wrap="square" lIns="0" tIns="0" rIns="0" bIns="0" rtlCol="0" anchor="ctr"/>
-          <a:lstStyle/>
-          <a:p>
-            <a:pPr marL="0" indent="0" algn="ctr">
-              <a:buNone/>
-            </a:pPr>
+            <a:pPr algn="ctr"/>
             <a:r>
               <a:rPr lang="en-US" sz="2000" b="1" dirty="0">
                 <a:solidFill>
@@ -2531,14 +3383,20 @@
       </p:sp>
       <p:sp>
         <p:nvSpPr>
-          <p:cNvPr id="21" name="Text 17"/>
-          <p:cNvSpPr/>
-          <p:nvPr/>
-        </p:nvSpPr>
-        <p:spPr>
-          <a:xfrm>
-            <a:off x="9418320" y="4133088"/>
-            <a:ext cx="1563624" cy="219456"/>
+          <p:cNvPr id="27" name="Text 11">
+            <a:extLst>
+              <a:ext uri="{FF2B5EF4-FFF2-40B4-BE49-F238E27FC236}">
+                <a16:creationId xmlns:a16="http://schemas.microsoft.com/office/drawing/2014/main" id="{2F37F3E5-6299-E86B-AA34-03292F03E267}"/>
+              </a:ext>
+            </a:extLst>
+          </p:cNvPr>
+          <p:cNvSpPr/>
+          <p:nvPr/>
+        </p:nvSpPr>
+        <p:spPr>
+          <a:xfrm>
+            <a:off x="8742254" y="4332573"/>
+            <a:ext cx="2156482" cy="219456"/>
           </a:xfrm>
           <a:prstGeom prst="rect">
             <a:avLst/>
@@ -2550,11 +3408,9 @@
           <a:bodyPr wrap="square" lIns="0" tIns="0" rIns="0" bIns="0" rtlCol="0" anchor="ctr"/>
           <a:lstStyle/>
           <a:p>
-            <a:pPr marL="0" indent="0" algn="ctr">
-              <a:buNone/>
-            </a:pPr>
-            <a:r>
-              <a:rPr lang="en-US" sz="950" dirty="0">
+            <a:pPr algn="ctr"/>
+            <a:r>
+              <a:rPr lang="en-US" sz="900" dirty="0">
                 <a:solidFill>
                   <a:srgbClr val="E8EEF8"/>
                 </a:solidFill>
@@ -2564,124 +3420,7 @@
               </a:rPr>
               <a:t>Requests / second API exposure</a:t>
             </a:r>
-            <a:endParaRPr lang="en-US" sz="950" dirty="0"/>
-          </a:p>
-        </p:txBody>
-      </p:sp>
-      <p:sp>
-        <p:nvSpPr>
-          <p:cNvPr id="22" name="Text 18"/>
-          <p:cNvSpPr/>
-          <p:nvPr/>
-        </p:nvSpPr>
-        <p:spPr>
-          <a:xfrm>
-            <a:off x="3383280" y="4917789"/>
-            <a:ext cx="7708392" cy="292608"/>
-          </a:xfrm>
-          <a:prstGeom prst="rect">
-            <a:avLst/>
-          </a:prstGeom>
-          <a:noFill/>
-          <a:ln/>
-        </p:spPr>
-        <p:txBody>
-          <a:bodyPr wrap="square" lIns="0" tIns="0" rIns="0" bIns="0" rtlCol="0" anchor="ctr"/>
-          <a:lstStyle/>
-          <a:p>
-            <a:pPr marL="0" indent="0" algn="ctr">
-              <a:buNone/>
-            </a:pPr>
-            <a:r>
-              <a:rPr lang="en-US" sz="1050" b="1" dirty="0">
-                <a:solidFill>
-                  <a:srgbClr val="DDE8FA"/>
-                </a:solidFill>
-                <a:latin typeface="Akatab" pitchFamily="34" charset="0"/>
-                <a:ea typeface="Akatab" pitchFamily="34" charset="-122"/>
-                <a:cs typeface="Akatab" pitchFamily="34" charset="-120"/>
-              </a:rPr>
-              <a:t>BANKING • HEALTHCARE • LOGISTICS • RETAIL • AVIATION • EDUCATION • PUBLIC SECTOR</a:t>
-            </a:r>
-            <a:endParaRPr lang="en-US" sz="1050" dirty="0"/>
-          </a:p>
-        </p:txBody>
-      </p:sp>
-      <p:sp>
-        <p:nvSpPr>
-          <p:cNvPr id="23" name="Shape 19"/>
-          <p:cNvSpPr/>
-          <p:nvPr/>
-        </p:nvSpPr>
-        <p:spPr>
-          <a:xfrm>
-            <a:off x="3383280" y="5504688"/>
-            <a:ext cx="7708392" cy="676656"/>
-          </a:xfrm>
-          <a:prstGeom prst="roundRect">
-            <a:avLst>
-              <a:gd name="adj" fmla="val 10811"/>
-            </a:avLst>
-          </a:prstGeom>
-          <a:solidFill>
-            <a:srgbClr val="FFFFFF">
-              <a:alpha val="12000"/>
-            </a:srgbClr>
-          </a:solidFill>
-          <a:ln w="12700">
-            <a:solidFill>
-              <a:srgbClr val="FFFFFF">
-                <a:alpha val="20000"/>
-              </a:srgbClr>
-            </a:solidFill>
-            <a:prstDash val="solid"/>
-          </a:ln>
-        </p:spPr>
-        <p:txBody>
-          <a:bodyPr anchor="ctr"/>
-          <a:lstStyle/>
-          <a:p>
-            <a:pPr algn="ctr"/>
-            <a:endParaRPr lang="en-US"/>
-          </a:p>
-        </p:txBody>
-      </p:sp>
-      <p:sp>
-        <p:nvSpPr>
-          <p:cNvPr id="24" name="Text 20"/>
-          <p:cNvSpPr/>
-          <p:nvPr/>
-        </p:nvSpPr>
-        <p:spPr>
-          <a:xfrm>
-            <a:off x="3611880" y="5742432"/>
-            <a:ext cx="6903720" cy="228600"/>
-          </a:xfrm>
-          <a:prstGeom prst="rect">
-            <a:avLst/>
-          </a:prstGeom>
-          <a:noFill/>
-          <a:ln/>
-        </p:spPr>
-        <p:txBody>
-          <a:bodyPr wrap="square" lIns="0" tIns="0" rIns="0" bIns="0" rtlCol="0" anchor="ctr"/>
-          <a:lstStyle/>
-          <a:p>
-            <a:pPr marL="0" indent="0" algn="ctr">
-              <a:buNone/>
-            </a:pPr>
-            <a:r>
-              <a:rPr lang="en-US" sz="1050" dirty="0">
-                <a:solidFill>
-                  <a:srgbClr val="FFFFFF"/>
-                </a:solidFill>
-                <a:latin typeface="Akatab" pitchFamily="34" charset="0"/>
-                <a:ea typeface="Akatab" pitchFamily="34" charset="-122"/>
-                <a:cs typeface="Akatab" pitchFamily="34" charset="-120"/>
-              </a:rPr>
-              <a:t>omarsaab.net   |   omar.saab.96@gmail.com   |   +961 70 433863   |   linkedin.com/in/omarsaab96</a:t>
-            </a:r>
-            <a:endParaRPr lang="en-US" sz="1050" dirty="0"/>
+            <a:endParaRPr lang="en-US" sz="900" dirty="0"/>
           </a:p>
         </p:txBody>
       </p:sp>
@@ -2694,6 +3433,836 @@
 </file>
 
 <file path=ppt/slides/slide10.xml><?xml version="1.0" encoding="utf-8"?>
+<p:sld xmlns:a="http://schemas.openxmlformats.org/drawingml/2006/main" xmlns:r="http://schemas.openxmlformats.org/officeDocument/2006/relationships" xmlns:p="http://schemas.openxmlformats.org/presentationml/2006/main">
+  <p:cSld name="Slide 8">
+    <p:bg>
+      <p:bgPr>
+        <a:solidFill>
+          <a:srgbClr val="FFFFFF"/>
+        </a:solidFill>
+        <a:effectLst/>
+      </p:bgPr>
+    </p:bg>
+    <p:spTree>
+      <p:nvGrpSpPr>
+        <p:cNvPr id="1" name=""/>
+        <p:cNvGrpSpPr/>
+        <p:nvPr/>
+      </p:nvGrpSpPr>
+      <p:grpSpPr>
+        <a:xfrm>
+          <a:off x="0" y="0"/>
+          <a:ext cx="0" cy="0"/>
+          <a:chOff x="0" y="0"/>
+          <a:chExt cx="0" cy="0"/>
+        </a:xfrm>
+      </p:grpSpPr>
+      <p:sp>
+        <p:nvSpPr>
+          <p:cNvPr id="2" name="Shape 0"/>
+          <p:cNvSpPr/>
+          <p:nvPr/>
+        </p:nvSpPr>
+        <p:spPr>
+          <a:xfrm>
+            <a:off x="5" y="0"/>
+            <a:ext cx="12191695" cy="6858000"/>
+          </a:xfrm>
+          <a:prstGeom prst="rect">
+            <a:avLst/>
+          </a:prstGeom>
+          <a:solidFill>
+            <a:srgbClr val="FFFFFF"/>
+          </a:solidFill>
+          <a:ln w="12700">
+            <a:solidFill>
+              <a:srgbClr val="FFFFFF">
+                <a:alpha val="0"/>
+              </a:srgbClr>
+            </a:solidFill>
+            <a:prstDash val="solid"/>
+          </a:ln>
+        </p:spPr>
+        <p:txBody>
+          <a:bodyPr lIns="91434" tIns="45718" rIns="91434" bIns="45718"/>
+          <a:lstStyle/>
+          <a:p>
+            <a:endParaRPr lang="en-US"/>
+          </a:p>
+        </p:txBody>
+      </p:sp>
+      <p:sp>
+        <p:nvSpPr>
+          <p:cNvPr id="3" name="Text 1"/>
+          <p:cNvSpPr/>
+          <p:nvPr/>
+        </p:nvSpPr>
+        <p:spPr>
+          <a:xfrm>
+            <a:off x="502920" y="228600"/>
+            <a:ext cx="9509760" cy="347472"/>
+          </a:xfrm>
+          <a:prstGeom prst="rect">
+            <a:avLst/>
+          </a:prstGeom>
+          <a:noFill/>
+          <a:ln/>
+        </p:spPr>
+        <p:txBody>
+          <a:bodyPr wrap="square" lIns="0" tIns="0" rIns="0" bIns="0" rtlCol="0" anchor="ctr"/>
+          <a:lstStyle/>
+          <a:p>
+            <a:r>
+              <a:rPr lang="en-US" sz="2300" b="1" dirty="0">
+                <a:solidFill>
+                  <a:srgbClr val="1F1F1F"/>
+                </a:solidFill>
+                <a:latin typeface="Akatab" pitchFamily="34" charset="0"/>
+                <a:ea typeface="Akatab" pitchFamily="34" charset="-122"/>
+                <a:cs typeface="Akatab" pitchFamily="34" charset="-120"/>
+              </a:rPr>
+              <a:t>Expertise &amp; Capabilities</a:t>
+            </a:r>
+            <a:endParaRPr lang="en-US" sz="2300" dirty="0"/>
+          </a:p>
+        </p:txBody>
+      </p:sp>
+      <p:sp>
+        <p:nvSpPr>
+          <p:cNvPr id="4" name="Shape 2"/>
+          <p:cNvSpPr/>
+          <p:nvPr/>
+        </p:nvSpPr>
+        <p:spPr>
+          <a:xfrm>
+            <a:off x="10817352" y="201168"/>
+            <a:ext cx="475488" cy="73152"/>
+          </a:xfrm>
+          <a:prstGeom prst="roundRect">
+            <a:avLst>
+              <a:gd name="adj" fmla="val 37500"/>
+            </a:avLst>
+          </a:prstGeom>
+          <a:solidFill>
+            <a:srgbClr val="0B0B0B"/>
+          </a:solidFill>
+          <a:ln w="12700">
+            <a:solidFill>
+              <a:srgbClr val="0B0B0B">
+                <a:alpha val="0"/>
+              </a:srgbClr>
+            </a:solidFill>
+            <a:prstDash val="solid"/>
+          </a:ln>
+        </p:spPr>
+        <p:txBody>
+          <a:bodyPr lIns="91434" tIns="45718" rIns="91434" bIns="45718"/>
+          <a:lstStyle/>
+          <a:p>
+            <a:endParaRPr lang="en-US"/>
+          </a:p>
+        </p:txBody>
+      </p:sp>
+      <p:sp>
+        <p:nvSpPr>
+          <p:cNvPr id="5" name="Shape 3"/>
+          <p:cNvSpPr/>
+          <p:nvPr/>
+        </p:nvSpPr>
+        <p:spPr>
+          <a:xfrm>
+            <a:off x="502920" y="6547104"/>
+            <a:ext cx="11137392" cy="27432"/>
+          </a:xfrm>
+          <a:prstGeom prst="roundRect">
+            <a:avLst>
+              <a:gd name="adj" fmla="val 33333"/>
+            </a:avLst>
+          </a:prstGeom>
+          <a:solidFill>
+            <a:srgbClr val="D6943C"/>
+          </a:solidFill>
+          <a:ln w="12700">
+            <a:solidFill>
+              <a:srgbClr val="D6943C">
+                <a:alpha val="0"/>
+              </a:srgbClr>
+            </a:solidFill>
+            <a:prstDash val="solid"/>
+          </a:ln>
+        </p:spPr>
+        <p:txBody>
+          <a:bodyPr lIns="91434" tIns="45718" rIns="91434" bIns="45718"/>
+          <a:lstStyle/>
+          <a:p>
+            <a:endParaRPr lang="en-US"/>
+          </a:p>
+        </p:txBody>
+      </p:sp>
+      <p:sp>
+        <p:nvSpPr>
+          <p:cNvPr id="6" name="Shape 4"/>
+          <p:cNvSpPr/>
+          <p:nvPr/>
+        </p:nvSpPr>
+        <p:spPr>
+          <a:xfrm>
+            <a:off x="658368" y="1051560"/>
+            <a:ext cx="3547872" cy="658368"/>
+          </a:xfrm>
+          <a:prstGeom prst="rect">
+            <a:avLst/>
+          </a:prstGeom>
+          <a:solidFill>
+            <a:srgbClr val="173F73"/>
+          </a:solidFill>
+          <a:ln w="12700">
+            <a:solidFill>
+              <a:srgbClr val="173F73">
+                <a:alpha val="0"/>
+              </a:srgbClr>
+            </a:solidFill>
+            <a:prstDash val="solid"/>
+          </a:ln>
+        </p:spPr>
+        <p:txBody>
+          <a:bodyPr lIns="91434" tIns="45718" rIns="91434" bIns="45718"/>
+          <a:lstStyle/>
+          <a:p>
+            <a:endParaRPr lang="en-US"/>
+          </a:p>
+        </p:txBody>
+      </p:sp>
+      <p:sp>
+        <p:nvSpPr>
+          <p:cNvPr id="7" name="Text 5"/>
+          <p:cNvSpPr/>
+          <p:nvPr/>
+        </p:nvSpPr>
+        <p:spPr>
+          <a:xfrm>
+            <a:off x="731520" y="1161288"/>
+            <a:ext cx="3401568" cy="365760"/>
+          </a:xfrm>
+          <a:prstGeom prst="rect">
+            <a:avLst/>
+          </a:prstGeom>
+          <a:noFill/>
+          <a:ln/>
+        </p:spPr>
+        <p:txBody>
+          <a:bodyPr wrap="square" lIns="0" tIns="0" rIns="0" bIns="0" rtlCol="0" anchor="ctr"/>
+          <a:lstStyle/>
+          <a:p>
+            <a:pPr algn="ctr"/>
+            <a:r>
+              <a:rPr lang="en-US" sz="1600" b="1" dirty="0">
+                <a:solidFill>
+                  <a:srgbClr val="FFFFFF"/>
+                </a:solidFill>
+                <a:latin typeface="Akatab" pitchFamily="34" charset="0"/>
+                <a:ea typeface="Akatab" pitchFamily="34" charset="-122"/>
+                <a:cs typeface="Akatab" pitchFamily="34" charset="-120"/>
+              </a:rPr>
+              <a:t>Leadership &amp; Team Building</a:t>
+            </a:r>
+            <a:endParaRPr lang="en-US" sz="1600" dirty="0"/>
+          </a:p>
+        </p:txBody>
+      </p:sp>
+      <p:sp>
+        <p:nvSpPr>
+          <p:cNvPr id="8" name="Shape 6"/>
+          <p:cNvSpPr/>
+          <p:nvPr/>
+        </p:nvSpPr>
+        <p:spPr>
+          <a:xfrm>
+            <a:off x="658368" y="1709928"/>
+            <a:ext cx="3547872" cy="1856232"/>
+          </a:xfrm>
+          <a:prstGeom prst="rect">
+            <a:avLst/>
+          </a:prstGeom>
+          <a:solidFill>
+            <a:srgbClr val="F6F8FB"/>
+          </a:solidFill>
+          <a:ln w="10160">
+            <a:solidFill>
+              <a:srgbClr val="D8DCE4"/>
+            </a:solidFill>
+            <a:prstDash val="solid"/>
+          </a:ln>
+        </p:spPr>
+        <p:txBody>
+          <a:bodyPr lIns="91434" tIns="45718" rIns="91434" bIns="45718"/>
+          <a:lstStyle/>
+          <a:p>
+            <a:endParaRPr lang="en-US"/>
+          </a:p>
+        </p:txBody>
+      </p:sp>
+      <p:sp>
+        <p:nvSpPr>
+          <p:cNvPr id="9" name="Text 7"/>
+          <p:cNvSpPr/>
+          <p:nvPr/>
+        </p:nvSpPr>
+        <p:spPr>
+          <a:xfrm>
+            <a:off x="768096" y="1856232"/>
+            <a:ext cx="3328416" cy="1591056"/>
+          </a:xfrm>
+          <a:prstGeom prst="rect">
+            <a:avLst/>
+          </a:prstGeom>
+          <a:noFill/>
+          <a:ln/>
+        </p:spPr>
+        <p:txBody>
+          <a:bodyPr wrap="square" lIns="381" tIns="381" rIns="381" bIns="381" rtlCol="0" anchor="t">
+            <a:normAutofit/>
+          </a:bodyPr>
+          <a:lstStyle/>
+          <a:p>
+            <a:r>
+              <a:rPr lang="en-US" sz="1200" dirty="0">
+                <a:solidFill>
+                  <a:srgbClr val="1F1F1F"/>
+                </a:solidFill>
+                <a:latin typeface="Akatab" pitchFamily="34" charset="0"/>
+                <a:ea typeface="Akatab" pitchFamily="34" charset="-122"/>
+                <a:cs typeface="Akatab" pitchFamily="34" charset="-120"/>
+              </a:rPr>
+              <a:t>✓ Mentored junior developers and improved code quality and efficiency</a:t>
+            </a:r>
+            <a:endParaRPr lang="en-US" sz="1200" dirty="0"/>
+          </a:p>
+          <a:p>
+            <a:r>
+              <a:rPr lang="en-US" sz="1200" dirty="0">
+                <a:solidFill>
+                  <a:srgbClr val="1F1F1F"/>
+                </a:solidFill>
+                <a:latin typeface="Akatab" pitchFamily="34" charset="0"/>
+                <a:ea typeface="Akatab" pitchFamily="34" charset="-122"/>
+                <a:cs typeface="Akatab" pitchFamily="34" charset="-120"/>
+              </a:rPr>
+              <a:t>✓ Comfortable setting standards, review habits, and delivery expectations</a:t>
+            </a:r>
+            <a:endParaRPr lang="en-US" sz="1200" dirty="0"/>
+          </a:p>
+          <a:p>
+            <a:r>
+              <a:rPr lang="en-US" sz="1200" dirty="0">
+                <a:solidFill>
+                  <a:srgbClr val="1F1F1F"/>
+                </a:solidFill>
+                <a:latin typeface="Akatab" pitchFamily="34" charset="0"/>
+                <a:ea typeface="Akatab" pitchFamily="34" charset="-122"/>
+                <a:cs typeface="Akatab" pitchFamily="34" charset="-120"/>
+              </a:rPr>
+              <a:t>✓ Able to lead lean teams while still contributing hands-on</a:t>
+            </a:r>
+            <a:endParaRPr lang="en-US" sz="1200" dirty="0"/>
+          </a:p>
+          <a:p>
+            <a:r>
+              <a:rPr lang="en-US" sz="1200" dirty="0">
+                <a:solidFill>
+                  <a:srgbClr val="1F1F1F"/>
+                </a:solidFill>
+                <a:latin typeface="Akatab" pitchFamily="34" charset="0"/>
+                <a:ea typeface="Akatab" pitchFamily="34" charset="-122"/>
+                <a:cs typeface="Akatab" pitchFamily="34" charset="-120"/>
+              </a:rPr>
+              <a:t>✓ Strong owner mentality from idea to implementation</a:t>
+            </a:r>
+            <a:endParaRPr lang="en-US" sz="1200" dirty="0"/>
+          </a:p>
+        </p:txBody>
+      </p:sp>
+      <p:sp>
+        <p:nvSpPr>
+          <p:cNvPr id="10" name="Shape 8"/>
+          <p:cNvSpPr/>
+          <p:nvPr/>
+        </p:nvSpPr>
+        <p:spPr>
+          <a:xfrm>
+            <a:off x="4325112" y="1051560"/>
+            <a:ext cx="3547872" cy="658368"/>
+          </a:xfrm>
+          <a:prstGeom prst="rect">
+            <a:avLst/>
+          </a:prstGeom>
+          <a:solidFill>
+            <a:srgbClr val="0B2C5D"/>
+          </a:solidFill>
+          <a:ln w="12700">
+            <a:solidFill>
+              <a:srgbClr val="0B2C5D">
+                <a:alpha val="0"/>
+              </a:srgbClr>
+            </a:solidFill>
+            <a:prstDash val="solid"/>
+          </a:ln>
+        </p:spPr>
+        <p:txBody>
+          <a:bodyPr lIns="91434" tIns="45718" rIns="91434" bIns="45718"/>
+          <a:lstStyle/>
+          <a:p>
+            <a:endParaRPr lang="en-US"/>
+          </a:p>
+        </p:txBody>
+      </p:sp>
+      <p:sp>
+        <p:nvSpPr>
+          <p:cNvPr id="11" name="Text 9"/>
+          <p:cNvSpPr/>
+          <p:nvPr/>
+        </p:nvSpPr>
+        <p:spPr>
+          <a:xfrm>
+            <a:off x="4398264" y="1161288"/>
+            <a:ext cx="3401568" cy="365760"/>
+          </a:xfrm>
+          <a:prstGeom prst="rect">
+            <a:avLst/>
+          </a:prstGeom>
+          <a:noFill/>
+          <a:ln/>
+        </p:spPr>
+        <p:txBody>
+          <a:bodyPr wrap="square" lIns="0" tIns="0" rIns="0" bIns="0" rtlCol="0" anchor="ctr"/>
+          <a:lstStyle/>
+          <a:p>
+            <a:pPr algn="ctr"/>
+            <a:r>
+              <a:rPr lang="en-US" sz="1600" b="1" dirty="0">
+                <a:solidFill>
+                  <a:srgbClr val="FFFFFF"/>
+                </a:solidFill>
+                <a:latin typeface="Akatab" pitchFamily="34" charset="0"/>
+                <a:ea typeface="Akatab" pitchFamily="34" charset="-122"/>
+                <a:cs typeface="Akatab" pitchFamily="34" charset="-120"/>
+              </a:rPr>
+              <a:t>Business &amp; Cross-Functional Partnership</a:t>
+            </a:r>
+            <a:endParaRPr lang="en-US" sz="1600" dirty="0"/>
+          </a:p>
+        </p:txBody>
+      </p:sp>
+      <p:sp>
+        <p:nvSpPr>
+          <p:cNvPr id="12" name="Shape 10"/>
+          <p:cNvSpPr/>
+          <p:nvPr/>
+        </p:nvSpPr>
+        <p:spPr>
+          <a:xfrm>
+            <a:off x="4325112" y="1709928"/>
+            <a:ext cx="3547872" cy="1856232"/>
+          </a:xfrm>
+          <a:prstGeom prst="rect">
+            <a:avLst/>
+          </a:prstGeom>
+          <a:solidFill>
+            <a:srgbClr val="F6F8FB"/>
+          </a:solidFill>
+          <a:ln w="10160">
+            <a:solidFill>
+              <a:srgbClr val="D8DCE4"/>
+            </a:solidFill>
+            <a:prstDash val="solid"/>
+          </a:ln>
+        </p:spPr>
+        <p:txBody>
+          <a:bodyPr lIns="91434" tIns="45718" rIns="91434" bIns="45718"/>
+          <a:lstStyle/>
+          <a:p>
+            <a:endParaRPr lang="en-US"/>
+          </a:p>
+        </p:txBody>
+      </p:sp>
+      <p:sp>
+        <p:nvSpPr>
+          <p:cNvPr id="13" name="Text 11"/>
+          <p:cNvSpPr/>
+          <p:nvPr/>
+        </p:nvSpPr>
+        <p:spPr>
+          <a:xfrm>
+            <a:off x="4434840" y="1856232"/>
+            <a:ext cx="3328416" cy="1591056"/>
+          </a:xfrm>
+          <a:prstGeom prst="rect">
+            <a:avLst/>
+          </a:prstGeom>
+          <a:noFill/>
+          <a:ln/>
+        </p:spPr>
+        <p:txBody>
+          <a:bodyPr wrap="square" lIns="381" tIns="381" rIns="381" bIns="381" rtlCol="0" anchor="t">
+            <a:normAutofit/>
+          </a:bodyPr>
+          <a:lstStyle/>
+          <a:p>
+            <a:r>
+              <a:rPr lang="en-US" sz="1200" dirty="0">
+                <a:solidFill>
+                  <a:srgbClr val="1F1F1F"/>
+                </a:solidFill>
+                <a:latin typeface="Akatab" pitchFamily="34" charset="0"/>
+                <a:ea typeface="Akatab" pitchFamily="34" charset="-122"/>
+                <a:cs typeface="Akatab" pitchFamily="34" charset="-120"/>
+              </a:rPr>
+              <a:t>✓ Translate requirements into executable plans and technical decisions</a:t>
+            </a:r>
+            <a:endParaRPr lang="en-US" sz="1200" dirty="0"/>
+          </a:p>
+          <a:p>
+            <a:r>
+              <a:rPr lang="en-US" sz="1200" dirty="0">
+                <a:solidFill>
+                  <a:srgbClr val="1F1F1F"/>
+                </a:solidFill>
+                <a:latin typeface="Akatab" pitchFamily="34" charset="0"/>
+                <a:ea typeface="Akatab" pitchFamily="34" charset="-122"/>
+                <a:cs typeface="Akatab" pitchFamily="34" charset="-120"/>
+              </a:rPr>
+              <a:t>✓ Collaborate with product, design, marketing, and operations</a:t>
+            </a:r>
+            <a:endParaRPr lang="en-US" sz="1200" dirty="0"/>
+          </a:p>
+          <a:p>
+            <a:r>
+              <a:rPr lang="en-US" sz="1200" dirty="0">
+                <a:solidFill>
+                  <a:srgbClr val="1F1F1F"/>
+                </a:solidFill>
+                <a:latin typeface="Akatab" pitchFamily="34" charset="0"/>
+                <a:ea typeface="Akatab" pitchFamily="34" charset="-122"/>
+                <a:cs typeface="Akatab" pitchFamily="34" charset="-120"/>
+              </a:rPr>
+              <a:t>✓ Support launches, conversion performance, and digital growth goals</a:t>
+            </a:r>
+            <a:endParaRPr lang="en-US" sz="1200" dirty="0"/>
+          </a:p>
+          <a:p>
+            <a:r>
+              <a:rPr lang="en-US" sz="1200" dirty="0">
+                <a:solidFill>
+                  <a:srgbClr val="1F1F1F"/>
+                </a:solidFill>
+                <a:latin typeface="Akatab" pitchFamily="34" charset="0"/>
+                <a:ea typeface="Akatab" pitchFamily="34" charset="-122"/>
+                <a:cs typeface="Akatab" pitchFamily="34" charset="-120"/>
+              </a:rPr>
+              <a:t>✓ Communicate tradeoffs clearly to non-technical stakeholders</a:t>
+            </a:r>
+            <a:endParaRPr lang="en-US" sz="1200" dirty="0"/>
+          </a:p>
+        </p:txBody>
+      </p:sp>
+      <p:sp>
+        <p:nvSpPr>
+          <p:cNvPr id="14" name="Shape 12"/>
+          <p:cNvSpPr/>
+          <p:nvPr/>
+        </p:nvSpPr>
+        <p:spPr>
+          <a:xfrm>
+            <a:off x="7991856" y="1051560"/>
+            <a:ext cx="3547872" cy="658368"/>
+          </a:xfrm>
+          <a:prstGeom prst="rect">
+            <a:avLst/>
+          </a:prstGeom>
+          <a:solidFill>
+            <a:srgbClr val="D6943C"/>
+          </a:solidFill>
+          <a:ln w="12700">
+            <a:solidFill>
+              <a:srgbClr val="D6943C">
+                <a:alpha val="0"/>
+              </a:srgbClr>
+            </a:solidFill>
+            <a:prstDash val="solid"/>
+          </a:ln>
+        </p:spPr>
+        <p:txBody>
+          <a:bodyPr lIns="91434" tIns="45718" rIns="91434" bIns="45718"/>
+          <a:lstStyle/>
+          <a:p>
+            <a:endParaRPr lang="en-US"/>
+          </a:p>
+        </p:txBody>
+      </p:sp>
+      <p:sp>
+        <p:nvSpPr>
+          <p:cNvPr id="15" name="Text 13"/>
+          <p:cNvSpPr/>
+          <p:nvPr/>
+        </p:nvSpPr>
+        <p:spPr>
+          <a:xfrm>
+            <a:off x="8065008" y="1161288"/>
+            <a:ext cx="3401568" cy="365760"/>
+          </a:xfrm>
+          <a:prstGeom prst="rect">
+            <a:avLst/>
+          </a:prstGeom>
+          <a:noFill/>
+          <a:ln/>
+        </p:spPr>
+        <p:txBody>
+          <a:bodyPr wrap="square" lIns="0" tIns="0" rIns="0" bIns="0" rtlCol="0" anchor="ctr"/>
+          <a:lstStyle/>
+          <a:p>
+            <a:pPr algn="ctr"/>
+            <a:r>
+              <a:rPr lang="en-US" sz="1600" b="1" dirty="0">
+                <a:solidFill>
+                  <a:srgbClr val="FFFFFF"/>
+                </a:solidFill>
+                <a:latin typeface="Akatab" pitchFamily="34" charset="0"/>
+                <a:ea typeface="Akatab" pitchFamily="34" charset="-122"/>
+                <a:cs typeface="Akatab" pitchFamily="34" charset="-120"/>
+              </a:rPr>
+              <a:t>Industry Breadth Without Being Project-Locked</a:t>
+            </a:r>
+            <a:endParaRPr lang="en-US" sz="1600" dirty="0"/>
+          </a:p>
+        </p:txBody>
+      </p:sp>
+      <p:sp>
+        <p:nvSpPr>
+          <p:cNvPr id="16" name="Shape 14"/>
+          <p:cNvSpPr/>
+          <p:nvPr/>
+        </p:nvSpPr>
+        <p:spPr>
+          <a:xfrm>
+            <a:off x="7991856" y="1709928"/>
+            <a:ext cx="3547872" cy="1856232"/>
+          </a:xfrm>
+          <a:prstGeom prst="rect">
+            <a:avLst/>
+          </a:prstGeom>
+          <a:solidFill>
+            <a:srgbClr val="F6F8FB"/>
+          </a:solidFill>
+          <a:ln w="10160">
+            <a:solidFill>
+              <a:srgbClr val="D8DCE4"/>
+            </a:solidFill>
+            <a:prstDash val="solid"/>
+          </a:ln>
+        </p:spPr>
+        <p:txBody>
+          <a:bodyPr lIns="91434" tIns="45718" rIns="91434" bIns="45718"/>
+          <a:lstStyle/>
+          <a:p>
+            <a:endParaRPr lang="en-US"/>
+          </a:p>
+        </p:txBody>
+      </p:sp>
+      <p:sp>
+        <p:nvSpPr>
+          <p:cNvPr id="17" name="Text 15"/>
+          <p:cNvSpPr/>
+          <p:nvPr/>
+        </p:nvSpPr>
+        <p:spPr>
+          <a:xfrm>
+            <a:off x="8101584" y="1856232"/>
+            <a:ext cx="3328416" cy="1591056"/>
+          </a:xfrm>
+          <a:prstGeom prst="rect">
+            <a:avLst/>
+          </a:prstGeom>
+          <a:noFill/>
+          <a:ln/>
+        </p:spPr>
+        <p:txBody>
+          <a:bodyPr wrap="square" lIns="381" tIns="381" rIns="381" bIns="381" rtlCol="0" anchor="t">
+            <a:normAutofit/>
+          </a:bodyPr>
+          <a:lstStyle/>
+          <a:p>
+            <a:r>
+              <a:rPr lang="en-US" sz="1200" dirty="0">
+                <a:solidFill>
+                  <a:srgbClr val="1F1F1F"/>
+                </a:solidFill>
+                <a:latin typeface="Akatab" pitchFamily="34" charset="0"/>
+                <a:ea typeface="Akatab" pitchFamily="34" charset="-122"/>
+                <a:cs typeface="Akatab" pitchFamily="34" charset="-120"/>
+              </a:rPr>
+              <a:t>✓ Banking &amp; finance, insurance, fintech, retail, healthcare</a:t>
+            </a:r>
+            <a:endParaRPr lang="en-US" sz="1200" dirty="0"/>
+          </a:p>
+          <a:p>
+            <a:r>
+              <a:rPr lang="en-US" sz="1200" dirty="0">
+                <a:solidFill>
+                  <a:srgbClr val="1F1F1F"/>
+                </a:solidFill>
+                <a:latin typeface="Akatab" pitchFamily="34" charset="0"/>
+                <a:ea typeface="Akatab" pitchFamily="34" charset="-122"/>
+                <a:cs typeface="Akatab" pitchFamily="34" charset="-120"/>
+              </a:rPr>
+              <a:t>✓ Cargo &amp; shipping, airports, logistics, education, public sector</a:t>
+            </a:r>
+            <a:endParaRPr lang="en-US" sz="1200" dirty="0"/>
+          </a:p>
+          <a:p>
+            <a:r>
+              <a:rPr lang="en-US" sz="1200" dirty="0">
+                <a:solidFill>
+                  <a:srgbClr val="1F1F1F"/>
+                </a:solidFill>
+                <a:latin typeface="Akatab" pitchFamily="34" charset="0"/>
+                <a:ea typeface="Akatab" pitchFamily="34" charset="-122"/>
+                <a:cs typeface="Akatab" pitchFamily="34" charset="-120"/>
+              </a:rPr>
+              <a:t>✓ Exposure to both enterprise environments and fast-moving delivery teams</a:t>
+            </a:r>
+            <a:endParaRPr lang="en-US" sz="1200" dirty="0"/>
+          </a:p>
+          <a:p>
+            <a:r>
+              <a:rPr lang="en-US" sz="1200" dirty="0">
+                <a:solidFill>
+                  <a:srgbClr val="1F1F1F"/>
+                </a:solidFill>
+                <a:latin typeface="Akatab" pitchFamily="34" charset="0"/>
+                <a:ea typeface="Akatab" pitchFamily="34" charset="-122"/>
+                <a:cs typeface="Akatab" pitchFamily="34" charset="-120"/>
+              </a:rPr>
+              <a:t>✓ Useful for CTO roles that require range, not just one vertical</a:t>
+            </a:r>
+            <a:endParaRPr lang="en-US" sz="1200" dirty="0"/>
+          </a:p>
+        </p:txBody>
+      </p:sp>
+      <p:sp>
+        <p:nvSpPr>
+          <p:cNvPr id="18" name="Shape 16"/>
+          <p:cNvSpPr/>
+          <p:nvPr/>
+        </p:nvSpPr>
+        <p:spPr>
+          <a:xfrm>
+            <a:off x="822960" y="4407408"/>
+            <a:ext cx="10561320" cy="914400"/>
+          </a:xfrm>
+          <a:prstGeom prst="roundRect">
+            <a:avLst>
+              <a:gd name="adj" fmla="val 6000"/>
+            </a:avLst>
+          </a:prstGeom>
+          <a:solidFill>
+            <a:srgbClr val="F6F8FB"/>
+          </a:solidFill>
+          <a:ln w="12700">
+            <a:solidFill>
+              <a:srgbClr val="D8DCE4"/>
+            </a:solidFill>
+            <a:prstDash val="solid"/>
+          </a:ln>
+        </p:spPr>
+        <p:txBody>
+          <a:bodyPr lIns="91434" tIns="45718" rIns="91434" bIns="45718"/>
+          <a:lstStyle/>
+          <a:p>
+            <a:endParaRPr lang="en-US"/>
+          </a:p>
+        </p:txBody>
+      </p:sp>
+      <p:sp>
+        <p:nvSpPr>
+          <p:cNvPr id="19" name="Text 17"/>
+          <p:cNvSpPr/>
+          <p:nvPr/>
+        </p:nvSpPr>
+        <p:spPr>
+          <a:xfrm>
+            <a:off x="1024128" y="4590288"/>
+            <a:ext cx="1828800" cy="201168"/>
+          </a:xfrm>
+          <a:prstGeom prst="rect">
+            <a:avLst/>
+          </a:prstGeom>
+          <a:noFill/>
+          <a:ln/>
+        </p:spPr>
+        <p:txBody>
+          <a:bodyPr wrap="square" lIns="0" tIns="0" rIns="0" bIns="0" rtlCol="0" anchor="ctr"/>
+          <a:lstStyle/>
+          <a:p>
+            <a:r>
+              <a:rPr lang="en-US" sz="1300" b="1" dirty="0">
+                <a:solidFill>
+                  <a:srgbClr val="1F1F1F"/>
+                </a:solidFill>
+                <a:latin typeface="Akatab" pitchFamily="34" charset="0"/>
+                <a:ea typeface="Akatab" pitchFamily="34" charset="-122"/>
+                <a:cs typeface="Akatab" pitchFamily="34" charset="-120"/>
+              </a:rPr>
+              <a:t>Qualifications snapshot</a:t>
+            </a:r>
+            <a:endParaRPr lang="en-US" sz="1300" dirty="0"/>
+          </a:p>
+        </p:txBody>
+      </p:sp>
+      <p:sp>
+        <p:nvSpPr>
+          <p:cNvPr id="20" name="Text 18"/>
+          <p:cNvSpPr/>
+          <p:nvPr/>
+        </p:nvSpPr>
+        <p:spPr>
+          <a:xfrm>
+            <a:off x="2880360" y="4572000"/>
+            <a:ext cx="8092440" cy="219456"/>
+          </a:xfrm>
+          <a:prstGeom prst="rect">
+            <a:avLst/>
+          </a:prstGeom>
+          <a:noFill/>
+          <a:ln/>
+        </p:spPr>
+        <p:txBody>
+          <a:bodyPr wrap="square" lIns="0" tIns="0" rIns="0" bIns="0" rtlCol="0" anchor="ctr"/>
+          <a:lstStyle/>
+          <a:p>
+            <a:r>
+              <a:rPr lang="en-US" sz="1200" dirty="0">
+                <a:solidFill>
+                  <a:srgbClr val="5F6875"/>
+                </a:solidFill>
+                <a:latin typeface="Akatab" pitchFamily="34" charset="0"/>
+                <a:ea typeface="Akatab" pitchFamily="34" charset="-122"/>
+                <a:cs typeface="Akatab" pitchFamily="34" charset="-120"/>
+              </a:rPr>
+              <a:t>B.S. Computer Science • Lebanese American University • Arabic / English / French • Remote and cross-border delivery experience</a:t>
+            </a:r>
+            <a:endParaRPr lang="en-US" sz="1200" dirty="0"/>
+          </a:p>
+        </p:txBody>
+      </p:sp>
+    </p:spTree>
+  </p:cSld>
+  <p:clrMapOvr>
+    <a:masterClrMapping/>
+  </p:clrMapOvr>
+</p:sld>
+</file>
+
+<file path=ppt/slides/slide11.xml><?xml version="1.0" encoding="utf-8"?>
 <p:sld xmlns:a="http://schemas.openxmlformats.org/drawingml/2006/main" xmlns:r="http://schemas.openxmlformats.org/officeDocument/2006/relationships" xmlns:p="http://schemas.openxmlformats.org/presentationml/2006/main">
   <p:cSld name="Slide 9">
     <p:spTree>
@@ -2726,7 +4295,7 @@
         </p:blipFill>
         <p:spPr>
           <a:xfrm>
-            <a:off x="0" y="0"/>
+            <a:off x="5" y="0"/>
             <a:ext cx="12191695" cy="6858000"/>
           </a:xfrm>
           <a:prstGeom prst="rect">
@@ -2742,7 +4311,7 @@
         </p:nvSpPr>
         <p:spPr>
           <a:xfrm>
-            <a:off x="0" y="0"/>
+            <a:off x="5" y="0"/>
             <a:ext cx="12191695" cy="6858000"/>
           </a:xfrm>
           <a:prstGeom prst="rect">
@@ -2763,79 +4332,7 @@
           </a:ln>
         </p:spPr>
         <p:txBody>
-          <a:bodyPr/>
-          <a:lstStyle/>
-          <a:p>
-            <a:endParaRPr lang="en-US"/>
-          </a:p>
-        </p:txBody>
-      </p:sp>
-      <p:sp>
-        <p:nvSpPr>
-          <p:cNvPr id="4" name="Shape 1"/>
-          <p:cNvSpPr/>
-          <p:nvPr/>
-        </p:nvSpPr>
-        <p:spPr>
-          <a:xfrm>
-            <a:off x="5413248" y="292608"/>
-            <a:ext cx="384048" cy="64008"/>
-          </a:xfrm>
-          <a:prstGeom prst="roundRect">
-            <a:avLst>
-              <a:gd name="adj" fmla="val 42857"/>
-            </a:avLst>
-          </a:prstGeom>
-          <a:solidFill>
-            <a:srgbClr val="FFFFFF"/>
-          </a:solidFill>
-          <a:ln w="12700">
-            <a:solidFill>
-              <a:srgbClr val="FFFFFF">
-                <a:alpha val="0"/>
-              </a:srgbClr>
-            </a:solidFill>
-            <a:prstDash val="solid"/>
-          </a:ln>
-        </p:spPr>
-        <p:txBody>
-          <a:bodyPr/>
-          <a:lstStyle/>
-          <a:p>
-            <a:endParaRPr lang="en-US"/>
-          </a:p>
-        </p:txBody>
-      </p:sp>
-      <p:sp>
-        <p:nvSpPr>
-          <p:cNvPr id="5" name="Shape 2"/>
-          <p:cNvSpPr/>
-          <p:nvPr/>
-        </p:nvSpPr>
-        <p:spPr>
-          <a:xfrm>
-            <a:off x="11475720" y="2057400"/>
-            <a:ext cx="45720" cy="475488"/>
-          </a:xfrm>
-          <a:prstGeom prst="roundRect">
-            <a:avLst>
-              <a:gd name="adj" fmla="val 40000"/>
-            </a:avLst>
-          </a:prstGeom>
-          <a:solidFill>
-            <a:srgbClr val="FFFFFF"/>
-          </a:solidFill>
-          <a:ln w="12700">
-            <a:solidFill>
-              <a:srgbClr val="FFFFFF">
-                <a:alpha val="0"/>
-              </a:srgbClr>
-            </a:solidFill>
-            <a:prstDash val="solid"/>
-          </a:ln>
-        </p:spPr>
-        <p:txBody>
-          <a:bodyPr/>
+          <a:bodyPr lIns="91434" tIns="45718" rIns="91434" bIns="45718"/>
           <a:lstStyle/>
           <a:p>
             <a:endParaRPr lang="en-US"/>
@@ -2863,9 +4360,6 @@
           <a:bodyPr wrap="square" lIns="0" tIns="0" rIns="0" bIns="0" rtlCol="0" anchor="ctr"/>
           <a:lstStyle/>
           <a:p>
-            <a:pPr marL="0" indent="0" algn="l">
-              <a:buNone/>
-            </a:pPr>
             <a:r>
               <a:rPr lang="en-US" sz="2800" dirty="0">
                 <a:solidFill>
@@ -2875,7 +4369,7 @@
                 <a:ea typeface="Akatab" pitchFamily="34" charset="-122"/>
                 <a:cs typeface="Akatab" pitchFamily="34" charset="-120"/>
               </a:rPr>
-              <a:t>3. How I Operate</a:t>
+              <a:t>4. How I Operate</a:t>
             </a:r>
             <a:endParaRPr lang="en-US" sz="2800" dirty="0"/>
           </a:p>
@@ -2889,7 +4383,7 @@
 </p:sld>
 </file>
 
-<file path=ppt/slides/slide11.xml><?xml version="1.0" encoding="utf-8"?>
+<file path=ppt/slides/slide12.xml><?xml version="1.0" encoding="utf-8"?>
 <p:sld xmlns:a="http://schemas.openxmlformats.org/drawingml/2006/main" xmlns:r="http://schemas.openxmlformats.org/officeDocument/2006/relationships" xmlns:p="http://schemas.openxmlformats.org/presentationml/2006/main">
   <p:cSld name="Slide 10">
     <p:bg>
@@ -2922,7 +4416,7 @@
         </p:nvSpPr>
         <p:spPr>
           <a:xfrm>
-            <a:off x="0" y="0"/>
+            <a:off x="5" y="0"/>
             <a:ext cx="12191695" cy="6858000"/>
           </a:xfrm>
           <a:prstGeom prst="rect">
@@ -2941,7 +4435,7 @@
           </a:ln>
         </p:spPr>
         <p:txBody>
-          <a:bodyPr/>
+          <a:bodyPr lIns="91434" tIns="45718" rIns="91434" bIns="45718"/>
           <a:lstStyle/>
           <a:p>
             <a:endParaRPr lang="en-US"/>
@@ -2969,9 +4463,6 @@
           <a:bodyPr wrap="square" lIns="0" tIns="0" rIns="0" bIns="0" rtlCol="0" anchor="ctr"/>
           <a:lstStyle/>
           <a:p>
-            <a:pPr marL="0" indent="0">
-              <a:buNone/>
-            </a:pPr>
             <a:r>
               <a:rPr lang="en-US" sz="2300" b="1" dirty="0">
                 <a:solidFill>
@@ -3016,7 +4507,7 @@
           </a:ln>
         </p:spPr>
         <p:txBody>
-          <a:bodyPr/>
+          <a:bodyPr lIns="91434" tIns="45718" rIns="91434" bIns="45718"/>
           <a:lstStyle/>
           <a:p>
             <a:endParaRPr lang="en-US"/>
@@ -3052,7 +4543,7 @@
           </a:ln>
         </p:spPr>
         <p:txBody>
-          <a:bodyPr/>
+          <a:bodyPr lIns="91434" tIns="45718" rIns="91434" bIns="45718"/>
           <a:lstStyle/>
           <a:p>
             <a:endParaRPr lang="en-US"/>
@@ -3086,7 +4577,7 @@
           </a:ln>
         </p:spPr>
         <p:txBody>
-          <a:bodyPr/>
+          <a:bodyPr lIns="91434" tIns="45718" rIns="91434" bIns="45718"/>
           <a:lstStyle/>
           <a:p>
             <a:endParaRPr lang="en-US"/>
@@ -3114,11 +4605,9 @@
           <a:bodyPr wrap="square" lIns="0" tIns="0" rIns="0" bIns="0" rtlCol="0" anchor="ctr"/>
           <a:lstStyle/>
           <a:p>
-            <a:pPr marL="0" indent="0" algn="ctr">
-              <a:buNone/>
-            </a:pPr>
-            <a:r>
-              <a:rPr lang="en-US" sz="1320" b="1" dirty="0">
+            <a:pPr algn="ctr"/>
+            <a:r>
+              <a:rPr lang="en-US" sz="1300" b="1" dirty="0">
                 <a:solidFill>
                   <a:srgbClr val="FFFFFF"/>
                 </a:solidFill>
@@ -3128,7 +4617,7 @@
               </a:rPr>
               <a:t>1. Assess</a:t>
             </a:r>
-            <a:endParaRPr lang="en-US" sz="1320" dirty="0"/>
+            <a:endParaRPr lang="en-US" sz="1300" dirty="0"/>
           </a:p>
         </p:txBody>
       </p:sp>
@@ -3155,7 +4644,7 @@
           </a:ln>
         </p:spPr>
         <p:txBody>
-          <a:bodyPr/>
+          <a:bodyPr lIns="91434" tIns="45718" rIns="91434" bIns="45718"/>
           <a:lstStyle/>
           <a:p>
             <a:endParaRPr lang="en-US"/>
@@ -3187,7 +4676,7 @@
           </a:ln>
         </p:spPr>
         <p:txBody>
-          <a:bodyPr/>
+          <a:bodyPr lIns="91434" tIns="45718" rIns="91434" bIns="45718"/>
           <a:lstStyle/>
           <a:p>
             <a:endParaRPr lang="en-US"/>
@@ -3219,7 +4708,7 @@
           </a:ln>
         </p:spPr>
         <p:txBody>
-          <a:bodyPr/>
+          <a:bodyPr lIns="91434" tIns="45718" rIns="91434" bIns="45718"/>
           <a:lstStyle/>
           <a:p>
             <a:endParaRPr lang="en-US"/>
@@ -3247,11 +4736,9 @@
           <a:bodyPr wrap="square" lIns="381" tIns="381" rIns="381" bIns="381" rtlCol="0" anchor="ctr"/>
           <a:lstStyle/>
           <a:p>
-            <a:pPr marL="0" indent="0" algn="ctr">
-              <a:buNone/>
-            </a:pPr>
-            <a:r>
-              <a:rPr lang="en-US" sz="1080" dirty="0">
+            <a:pPr algn="ctr"/>
+            <a:r>
+              <a:rPr lang="en-US" sz="1100" dirty="0">
                 <a:solidFill>
                   <a:srgbClr val="1F1F1F"/>
                 </a:solidFill>
@@ -3261,7 +4748,7 @@
               </a:rPr>
               <a:t>Current stack, delivery bottlenecks, technical debt, risk, team capability</a:t>
             </a:r>
-            <a:endParaRPr lang="en-US" sz="1080" dirty="0"/>
+            <a:endParaRPr lang="en-US" sz="1100" dirty="0"/>
           </a:p>
         </p:txBody>
       </p:sp>
@@ -3292,7 +4779,7 @@
           </a:ln>
         </p:spPr>
         <p:txBody>
-          <a:bodyPr/>
+          <a:bodyPr lIns="91434" tIns="45718" rIns="91434" bIns="45718"/>
           <a:lstStyle/>
           <a:p>
             <a:endParaRPr lang="en-US"/>
@@ -3320,11 +4807,9 @@
           <a:bodyPr wrap="square" lIns="0" tIns="0" rIns="0" bIns="0" rtlCol="0" anchor="ctr"/>
           <a:lstStyle/>
           <a:p>
-            <a:pPr marL="0" indent="0" algn="ctr">
-              <a:buNone/>
-            </a:pPr>
-            <a:r>
-              <a:rPr lang="en-US" sz="1320" b="1" dirty="0">
+            <a:pPr algn="ctr"/>
+            <a:r>
+              <a:rPr lang="en-US" sz="1300" b="1" dirty="0">
                 <a:solidFill>
                   <a:srgbClr val="FFFFFF"/>
                 </a:solidFill>
@@ -3334,7 +4819,7 @@
               </a:rPr>
               <a:t>2. Align</a:t>
             </a:r>
-            <a:endParaRPr lang="en-US" sz="1320" dirty="0"/>
+            <a:endParaRPr lang="en-US" sz="1300" dirty="0"/>
           </a:p>
         </p:txBody>
       </p:sp>
@@ -3361,7 +4846,7 @@
           </a:ln>
         </p:spPr>
         <p:txBody>
-          <a:bodyPr/>
+          <a:bodyPr lIns="91434" tIns="45718" rIns="91434" bIns="45718"/>
           <a:lstStyle/>
           <a:p>
             <a:endParaRPr lang="en-US"/>
@@ -3393,7 +4878,7 @@
           </a:ln>
         </p:spPr>
         <p:txBody>
-          <a:bodyPr/>
+          <a:bodyPr lIns="91434" tIns="45718" rIns="91434" bIns="45718"/>
           <a:lstStyle/>
           <a:p>
             <a:endParaRPr lang="en-US"/>
@@ -3425,7 +4910,7 @@
           </a:ln>
         </p:spPr>
         <p:txBody>
-          <a:bodyPr/>
+          <a:bodyPr lIns="91434" tIns="45718" rIns="91434" bIns="45718"/>
           <a:lstStyle/>
           <a:p>
             <a:endParaRPr lang="en-US"/>
@@ -3453,11 +4938,9 @@
           <a:bodyPr wrap="square" lIns="381" tIns="381" rIns="381" bIns="381" rtlCol="0" anchor="ctr"/>
           <a:lstStyle/>
           <a:p>
-            <a:pPr marL="0" indent="0" algn="ctr">
-              <a:buNone/>
-            </a:pPr>
-            <a:r>
-              <a:rPr lang="en-US" sz="1080" dirty="0">
+            <a:pPr algn="ctr"/>
+            <a:r>
+              <a:rPr lang="en-US" sz="1100" dirty="0">
                 <a:solidFill>
                   <a:srgbClr val="1F1F1F"/>
                 </a:solidFill>
@@ -3467,7 +4950,7 @@
               </a:rPr>
               <a:t>Business priorities, ownership, roadmap, KPIs, build-vs-buy decisions</a:t>
             </a:r>
-            <a:endParaRPr lang="en-US" sz="1080" dirty="0"/>
+            <a:endParaRPr lang="en-US" sz="1100" dirty="0"/>
           </a:p>
         </p:txBody>
       </p:sp>
@@ -3498,7 +4981,7 @@
           </a:ln>
         </p:spPr>
         <p:txBody>
-          <a:bodyPr/>
+          <a:bodyPr lIns="91434" tIns="45718" rIns="91434" bIns="45718"/>
           <a:lstStyle/>
           <a:p>
             <a:endParaRPr lang="en-US"/>
@@ -3526,11 +5009,9 @@
           <a:bodyPr wrap="square" lIns="0" tIns="0" rIns="0" bIns="0" rtlCol="0" anchor="ctr"/>
           <a:lstStyle/>
           <a:p>
-            <a:pPr marL="0" indent="0" algn="ctr">
-              <a:buNone/>
-            </a:pPr>
-            <a:r>
-              <a:rPr lang="en-US" sz="1320" b="1" dirty="0">
+            <a:pPr algn="ctr"/>
+            <a:r>
+              <a:rPr lang="en-US" sz="1300" b="1" dirty="0">
                 <a:solidFill>
                   <a:srgbClr val="FFFFFF"/>
                 </a:solidFill>
@@ -3540,7 +5021,7 @@
               </a:rPr>
               <a:t>3. Architect</a:t>
             </a:r>
-            <a:endParaRPr lang="en-US" sz="1320" dirty="0"/>
+            <a:endParaRPr lang="en-US" sz="1300" dirty="0"/>
           </a:p>
         </p:txBody>
       </p:sp>
@@ -3567,7 +5048,7 @@
           </a:ln>
         </p:spPr>
         <p:txBody>
-          <a:bodyPr/>
+          <a:bodyPr lIns="91434" tIns="45718" rIns="91434" bIns="45718"/>
           <a:lstStyle/>
           <a:p>
             <a:endParaRPr lang="en-US"/>
@@ -3599,7 +5080,7 @@
           </a:ln>
         </p:spPr>
         <p:txBody>
-          <a:bodyPr/>
+          <a:bodyPr lIns="91434" tIns="45718" rIns="91434" bIns="45718"/>
           <a:lstStyle/>
           <a:p>
             <a:endParaRPr lang="en-US"/>
@@ -3631,7 +5112,7 @@
           </a:ln>
         </p:spPr>
         <p:txBody>
-          <a:bodyPr/>
+          <a:bodyPr lIns="91434" tIns="45718" rIns="91434" bIns="45718"/>
           <a:lstStyle/>
           <a:p>
             <a:endParaRPr lang="en-US"/>
@@ -3659,11 +5140,9 @@
           <a:bodyPr wrap="square" lIns="381" tIns="381" rIns="381" bIns="381" rtlCol="0" anchor="ctr"/>
           <a:lstStyle/>
           <a:p>
-            <a:pPr marL="0" indent="0" algn="ctr">
-              <a:buNone/>
-            </a:pPr>
-            <a:r>
-              <a:rPr lang="en-US" sz="1080" dirty="0">
+            <a:pPr algn="ctr"/>
+            <a:r>
+              <a:rPr lang="en-US" sz="1100" dirty="0">
                 <a:solidFill>
                   <a:srgbClr val="1F1F1F"/>
                 </a:solidFill>
@@ -3673,7 +5152,7 @@
               </a:rPr>
               <a:t>Target architecture, platform standards, data flows, security guardrails</a:t>
             </a:r>
-            <a:endParaRPr lang="en-US" sz="1080" dirty="0"/>
+            <a:endParaRPr lang="en-US" sz="1100" dirty="0"/>
           </a:p>
         </p:txBody>
       </p:sp>
@@ -3704,7 +5183,7 @@
           </a:ln>
         </p:spPr>
         <p:txBody>
-          <a:bodyPr/>
+          <a:bodyPr lIns="91434" tIns="45718" rIns="91434" bIns="45718"/>
           <a:lstStyle/>
           <a:p>
             <a:endParaRPr lang="en-US"/>
@@ -3732,11 +5211,9 @@
           <a:bodyPr wrap="square" lIns="0" tIns="0" rIns="0" bIns="0" rtlCol="0" anchor="ctr"/>
           <a:lstStyle/>
           <a:p>
-            <a:pPr marL="0" indent="0" algn="ctr">
-              <a:buNone/>
-            </a:pPr>
-            <a:r>
-              <a:rPr lang="en-US" sz="1320" b="1" dirty="0">
+            <a:pPr algn="ctr"/>
+            <a:r>
+              <a:rPr lang="en-US" sz="1300" b="1" dirty="0">
                 <a:solidFill>
                   <a:srgbClr val="FFFFFF"/>
                 </a:solidFill>
@@ -3746,7 +5223,7 @@
               </a:rPr>
               <a:t>4. Execute</a:t>
             </a:r>
-            <a:endParaRPr lang="en-US" sz="1320" dirty="0"/>
+            <a:endParaRPr lang="en-US" sz="1300" dirty="0"/>
           </a:p>
         </p:txBody>
       </p:sp>
@@ -3773,7 +5250,7 @@
           </a:ln>
         </p:spPr>
         <p:txBody>
-          <a:bodyPr/>
+          <a:bodyPr lIns="91434" tIns="45718" rIns="91434" bIns="45718"/>
           <a:lstStyle/>
           <a:p>
             <a:endParaRPr lang="en-US"/>
@@ -3805,7 +5282,7 @@
           </a:ln>
         </p:spPr>
         <p:txBody>
-          <a:bodyPr/>
+          <a:bodyPr lIns="91434" tIns="45718" rIns="91434" bIns="45718"/>
           <a:lstStyle/>
           <a:p>
             <a:endParaRPr lang="en-US"/>
@@ -3837,7 +5314,7 @@
           </a:ln>
         </p:spPr>
         <p:txBody>
-          <a:bodyPr/>
+          <a:bodyPr lIns="91434" tIns="45718" rIns="91434" bIns="45718"/>
           <a:lstStyle/>
           <a:p>
             <a:endParaRPr lang="en-US"/>
@@ -3865,11 +5342,9 @@
           <a:bodyPr wrap="square" lIns="381" tIns="381" rIns="381" bIns="381" rtlCol="0" anchor="ctr"/>
           <a:lstStyle/>
           <a:p>
-            <a:pPr marL="0" indent="0" algn="ctr">
-              <a:buNone/>
-            </a:pPr>
-            <a:r>
-              <a:rPr lang="en-US" sz="1080" dirty="0">
+            <a:pPr algn="ctr"/>
+            <a:r>
+              <a:rPr lang="en-US" sz="1100" dirty="0">
                 <a:solidFill>
                   <a:srgbClr val="1F1F1F"/>
                 </a:solidFill>
@@ -3879,7 +5354,7 @@
               </a:rPr>
               <a:t>Delivery cadence, reviews, quick wins, release discipline, communication</a:t>
             </a:r>
-            <a:endParaRPr lang="en-US" sz="1080" dirty="0"/>
+            <a:endParaRPr lang="en-US" sz="1100" dirty="0"/>
           </a:p>
         </p:txBody>
       </p:sp>
@@ -3910,7 +5385,7 @@
           </a:ln>
         </p:spPr>
         <p:txBody>
-          <a:bodyPr/>
+          <a:bodyPr lIns="91434" tIns="45718" rIns="91434" bIns="45718"/>
           <a:lstStyle/>
           <a:p>
             <a:endParaRPr lang="en-US"/>
@@ -3938,11 +5413,9 @@
           <a:bodyPr wrap="square" lIns="0" tIns="0" rIns="0" bIns="0" rtlCol="0" anchor="ctr"/>
           <a:lstStyle/>
           <a:p>
-            <a:pPr marL="0" indent="0" algn="ctr">
-              <a:buNone/>
-            </a:pPr>
-            <a:r>
-              <a:rPr lang="en-US" sz="1320" b="1" dirty="0">
+            <a:pPr algn="ctr"/>
+            <a:r>
+              <a:rPr lang="en-US" sz="1300" b="1" dirty="0">
                 <a:solidFill>
                   <a:srgbClr val="FFFFFF"/>
                 </a:solidFill>
@@ -3952,7 +5425,7 @@
               </a:rPr>
               <a:t>5. Scale</a:t>
             </a:r>
-            <a:endParaRPr lang="en-US" sz="1320" dirty="0"/>
+            <a:endParaRPr lang="en-US" sz="1300" dirty="0"/>
           </a:p>
         </p:txBody>
       </p:sp>
@@ -3979,7 +5452,7 @@
           </a:ln>
         </p:spPr>
         <p:txBody>
-          <a:bodyPr/>
+          <a:bodyPr lIns="91434" tIns="45718" rIns="91434" bIns="45718"/>
           <a:lstStyle/>
           <a:p>
             <a:endParaRPr lang="en-US"/>
@@ -4011,7 +5484,7 @@
           </a:ln>
         </p:spPr>
         <p:txBody>
-          <a:bodyPr/>
+          <a:bodyPr lIns="91434" tIns="45718" rIns="91434" bIns="45718"/>
           <a:lstStyle/>
           <a:p>
             <a:endParaRPr lang="en-US"/>
@@ -4043,7 +5516,7 @@
           </a:ln>
         </p:spPr>
         <p:txBody>
-          <a:bodyPr/>
+          <a:bodyPr lIns="91434" tIns="45718" rIns="91434" bIns="45718"/>
           <a:lstStyle/>
           <a:p>
             <a:endParaRPr lang="en-US"/>
@@ -4071,11 +5544,9 @@
           <a:bodyPr wrap="square" lIns="381" tIns="381" rIns="381" bIns="381" rtlCol="0" anchor="ctr"/>
           <a:lstStyle/>
           <a:p>
-            <a:pPr marL="0" indent="0" algn="ctr">
-              <a:buNone/>
-            </a:pPr>
-            <a:r>
-              <a:rPr lang="en-US" sz="1080" dirty="0">
+            <a:pPr algn="ctr"/>
+            <a:r>
+              <a:rPr lang="en-US" sz="1100" dirty="0">
                 <a:solidFill>
                   <a:srgbClr val="1F1F1F"/>
                 </a:solidFill>
@@ -4085,7 +5556,7 @@
               </a:rPr>
               <a:t>Automation, documentation, hiring, monitoring, continuous improvement</a:t>
             </a:r>
-            <a:endParaRPr lang="en-US" sz="1080" dirty="0"/>
+            <a:endParaRPr lang="en-US" sz="1100" dirty="0"/>
           </a:p>
         </p:txBody>
       </p:sp>
@@ -4110,11 +5581,9 @@
           <a:bodyPr wrap="square" lIns="0" tIns="0" rIns="0" bIns="0" rtlCol="0" anchor="ctr"/>
           <a:lstStyle/>
           <a:p>
-            <a:pPr marL="0" indent="0" algn="ctr">
-              <a:buNone/>
-            </a:pPr>
-            <a:r>
-              <a:rPr lang="en-US" sz="1230" dirty="0">
+            <a:pPr algn="ctr"/>
+            <a:r>
+              <a:rPr lang="en-US" sz="1200" dirty="0">
                 <a:solidFill>
                   <a:srgbClr val="5F6875"/>
                 </a:solidFill>
@@ -4124,7 +5593,7 @@
               </a:rPr>
               <a:t>This is the operating model I would bring into a CTO role: assess fast, align clearly, architect thoughtfully, execute hands-on, and scale with discipline.</a:t>
             </a:r>
-            <a:endParaRPr lang="en-US" sz="1230" dirty="0"/>
+            <a:endParaRPr lang="en-US" sz="1200" dirty="0"/>
           </a:p>
         </p:txBody>
       </p:sp>
@@ -4136,7 +5605,452 @@
 </p:sld>
 </file>
 
-<file path=ppt/slides/slide12.xml><?xml version="1.0" encoding="utf-8"?>
+<file path=ppt/slides/slide13.xml><?xml version="1.0" encoding="utf-8"?>
+<p:sld xmlns:a="http://schemas.openxmlformats.org/drawingml/2006/main" xmlns:r="http://schemas.openxmlformats.org/officeDocument/2006/relationships" xmlns:p="http://schemas.openxmlformats.org/presentationml/2006/main">
+  <p:cSld>
+    <p:spTree>
+      <p:nvGrpSpPr>
+        <p:cNvPr id="1" name=""/>
+        <p:cNvGrpSpPr/>
+        <p:nvPr/>
+      </p:nvGrpSpPr>
+      <p:grpSpPr>
+        <a:xfrm>
+          <a:off x="0" y="0"/>
+          <a:ext cx="0" cy="0"/>
+          <a:chOff x="0" y="0"/>
+          <a:chExt cx="0" cy="0"/>
+        </a:xfrm>
+      </p:grpSpPr>
+      <p:sp>
+        <p:nvSpPr>
+          <p:cNvPr id="5" name="Shape 3">
+            <a:extLst>
+              <a:ext uri="{FF2B5EF4-FFF2-40B4-BE49-F238E27FC236}">
+                <a16:creationId xmlns:a16="http://schemas.microsoft.com/office/drawing/2014/main" id="{06C962D8-7E6E-20BD-4961-1C9359B050CB}"/>
+              </a:ext>
+            </a:extLst>
+          </p:cNvPr>
+          <p:cNvSpPr/>
+          <p:nvPr/>
+        </p:nvSpPr>
+        <p:spPr>
+          <a:xfrm>
+            <a:off x="502920" y="6547104"/>
+            <a:ext cx="11137392" cy="27432"/>
+          </a:xfrm>
+          <a:prstGeom prst="roundRect">
+            <a:avLst>
+              <a:gd name="adj" fmla="val 33333"/>
+            </a:avLst>
+          </a:prstGeom>
+          <a:solidFill>
+            <a:srgbClr val="D6943C"/>
+          </a:solidFill>
+          <a:ln w="12700">
+            <a:solidFill>
+              <a:srgbClr val="D6943C">
+                <a:alpha val="0"/>
+              </a:srgbClr>
+            </a:solidFill>
+            <a:prstDash val="solid"/>
+          </a:ln>
+        </p:spPr>
+        <p:txBody>
+          <a:bodyPr lIns="91434" tIns="45718" rIns="91434" bIns="45718"/>
+          <a:lstStyle/>
+          <a:p>
+            <a:endParaRPr lang="en-US"/>
+          </a:p>
+        </p:txBody>
+      </p:sp>
+      <p:sp>
+        <p:nvSpPr>
+          <p:cNvPr id="7" name="Text 1">
+            <a:extLst>
+              <a:ext uri="{FF2B5EF4-FFF2-40B4-BE49-F238E27FC236}">
+                <a16:creationId xmlns:a16="http://schemas.microsoft.com/office/drawing/2014/main" id="{9BD8164C-1750-7C0D-9819-6575C1D437CD}"/>
+              </a:ext>
+            </a:extLst>
+          </p:cNvPr>
+          <p:cNvSpPr/>
+          <p:nvPr/>
+        </p:nvSpPr>
+        <p:spPr>
+          <a:xfrm>
+            <a:off x="502920" y="228600"/>
+            <a:ext cx="9509760" cy="347472"/>
+          </a:xfrm>
+          <a:prstGeom prst="rect">
+            <a:avLst/>
+          </a:prstGeom>
+          <a:noFill/>
+          <a:ln/>
+        </p:spPr>
+        <p:txBody>
+          <a:bodyPr wrap="square" lIns="0" tIns="0" rIns="0" bIns="0" rtlCol="0" anchor="ctr"/>
+          <a:lstStyle/>
+          <a:p>
+            <a:r>
+              <a:rPr lang="en-US" sz="2400" b="1" dirty="0"/>
+              <a:t>My Working Models</a:t>
+            </a:r>
+            <a:endParaRPr lang="en-US" sz="2300" dirty="0"/>
+          </a:p>
+        </p:txBody>
+      </p:sp>
+      <p:sp>
+        <p:nvSpPr>
+          <p:cNvPr id="8" name="Shape 2">
+            <a:extLst>
+              <a:ext uri="{FF2B5EF4-FFF2-40B4-BE49-F238E27FC236}">
+                <a16:creationId xmlns:a16="http://schemas.microsoft.com/office/drawing/2014/main" id="{F38F1969-76FD-5B2D-733A-20DF61786F25}"/>
+              </a:ext>
+            </a:extLst>
+          </p:cNvPr>
+          <p:cNvSpPr/>
+          <p:nvPr/>
+        </p:nvSpPr>
+        <p:spPr>
+          <a:xfrm>
+            <a:off x="10817352" y="201168"/>
+            <a:ext cx="475488" cy="73152"/>
+          </a:xfrm>
+          <a:prstGeom prst="roundRect">
+            <a:avLst>
+              <a:gd name="adj" fmla="val 37500"/>
+            </a:avLst>
+          </a:prstGeom>
+          <a:solidFill>
+            <a:srgbClr val="0B0B0B"/>
+          </a:solidFill>
+          <a:ln w="12700">
+            <a:solidFill>
+              <a:srgbClr val="0B0B0B">
+                <a:alpha val="0"/>
+              </a:srgbClr>
+            </a:solidFill>
+            <a:prstDash val="solid"/>
+          </a:ln>
+        </p:spPr>
+        <p:txBody>
+          <a:bodyPr lIns="91434" tIns="45718" rIns="91434" bIns="45718"/>
+          <a:lstStyle/>
+          <a:p>
+            <a:endParaRPr lang="en-US"/>
+          </a:p>
+        </p:txBody>
+      </p:sp>
+      <p:sp>
+        <p:nvSpPr>
+          <p:cNvPr id="9" name="TextBox 8">
+            <a:extLst>
+              <a:ext uri="{FF2B5EF4-FFF2-40B4-BE49-F238E27FC236}">
+                <a16:creationId xmlns:a16="http://schemas.microsoft.com/office/drawing/2014/main" id="{95F3C0C9-7B24-67D4-DE8D-5D0D6A7D7B9D}"/>
+              </a:ext>
+            </a:extLst>
+          </p:cNvPr>
+          <p:cNvSpPr txBox="1"/>
+          <p:nvPr/>
+        </p:nvSpPr>
+        <p:spPr>
+          <a:xfrm>
+            <a:off x="1166884" y="997678"/>
+            <a:ext cx="10125956" cy="4278094"/>
+          </a:xfrm>
+          <a:prstGeom prst="rect">
+            <a:avLst/>
+          </a:prstGeom>
+          <a:noFill/>
+        </p:spPr>
+        <p:txBody>
+          <a:bodyPr wrap="square" rtlCol="0">
+            <a:spAutoFit/>
+          </a:bodyPr>
+          <a:lstStyle/>
+          <a:p>
+            <a:r>
+              <a:rPr lang="en-US" sz="1600" dirty="0"/>
+              <a:t>💼  </a:t>
+            </a:r>
+            <a:r>
+              <a:rPr lang="en-US" sz="1600" b="1" dirty="0"/>
+              <a:t>Full-Time CTO</a:t>
+            </a:r>
+            <a:br>
+              <a:rPr lang="en-US" sz="1600" b="1" dirty="0"/>
+            </a:br>
+            <a:r>
+              <a:rPr lang="en-US" sz="1600" dirty="0"/>
+              <a:t>Embedded leadership, long-term vision</a:t>
+            </a:r>
+          </a:p>
+          <a:p>
+            <a:endParaRPr lang="en-US" sz="1600" dirty="0"/>
+          </a:p>
+          <a:p>
+            <a:r>
+              <a:rPr lang="en-US" sz="1600" dirty="0"/>
+              <a:t>💎  </a:t>
+            </a:r>
+            <a:r>
+              <a:rPr lang="en-US" sz="1600" b="1" dirty="0"/>
+              <a:t>Fractional CTO</a:t>
+            </a:r>
+            <a:br>
+              <a:rPr lang="en-US" sz="1600" b="1" dirty="0"/>
+            </a:br>
+            <a:r>
+              <a:rPr lang="en-US" sz="1600" dirty="0"/>
+              <a:t>Part-time, high-impact leadership</a:t>
+            </a:r>
+          </a:p>
+          <a:p>
+            <a:endParaRPr lang="en-US" sz="1600" dirty="0"/>
+          </a:p>
+          <a:p>
+            <a:r>
+              <a:rPr lang="en-US" sz="1600" dirty="0"/>
+              <a:t>🛠  </a:t>
+            </a:r>
+            <a:r>
+              <a:rPr lang="en-US" sz="1600" b="1" dirty="0"/>
+              <a:t>Freelance/Consulting</a:t>
+            </a:r>
+            <a:br>
+              <a:rPr lang="en-US" sz="1600" b="1" dirty="0"/>
+            </a:br>
+            <a:r>
+              <a:rPr lang="en-US" sz="1600" dirty="0"/>
+              <a:t>Project-based, execution-driven</a:t>
+            </a:r>
+          </a:p>
+          <a:p>
+            <a:endParaRPr lang="en-US" sz="1600" dirty="0"/>
+          </a:p>
+          <a:p>
+            <a:r>
+              <a:rPr lang="en-US" sz="1600" dirty="0"/>
+              <a:t>🕒  </a:t>
+            </a:r>
+            <a:r>
+              <a:rPr lang="en-US" sz="1600" b="1" dirty="0"/>
+              <a:t>Hourly/Part-Time</a:t>
+            </a:r>
+            <a:br>
+              <a:rPr lang="en-US" sz="1600" b="1" dirty="0"/>
+            </a:br>
+            <a:r>
+              <a:rPr lang="en-US" sz="1600" dirty="0"/>
+              <a:t>Flexible, targeted problem-solving</a:t>
+            </a:r>
+          </a:p>
+          <a:p>
+            <a:endParaRPr lang="en-US" sz="1600" dirty="0"/>
+          </a:p>
+          <a:p>
+            <a:r>
+              <a:rPr lang="en-US" sz="1600" dirty="0"/>
+              <a:t>🛠  </a:t>
+            </a:r>
+            <a:r>
+              <a:rPr lang="en-US" sz="1600" b="1" dirty="0"/>
+              <a:t>Volunteer-Based</a:t>
+            </a:r>
+            <a:br>
+              <a:rPr lang="en-US" sz="1600" b="1" dirty="0"/>
+            </a:br>
+            <a:r>
+              <a:rPr lang="en-US" sz="1600" dirty="0"/>
+              <a:t>Supporting early-stage ideas and mission-driven teams</a:t>
+            </a:r>
+          </a:p>
+          <a:p>
+            <a:endParaRPr lang="en-US" sz="1600" dirty="0"/>
+          </a:p>
+          <a:p>
+            <a:r>
+              <a:rPr lang="en-US" sz="1600" dirty="0"/>
+              <a:t>💎  </a:t>
+            </a:r>
+            <a:r>
+              <a:rPr lang="en-US" sz="1600" b="1" dirty="0"/>
+              <a:t>Equity-Based</a:t>
+            </a:r>
+            <a:br>
+              <a:rPr lang="en-US" sz="1600" b="1" dirty="0"/>
+            </a:br>
+            <a:r>
+              <a:rPr lang="en-US" sz="1600" dirty="0"/>
+              <a:t>Partnering with startups in exchange for ownership and long-term growth</a:t>
+            </a:r>
+            <a:endParaRPr lang="en-US" sz="1600" dirty="0">
+              <a:effectLst/>
+            </a:endParaRPr>
+          </a:p>
+        </p:txBody>
+      </p:sp>
+    </p:spTree>
+  </p:cSld>
+  <p:clrMapOvr>
+    <a:masterClrMapping/>
+  </p:clrMapOvr>
+</p:sld>
+</file>
+
+<file path=ppt/slides/slide14.xml><?xml version="1.0" encoding="utf-8"?>
+<p:sld xmlns:a="http://schemas.openxmlformats.org/drawingml/2006/main" xmlns:r="http://schemas.openxmlformats.org/officeDocument/2006/relationships" xmlns:p="http://schemas.openxmlformats.org/presentationml/2006/main">
+  <p:cSld>
+    <p:spTree>
+      <p:nvGrpSpPr>
+        <p:cNvPr id="1" name="">
+          <a:extLst>
+            <a:ext uri="{FF2B5EF4-FFF2-40B4-BE49-F238E27FC236}">
+              <a16:creationId xmlns:a16="http://schemas.microsoft.com/office/drawing/2014/main" id="{B2832C8F-708D-7415-DF50-A4C8E5B2CC4C}"/>
+            </a:ext>
+          </a:extLst>
+        </p:cNvPr>
+        <p:cNvGrpSpPr/>
+        <p:nvPr/>
+      </p:nvGrpSpPr>
+      <p:grpSpPr>
+        <a:xfrm>
+          <a:off x="0" y="0"/>
+          <a:ext cx="0" cy="0"/>
+          <a:chOff x="0" y="0"/>
+          <a:chExt cx="0" cy="0"/>
+        </a:xfrm>
+      </p:grpSpPr>
+      <p:pic>
+        <p:nvPicPr>
+          <p:cNvPr id="2" name="Image 0" descr="/mnt/data/a_full_screen_ultra_high_resolution_abstract_fu.png">
+            <a:extLst>
+              <a:ext uri="{FF2B5EF4-FFF2-40B4-BE49-F238E27FC236}">
+                <a16:creationId xmlns:a16="http://schemas.microsoft.com/office/drawing/2014/main" id="{7E926145-4A29-2ECE-C05D-D48C84A99334}"/>
+              </a:ext>
+            </a:extLst>
+          </p:cNvPr>
+          <p:cNvPicPr>
+            <a:picLocks noChangeAspect="1"/>
+          </p:cNvPicPr>
+          <p:nvPr/>
+        </p:nvPicPr>
+        <p:blipFill>
+          <a:blip r:embed="rId3"/>
+          <a:stretch>
+            <a:fillRect/>
+          </a:stretch>
+        </p:blipFill>
+        <p:spPr>
+          <a:xfrm>
+            <a:off x="5" y="0"/>
+            <a:ext cx="12191695" cy="6858000"/>
+          </a:xfrm>
+          <a:prstGeom prst="rect">
+            <a:avLst/>
+          </a:prstGeom>
+        </p:spPr>
+      </p:pic>
+      <p:sp>
+        <p:nvSpPr>
+          <p:cNvPr id="3" name="Shape 0">
+            <a:extLst>
+              <a:ext uri="{FF2B5EF4-FFF2-40B4-BE49-F238E27FC236}">
+                <a16:creationId xmlns:a16="http://schemas.microsoft.com/office/drawing/2014/main" id="{05CFD60A-210A-2FA7-2F29-2AEA5E6D5D47}"/>
+              </a:ext>
+            </a:extLst>
+          </p:cNvPr>
+          <p:cNvSpPr/>
+          <p:nvPr/>
+        </p:nvSpPr>
+        <p:spPr>
+          <a:xfrm>
+            <a:off x="5" y="0"/>
+            <a:ext cx="12191695" cy="6858000"/>
+          </a:xfrm>
+          <a:prstGeom prst="rect">
+            <a:avLst/>
+          </a:prstGeom>
+          <a:solidFill>
+            <a:srgbClr val="041736">
+              <a:alpha val="70000"/>
+            </a:srgbClr>
+          </a:solidFill>
+          <a:ln w="12700">
+            <a:solidFill>
+              <a:srgbClr val="041736">
+                <a:alpha val="0"/>
+              </a:srgbClr>
+            </a:solidFill>
+            <a:prstDash val="solid"/>
+          </a:ln>
+        </p:spPr>
+        <p:txBody>
+          <a:bodyPr lIns="91434" tIns="45718" rIns="91434" bIns="45718"/>
+          <a:lstStyle/>
+          <a:p>
+            <a:endParaRPr lang="en-US"/>
+          </a:p>
+        </p:txBody>
+      </p:sp>
+      <p:sp>
+        <p:nvSpPr>
+          <p:cNvPr id="6" name="Text 3">
+            <a:extLst>
+              <a:ext uri="{FF2B5EF4-FFF2-40B4-BE49-F238E27FC236}">
+                <a16:creationId xmlns:a16="http://schemas.microsoft.com/office/drawing/2014/main" id="{39199BD3-E0A8-47F8-6E87-78D8C9BF8958}"/>
+              </a:ext>
+            </a:extLst>
+          </p:cNvPr>
+          <p:cNvSpPr/>
+          <p:nvPr/>
+        </p:nvSpPr>
+        <p:spPr>
+          <a:xfrm>
+            <a:off x="914400" y="2057400"/>
+            <a:ext cx="5120640" cy="1005840"/>
+          </a:xfrm>
+          <a:prstGeom prst="rect">
+            <a:avLst/>
+          </a:prstGeom>
+          <a:noFill/>
+          <a:ln/>
+        </p:spPr>
+        <p:txBody>
+          <a:bodyPr wrap="square" lIns="0" tIns="0" rIns="0" bIns="0" rtlCol="0" anchor="ctr"/>
+          <a:lstStyle/>
+          <a:p>
+            <a:r>
+              <a:rPr lang="en-US" sz="2800" dirty="0">
+                <a:solidFill>
+                  <a:srgbClr val="FFFFFF"/>
+                </a:solidFill>
+                <a:latin typeface="Akatab" pitchFamily="34" charset="0"/>
+                <a:ea typeface="Akatab" pitchFamily="34" charset="-122"/>
+                <a:cs typeface="Akatab" pitchFamily="34" charset="-120"/>
+              </a:rPr>
+              <a:t>5. Executive Evidence</a:t>
+            </a:r>
+          </a:p>
+          <a:p>
+            <a:endParaRPr lang="en-US" sz="2800" dirty="0"/>
+          </a:p>
+        </p:txBody>
+      </p:sp>
+    </p:spTree>
+    <p:extLst>
+      <p:ext uri="{BB962C8B-B14F-4D97-AF65-F5344CB8AC3E}">
+        <p14:creationId xmlns:p14="http://schemas.microsoft.com/office/powerpoint/2010/main" val="818555575"/>
+      </p:ext>
+    </p:extLst>
+  </p:cSld>
+  <p:clrMapOvr>
+    <a:masterClrMapping/>
+  </p:clrMapOvr>
+</p:sld>
+</file>
+
+<file path=ppt/slides/slide15.xml><?xml version="1.0" encoding="utf-8"?>
 <p:sld xmlns:a="http://schemas.openxmlformats.org/drawingml/2006/main" xmlns:r="http://schemas.openxmlformats.org/officeDocument/2006/relationships" xmlns:p="http://schemas.openxmlformats.org/presentationml/2006/main">
   <p:cSld name="Slide 11">
     <p:bg>
@@ -4169,7 +6083,7 @@
         </p:nvSpPr>
         <p:spPr>
           <a:xfrm>
-            <a:off x="0" y="0"/>
+            <a:off x="5" y="0"/>
             <a:ext cx="12191695" cy="6858000"/>
           </a:xfrm>
           <a:prstGeom prst="rect">
@@ -4188,7 +6102,7 @@
           </a:ln>
         </p:spPr>
         <p:txBody>
-          <a:bodyPr/>
+          <a:bodyPr lIns="91434" tIns="45718" rIns="91434" bIns="45718"/>
           <a:lstStyle/>
           <a:p>
             <a:endParaRPr lang="en-US"/>
@@ -4216,9 +6130,6 @@
           <a:bodyPr wrap="square" lIns="0" tIns="0" rIns="0" bIns="0" rtlCol="0" anchor="ctr"/>
           <a:lstStyle/>
           <a:p>
-            <a:pPr marL="0" indent="0">
-              <a:buNone/>
-            </a:pPr>
             <a:r>
               <a:rPr lang="en-US" sz="2300" b="1" dirty="0">
                 <a:solidFill>
@@ -4263,7 +6174,7 @@
           </a:ln>
         </p:spPr>
         <p:txBody>
-          <a:bodyPr/>
+          <a:bodyPr lIns="91434" tIns="45718" rIns="91434" bIns="45718"/>
           <a:lstStyle/>
           <a:p>
             <a:endParaRPr lang="en-US"/>
@@ -4299,7 +6210,7 @@
           </a:ln>
         </p:spPr>
         <p:txBody>
-          <a:bodyPr/>
+          <a:bodyPr lIns="91434" tIns="45718" rIns="91434" bIns="45718"/>
           <a:lstStyle/>
           <a:p>
             <a:endParaRPr lang="en-US"/>
@@ -4333,7 +6244,7 @@
           </a:ln>
         </p:spPr>
         <p:txBody>
-          <a:bodyPr/>
+          <a:bodyPr lIns="91434" tIns="45718" rIns="91434" bIns="45718"/>
           <a:lstStyle/>
           <a:p>
             <a:endParaRPr lang="en-US"/>
@@ -4367,7 +6278,7 @@
           </a:ln>
         </p:spPr>
         <p:txBody>
-          <a:bodyPr/>
+          <a:bodyPr lIns="91434" tIns="45718" rIns="91434" bIns="45718"/>
           <a:lstStyle/>
           <a:p>
             <a:endParaRPr lang="en-US"/>
@@ -4395,11 +6306,9 @@
           <a:bodyPr wrap="square" lIns="0" tIns="0" rIns="0" bIns="0" rtlCol="0" anchor="ctr"/>
           <a:lstStyle/>
           <a:p>
-            <a:pPr marL="0" indent="0" algn="ctr">
-              <a:buNone/>
-            </a:pPr>
-            <a:r>
-              <a:rPr lang="en-US" sz="1340" b="1" dirty="0">
+            <a:pPr algn="ctr"/>
+            <a:r>
+              <a:rPr lang="en-US" sz="1300" b="1" dirty="0">
                 <a:solidFill>
                   <a:srgbClr val="1F1F1F"/>
                 </a:solidFill>
@@ -4409,7 +6318,7 @@
               </a:rPr>
               <a:t>Delivery &amp; scale</a:t>
             </a:r>
-            <a:endParaRPr lang="en-US" sz="1340" dirty="0"/>
+            <a:endParaRPr lang="en-US" sz="1300" dirty="0"/>
           </a:p>
         </p:txBody>
       </p:sp>
@@ -4436,11 +6345,8 @@
           </a:bodyPr>
           <a:lstStyle/>
           <a:p>
-            <a:pPr marL="0" indent="0">
-              <a:buNone/>
-            </a:pPr>
-            <a:r>
-              <a:rPr lang="en-US" sz="1120" dirty="0">
+            <a:r>
+              <a:rPr lang="en-US" sz="1100" dirty="0">
                 <a:solidFill>
                   <a:srgbClr val="1F1F1F"/>
                 </a:solidFill>
@@ -4450,14 +6356,11 @@
               </a:rPr>
               <a:t>✓ 120+ responsive websites and applications delivered</a:t>
             </a:r>
-            <a:endParaRPr lang="en-US" sz="1120" dirty="0"/>
-          </a:p>
-          <a:p>
-            <a:pPr marL="0" indent="0">
-              <a:buNone/>
-            </a:pPr>
-            <a:r>
-              <a:rPr lang="en-US" sz="1120" dirty="0">
+            <a:endParaRPr lang="en-US" sz="1100" dirty="0"/>
+          </a:p>
+          <a:p>
+            <a:r>
+              <a:rPr lang="en-US" sz="1100" dirty="0">
                 <a:solidFill>
                   <a:srgbClr val="1F1F1F"/>
                 </a:solidFill>
@@ -4467,14 +6370,11 @@
               </a:rPr>
               <a:t>✓ 99% reported user satisfaction across delivered work</a:t>
             </a:r>
-            <a:endParaRPr lang="en-US" sz="1120" dirty="0"/>
-          </a:p>
-          <a:p>
-            <a:pPr marL="0" indent="0">
-              <a:buNone/>
-            </a:pPr>
-            <a:r>
-              <a:rPr lang="en-US" sz="1120" dirty="0">
+            <a:endParaRPr lang="en-US" sz="1100" dirty="0"/>
+          </a:p>
+          <a:p>
+            <a:r>
+              <a:rPr lang="en-US" sz="1100" dirty="0">
                 <a:solidFill>
                   <a:srgbClr val="1F1F1F"/>
                 </a:solidFill>
@@ -4484,14 +6384,11 @@
               </a:rPr>
               <a:t>✓ 10,000+ concurrent-user infrastructure exposure</a:t>
             </a:r>
-            <a:endParaRPr lang="en-US" sz="1120" dirty="0"/>
-          </a:p>
-          <a:p>
-            <a:pPr marL="0" indent="0">
-              <a:buNone/>
-            </a:pPr>
-            <a:r>
-              <a:rPr lang="en-US" sz="1120" dirty="0">
+            <a:endParaRPr lang="en-US" sz="1100" dirty="0"/>
+          </a:p>
+          <a:p>
+            <a:r>
+              <a:rPr lang="en-US" sz="1100" dirty="0">
                 <a:solidFill>
                   <a:srgbClr val="1F1F1F"/>
                 </a:solidFill>
@@ -4501,7 +6398,7 @@
               </a:rPr>
               <a:t>✓ 500+ requests/second API workload exposure</a:t>
             </a:r>
-            <a:endParaRPr lang="en-US" sz="1120" dirty="0"/>
+            <a:endParaRPr lang="en-US" sz="1100" dirty="0"/>
           </a:p>
         </p:txBody>
       </p:sp>
@@ -4532,7 +6429,7 @@
           </a:ln>
         </p:spPr>
         <p:txBody>
-          <a:bodyPr/>
+          <a:bodyPr lIns="91434" tIns="45718" rIns="91434" bIns="45718"/>
           <a:lstStyle/>
           <a:p>
             <a:endParaRPr lang="en-US"/>
@@ -4566,7 +6463,7 @@
           </a:ln>
         </p:spPr>
         <p:txBody>
-          <a:bodyPr/>
+          <a:bodyPr lIns="91434" tIns="45718" rIns="91434" bIns="45718"/>
           <a:lstStyle/>
           <a:p>
             <a:endParaRPr lang="en-US"/>
@@ -4594,11 +6491,9 @@
           <a:bodyPr wrap="square" lIns="0" tIns="0" rIns="0" bIns="0" rtlCol="0" anchor="ctr"/>
           <a:lstStyle/>
           <a:p>
-            <a:pPr marL="0" indent="0" algn="ctr">
-              <a:buNone/>
-            </a:pPr>
-            <a:r>
-              <a:rPr lang="en-US" sz="1340" b="1" dirty="0">
+            <a:pPr algn="ctr"/>
+            <a:r>
+              <a:rPr lang="en-US" sz="1300" b="1" dirty="0">
                 <a:solidFill>
                   <a:srgbClr val="1F1F1F"/>
                 </a:solidFill>
@@ -4608,7 +6503,7 @@
               </a:rPr>
               <a:t>Growth &amp; performance</a:t>
             </a:r>
-            <a:endParaRPr lang="en-US" sz="1340" dirty="0"/>
+            <a:endParaRPr lang="en-US" sz="1300" dirty="0"/>
           </a:p>
         </p:txBody>
       </p:sp>
@@ -4635,11 +6530,8 @@
           </a:bodyPr>
           <a:lstStyle/>
           <a:p>
-            <a:pPr marL="0" indent="0">
-              <a:buNone/>
-            </a:pPr>
-            <a:r>
-              <a:rPr lang="en-US" sz="1120" dirty="0">
+            <a:r>
+              <a:rPr lang="en-US" sz="1100" dirty="0">
                 <a:solidFill>
                   <a:srgbClr val="1F1F1F"/>
                 </a:solidFill>
@@ -4649,14 +6541,11 @@
               </a:rPr>
               <a:t>✓ Landing pages generating 7,000 new leads per month</a:t>
             </a:r>
-            <a:endParaRPr lang="en-US" sz="1120" dirty="0"/>
-          </a:p>
-          <a:p>
-            <a:pPr marL="0" indent="0">
-              <a:buNone/>
-            </a:pPr>
-            <a:r>
-              <a:rPr lang="en-US" sz="1120" dirty="0">
+            <a:endParaRPr lang="en-US" sz="1100" dirty="0"/>
+          </a:p>
+          <a:p>
+            <a:r>
+              <a:rPr lang="en-US" sz="1100" dirty="0">
                 <a:solidFill>
                   <a:srgbClr val="1F1F1F"/>
                 </a:solidFill>
@@ -4666,14 +6555,11 @@
               </a:rPr>
               <a:t>✓ Average 38% landing-page conversion performance</a:t>
             </a:r>
-            <a:endParaRPr lang="en-US" sz="1120" dirty="0"/>
-          </a:p>
-          <a:p>
-            <a:pPr marL="0" indent="0">
-              <a:buNone/>
-            </a:pPr>
-            <a:r>
-              <a:rPr lang="en-US" sz="1120" dirty="0">
+            <a:endParaRPr lang="en-US" sz="1100" dirty="0"/>
+          </a:p>
+          <a:p>
+            <a:r>
+              <a:rPr lang="en-US" sz="1100" dirty="0">
                 <a:solidFill>
                   <a:srgbClr val="1F1F1F"/>
                 </a:solidFill>
@@ -4683,14 +6569,11 @@
               </a:rPr>
               <a:t>✓ 56% web traffic lift through SEO execution</a:t>
             </a:r>
-            <a:endParaRPr lang="en-US" sz="1120" dirty="0"/>
-          </a:p>
-          <a:p>
-            <a:pPr marL="0" indent="0">
-              <a:buNone/>
-            </a:pPr>
-            <a:r>
-              <a:rPr lang="en-US" sz="1120" dirty="0">
+            <a:endParaRPr lang="en-US" sz="1100" dirty="0"/>
+          </a:p>
+          <a:p>
+            <a:r>
+              <a:rPr lang="en-US" sz="1100" dirty="0">
                 <a:solidFill>
                   <a:srgbClr val="1F1F1F"/>
                 </a:solidFill>
@@ -4700,7 +6583,7 @@
               </a:rPr>
               <a:t>✓ 80+ business metrics represented in dashboard work</a:t>
             </a:r>
-            <a:endParaRPr lang="en-US" sz="1120" dirty="0"/>
+            <a:endParaRPr lang="en-US" sz="1100" dirty="0"/>
           </a:p>
         </p:txBody>
       </p:sp>
@@ -4731,7 +6614,7 @@
           </a:ln>
         </p:spPr>
         <p:txBody>
-          <a:bodyPr/>
+          <a:bodyPr lIns="91434" tIns="45718" rIns="91434" bIns="45718"/>
           <a:lstStyle/>
           <a:p>
             <a:endParaRPr lang="en-US"/>
@@ -4765,7 +6648,7 @@
           </a:ln>
         </p:spPr>
         <p:txBody>
-          <a:bodyPr/>
+          <a:bodyPr lIns="91434" tIns="45718" rIns="91434" bIns="45718"/>
           <a:lstStyle/>
           <a:p>
             <a:endParaRPr lang="en-US"/>
@@ -4793,11 +6676,9 @@
           <a:bodyPr wrap="square" lIns="0" tIns="0" rIns="0" bIns="0" rtlCol="0" anchor="ctr"/>
           <a:lstStyle/>
           <a:p>
-            <a:pPr marL="0" indent="0" algn="ctr">
-              <a:buNone/>
-            </a:pPr>
-            <a:r>
-              <a:rPr lang="en-US" sz="1340" b="1" dirty="0">
+            <a:pPr algn="ctr"/>
+            <a:r>
+              <a:rPr lang="en-US" sz="1300" b="1" dirty="0">
                 <a:solidFill>
                   <a:srgbClr val="1F1F1F"/>
                 </a:solidFill>
@@ -4807,7 +6688,7 @@
               </a:rPr>
               <a:t>Leadership signals</a:t>
             </a:r>
-            <a:endParaRPr lang="en-US" sz="1340" dirty="0"/>
+            <a:endParaRPr lang="en-US" sz="1300" dirty="0"/>
           </a:p>
         </p:txBody>
       </p:sp>
@@ -4834,11 +6715,8 @@
           </a:bodyPr>
           <a:lstStyle/>
           <a:p>
-            <a:pPr marL="0" indent="0">
-              <a:buNone/>
-            </a:pPr>
-            <a:r>
-              <a:rPr lang="en-US" sz="1120" dirty="0">
+            <a:r>
+              <a:rPr lang="en-US" sz="1100" dirty="0">
                 <a:solidFill>
                   <a:srgbClr val="1F1F1F"/>
                 </a:solidFill>
@@ -4848,14 +6726,11 @@
               </a:rPr>
               <a:t>✓ Mentored and led 3 junior developers</a:t>
             </a:r>
-            <a:endParaRPr lang="en-US" sz="1120" dirty="0"/>
-          </a:p>
-          <a:p>
-            <a:pPr marL="0" indent="0">
-              <a:buNone/>
-            </a:pPr>
-            <a:r>
-              <a:rPr lang="en-US" sz="1120" dirty="0">
+            <a:endParaRPr lang="en-US" sz="1100" dirty="0"/>
+          </a:p>
+          <a:p>
+            <a:r>
+              <a:rPr lang="en-US" sz="1100" dirty="0">
                 <a:solidFill>
                   <a:srgbClr val="1F1F1F"/>
                 </a:solidFill>
@@ -4865,14 +6740,11 @@
               </a:rPr>
               <a:t>✓ End-to-end ownership from concept to deployment</a:t>
             </a:r>
-            <a:endParaRPr lang="en-US" sz="1120" dirty="0"/>
-          </a:p>
-          <a:p>
-            <a:pPr marL="0" indent="0">
-              <a:buNone/>
-            </a:pPr>
-            <a:r>
-              <a:rPr lang="en-US" sz="1120" dirty="0">
+            <a:endParaRPr lang="en-US" sz="1100" dirty="0"/>
+          </a:p>
+          <a:p>
+            <a:r>
+              <a:rPr lang="en-US" sz="1100" dirty="0">
                 <a:solidFill>
                   <a:srgbClr val="1F1F1F"/>
                 </a:solidFill>
@@ -4882,14 +6754,11 @@
               </a:rPr>
               <a:t>✓ Cross-border delivery for enterprise and regional clients</a:t>
             </a:r>
-            <a:endParaRPr lang="en-US" sz="1120" dirty="0"/>
-          </a:p>
-          <a:p>
-            <a:pPr marL="0" indent="0">
-              <a:buNone/>
-            </a:pPr>
-            <a:r>
-              <a:rPr lang="en-US" sz="1120" dirty="0">
+            <a:endParaRPr lang="en-US" sz="1100" dirty="0"/>
+          </a:p>
+          <a:p>
+            <a:r>
+              <a:rPr lang="en-US" sz="1100" dirty="0">
                 <a:solidFill>
                   <a:srgbClr val="1F1F1F"/>
                 </a:solidFill>
@@ -4899,7 +6768,7 @@
               </a:rPr>
               <a:t>✓ Comfort with architecture, delivery, and stakeholder communication</a:t>
             </a:r>
-            <a:endParaRPr lang="en-US" sz="1120" dirty="0"/>
+            <a:endParaRPr lang="en-US" sz="1100" dirty="0"/>
           </a:p>
         </p:txBody>
       </p:sp>
@@ -4930,7 +6799,7 @@
           </a:ln>
         </p:spPr>
         <p:txBody>
-          <a:bodyPr/>
+          <a:bodyPr lIns="91434" tIns="45718" rIns="91434" bIns="45718"/>
           <a:lstStyle/>
           <a:p>
             <a:endParaRPr lang="en-US"/>
@@ -4958,11 +6827,9 @@
           <a:bodyPr wrap="square" lIns="0" tIns="0" rIns="0" bIns="0" rtlCol="0" anchor="ctr"/>
           <a:lstStyle/>
           <a:p>
-            <a:pPr marL="0" indent="0" algn="ctr">
-              <a:buNone/>
-            </a:pPr>
-            <a:r>
-              <a:rPr lang="en-US" sz="1440" b="1" dirty="0">
+            <a:pPr algn="ctr"/>
+            <a:r>
+              <a:rPr lang="en-US" sz="1500" b="1" dirty="0">
                 <a:solidFill>
                   <a:srgbClr val="1F1F1F"/>
                 </a:solidFill>
@@ -4972,7 +6839,7 @@
               </a:rPr>
               <a:t>Why this translates into CTO readiness</a:t>
             </a:r>
-            <a:endParaRPr lang="en-US" sz="1440" dirty="0"/>
+            <a:endParaRPr lang="en-US" sz="1500" dirty="0"/>
           </a:p>
         </p:txBody>
       </p:sp>
@@ -4995,15 +6862,12 @@
         </p:spPr>
         <p:txBody>
           <a:bodyPr wrap="square" lIns="381" tIns="381" rIns="381" bIns="381" rtlCol="0" anchor="t">
-            <a:normAutofit lnSpcReduction="10000"/>
+            <a:normAutofit fontScale="92500" lnSpcReduction="10000"/>
           </a:bodyPr>
           <a:lstStyle/>
           <a:p>
-            <a:pPr marL="0" indent="0">
-              <a:buNone/>
-            </a:pPr>
-            <a:r>
-              <a:rPr lang="en-US" sz="1140" dirty="0">
+            <a:r>
+              <a:rPr lang="en-US" sz="1200" dirty="0">
                 <a:solidFill>
                   <a:srgbClr val="1F1F1F"/>
                 </a:solidFill>
@@ -5013,14 +6877,11 @@
               </a:rPr>
               <a:t>✓ Strong engineering foundation with architecture, APIs, performance, security, and delivery experience</a:t>
             </a:r>
-            <a:endParaRPr lang="en-US" sz="1140" dirty="0"/>
-          </a:p>
-          <a:p>
-            <a:pPr marL="0" indent="0">
-              <a:buNone/>
-            </a:pPr>
-            <a:r>
-              <a:rPr lang="en-US" sz="1140" dirty="0">
+            <a:endParaRPr lang="en-US" sz="1200" dirty="0"/>
+          </a:p>
+          <a:p>
+            <a:r>
+              <a:rPr lang="en-US" sz="1200" dirty="0">
                 <a:solidFill>
                   <a:srgbClr val="1F1F1F"/>
                 </a:solidFill>
@@ -5030,14 +6891,11 @@
               </a:rPr>
               <a:t>✓ Business-facing mindset shaped by conversion, SEO, dashboarding, and cross-functional execution</a:t>
             </a:r>
-            <a:endParaRPr lang="en-US" sz="1140" dirty="0"/>
-          </a:p>
-          <a:p>
-            <a:pPr marL="0" indent="0">
-              <a:buNone/>
-            </a:pPr>
-            <a:r>
-              <a:rPr lang="en-US" sz="1140" dirty="0">
+            <a:endParaRPr lang="en-US" sz="1200" dirty="0"/>
+          </a:p>
+          <a:p>
+            <a:r>
+              <a:rPr lang="en-US" sz="1200" dirty="0">
                 <a:solidFill>
                   <a:srgbClr val="1F1F1F"/>
                 </a:solidFill>
@@ -5047,14 +6905,11 @@
               </a:rPr>
               <a:t>✓ Cross-industry exposure reduces dependency on a single domain and improves decision quality</a:t>
             </a:r>
-            <a:endParaRPr lang="en-US" sz="1140" dirty="0"/>
-          </a:p>
-          <a:p>
-            <a:pPr marL="0" indent="0">
-              <a:buNone/>
-            </a:pPr>
-            <a:r>
-              <a:rPr lang="en-US" sz="1140" dirty="0">
+            <a:endParaRPr lang="en-US" sz="1200" dirty="0"/>
+          </a:p>
+          <a:p>
+            <a:r>
+              <a:rPr lang="en-US" sz="1200" dirty="0">
                 <a:solidFill>
                   <a:srgbClr val="1F1F1F"/>
                 </a:solidFill>
@@ -5064,7 +6919,7 @@
               </a:rPr>
               <a:t>✓ Build-first profile suited to startups, scale-ups, and digital transformation environments that need a practical CTO</a:t>
             </a:r>
-            <a:endParaRPr lang="en-US" sz="1140" dirty="0"/>
+            <a:endParaRPr lang="en-US" sz="1200" dirty="0"/>
           </a:p>
         </p:txBody>
       </p:sp>
@@ -5076,7 +6931,473 @@
 </p:sld>
 </file>
 
-<file path=ppt/slides/slide13.xml><?xml version="1.0" encoding="utf-8"?>
+<file path=ppt/slides/slide16.xml><?xml version="1.0" encoding="utf-8"?>
+<p:sld xmlns:a="http://schemas.openxmlformats.org/drawingml/2006/main" xmlns:r="http://schemas.openxmlformats.org/officeDocument/2006/relationships" xmlns:p="http://schemas.openxmlformats.org/presentationml/2006/main">
+  <p:cSld>
+    <p:spTree>
+      <p:nvGrpSpPr>
+        <p:cNvPr id="1" name="">
+          <a:extLst>
+            <a:ext uri="{FF2B5EF4-FFF2-40B4-BE49-F238E27FC236}">
+              <a16:creationId xmlns:a16="http://schemas.microsoft.com/office/drawing/2014/main" id="{BF985BAA-DF4E-3897-467C-5C52501B5315}"/>
+            </a:ext>
+          </a:extLst>
+        </p:cNvPr>
+        <p:cNvGrpSpPr/>
+        <p:nvPr/>
+      </p:nvGrpSpPr>
+      <p:grpSpPr>
+        <a:xfrm>
+          <a:off x="0" y="0"/>
+          <a:ext cx="0" cy="0"/>
+          <a:chOff x="0" y="0"/>
+          <a:chExt cx="0" cy="0"/>
+        </a:xfrm>
+      </p:grpSpPr>
+      <p:sp>
+        <p:nvSpPr>
+          <p:cNvPr id="4" name="TextBox 3">
+            <a:extLst>
+              <a:ext uri="{FF2B5EF4-FFF2-40B4-BE49-F238E27FC236}">
+                <a16:creationId xmlns:a16="http://schemas.microsoft.com/office/drawing/2014/main" id="{7D92BD5B-FCD7-A33E-6B37-3195E23BB317}"/>
+              </a:ext>
+            </a:extLst>
+          </p:cNvPr>
+          <p:cNvSpPr txBox="1"/>
+          <p:nvPr/>
+        </p:nvSpPr>
+        <p:spPr>
+          <a:xfrm>
+            <a:off x="1166884" y="997678"/>
+            <a:ext cx="10125956" cy="4524315"/>
+          </a:xfrm>
+          <a:prstGeom prst="rect">
+            <a:avLst/>
+          </a:prstGeom>
+          <a:noFill/>
+        </p:spPr>
+        <p:txBody>
+          <a:bodyPr wrap="square" rtlCol="0">
+            <a:spAutoFit/>
+          </a:bodyPr>
+          <a:lstStyle/>
+          <a:p>
+            <a:r>
+              <a:rPr lang="en-US" sz="1600" dirty="0"/>
+              <a:t>Unlike traditional CTOs who only set strategy, I take ownership of execution and drive measurable results.</a:t>
+            </a:r>
+          </a:p>
+          <a:p>
+            <a:endParaRPr lang="en-US" sz="1600" dirty="0"/>
+          </a:p>
+          <a:p>
+            <a:r>
+              <a:rPr lang="en-US" sz="1600" dirty="0"/>
+              <a:t>✅ </a:t>
+            </a:r>
+            <a:r>
+              <a:rPr lang="en-US" sz="1600" b="1" dirty="0"/>
+              <a:t>Hands-on Execution</a:t>
+            </a:r>
+            <a:br>
+              <a:rPr lang="en-US" sz="1600" b="1" dirty="0"/>
+            </a:br>
+            <a:r>
+              <a:rPr lang="en-US" sz="1600" dirty="0"/>
+              <a:t>I don’t just define the roadmap - I make sure it delivers impact.</a:t>
+            </a:r>
+          </a:p>
+          <a:p>
+            <a:br>
+              <a:rPr lang="en-US" sz="1600" dirty="0"/>
+            </a:br>
+            <a:r>
+              <a:rPr lang="en-US" sz="1600" dirty="0"/>
+              <a:t>✅ </a:t>
+            </a:r>
+            <a:r>
+              <a:rPr lang="en-US" sz="1600" b="1" dirty="0"/>
+              <a:t>End-to-End Ownership</a:t>
+            </a:r>
+            <a:br>
+              <a:rPr lang="en-US" sz="1600" b="1" dirty="0"/>
+            </a:br>
+            <a:r>
+              <a:rPr lang="en-US" sz="1600" dirty="0"/>
+              <a:t>From ideation to market, I execute across Technical management life cycle.</a:t>
+            </a:r>
+          </a:p>
+          <a:p>
+            <a:br>
+              <a:rPr lang="en-US" sz="1600" dirty="0"/>
+            </a:br>
+            <a:r>
+              <a:rPr lang="en-US" sz="1600" dirty="0"/>
+              <a:t>✅ </a:t>
+            </a:r>
+            <a:r>
+              <a:rPr lang="en-US" sz="1600" b="1" dirty="0"/>
+              <a:t>No Resources? No Problem!</a:t>
+            </a:r>
+            <a:br>
+              <a:rPr lang="en-US" sz="1600" b="1" dirty="0"/>
+            </a:br>
+            <a:r>
+              <a:rPr lang="en-US" sz="1600" dirty="0"/>
+              <a:t>With experience as a </a:t>
+            </a:r>
+            <a:r>
+              <a:rPr lang="en-US" sz="1600" b="1" dirty="0"/>
+              <a:t>Founding Team Member</a:t>
+            </a:r>
+            <a:r>
+              <a:rPr lang="en-US" sz="1600" dirty="0"/>
+              <a:t>, I can step in and handle execution when teams are lean.</a:t>
+            </a:r>
+          </a:p>
+          <a:p>
+            <a:br>
+              <a:rPr lang="en-US" sz="1600" dirty="0"/>
+            </a:br>
+            <a:r>
+              <a:rPr lang="en-US" sz="1600" dirty="0"/>
+              <a:t>✅ </a:t>
+            </a:r>
+            <a:r>
+              <a:rPr lang="en-US" sz="1600" b="1" dirty="0"/>
+              <a:t>Adaptable &amp; Versatile</a:t>
+            </a:r>
+            <a:br>
+              <a:rPr lang="en-US" sz="1600" b="1" dirty="0"/>
+            </a:br>
+            <a:r>
+              <a:rPr lang="en-US" sz="1600" dirty="0"/>
+              <a:t>Whether it’s strategy, execution, or scaling, I play any role within the Technical </a:t>
+            </a:r>
+            <a:r>
+              <a:rPr lang="en-US" sz="1600" b="1" dirty="0"/>
+              <a:t>umbrella</a:t>
+            </a:r>
+            <a:r>
+              <a:rPr lang="en-US" sz="1600" dirty="0"/>
+              <a:t> to ensure success.</a:t>
+            </a:r>
+          </a:p>
+          <a:p>
+            <a:endParaRPr lang="en-US" sz="1600" dirty="0"/>
+          </a:p>
+          <a:p>
+            <a:endParaRPr lang="en-US" sz="1600" dirty="0"/>
+          </a:p>
+          <a:p>
+            <a:pPr algn="ctr"/>
+            <a:endParaRPr lang="en-US" sz="1600" dirty="0"/>
+          </a:p>
+          <a:p>
+            <a:pPr algn="ctr"/>
+            <a:r>
+              <a:rPr lang="en-US" sz="1600" b="1" dirty="0"/>
+              <a:t>I don’t just plan. I execute, iterate, and drive real business growth!</a:t>
+            </a:r>
+            <a:r>
+              <a:rPr lang="en-US" sz="1600" dirty="0"/>
+              <a:t> 🚀</a:t>
+            </a:r>
+          </a:p>
+          <a:p>
+            <a:endParaRPr lang="en-US" sz="1600" dirty="0"/>
+          </a:p>
+        </p:txBody>
+      </p:sp>
+      <p:sp>
+        <p:nvSpPr>
+          <p:cNvPr id="3" name="Shape 3">
+            <a:extLst>
+              <a:ext uri="{FF2B5EF4-FFF2-40B4-BE49-F238E27FC236}">
+                <a16:creationId xmlns:a16="http://schemas.microsoft.com/office/drawing/2014/main" id="{6D8C531B-73D8-FFDD-8994-99BF0FE223D5}"/>
+              </a:ext>
+            </a:extLst>
+          </p:cNvPr>
+          <p:cNvSpPr/>
+          <p:nvPr/>
+        </p:nvSpPr>
+        <p:spPr>
+          <a:xfrm>
+            <a:off x="502920" y="6547104"/>
+            <a:ext cx="11137392" cy="27432"/>
+          </a:xfrm>
+          <a:prstGeom prst="roundRect">
+            <a:avLst>
+              <a:gd name="adj" fmla="val 33333"/>
+            </a:avLst>
+          </a:prstGeom>
+          <a:solidFill>
+            <a:srgbClr val="D6943C"/>
+          </a:solidFill>
+          <a:ln w="12700">
+            <a:solidFill>
+              <a:srgbClr val="D6943C">
+                <a:alpha val="0"/>
+              </a:srgbClr>
+            </a:solidFill>
+            <a:prstDash val="solid"/>
+          </a:ln>
+        </p:spPr>
+        <p:txBody>
+          <a:bodyPr lIns="91434" tIns="45718" rIns="91434" bIns="45718"/>
+          <a:lstStyle/>
+          <a:p>
+            <a:endParaRPr lang="en-US"/>
+          </a:p>
+        </p:txBody>
+      </p:sp>
+      <p:sp>
+        <p:nvSpPr>
+          <p:cNvPr id="5" name="Text 1">
+            <a:extLst>
+              <a:ext uri="{FF2B5EF4-FFF2-40B4-BE49-F238E27FC236}">
+                <a16:creationId xmlns:a16="http://schemas.microsoft.com/office/drawing/2014/main" id="{1F8EBE1D-B2BB-FC3A-B1BD-FC328C461B65}"/>
+              </a:ext>
+            </a:extLst>
+          </p:cNvPr>
+          <p:cNvSpPr/>
+          <p:nvPr/>
+        </p:nvSpPr>
+        <p:spPr>
+          <a:xfrm>
+            <a:off x="502920" y="228600"/>
+            <a:ext cx="9509760" cy="347472"/>
+          </a:xfrm>
+          <a:prstGeom prst="rect">
+            <a:avLst/>
+          </a:prstGeom>
+          <a:noFill/>
+          <a:ln/>
+        </p:spPr>
+        <p:txBody>
+          <a:bodyPr wrap="square" lIns="0" tIns="0" rIns="0" bIns="0" rtlCol="0" anchor="ctr"/>
+          <a:lstStyle/>
+          <a:p>
+            <a:r>
+              <a:rPr lang="en-US" sz="2400" b="1" dirty="0">
+                <a:latin typeface="Castoro" charset="0"/>
+                <a:cs typeface="Calibri" pitchFamily="34" charset="0"/>
+              </a:rPr>
+              <a:t>I Execute! </a:t>
+            </a:r>
+            <a:endParaRPr lang="en-US" sz="2300" dirty="0"/>
+          </a:p>
+        </p:txBody>
+      </p:sp>
+      <p:sp>
+        <p:nvSpPr>
+          <p:cNvPr id="6" name="Shape 2">
+            <a:extLst>
+              <a:ext uri="{FF2B5EF4-FFF2-40B4-BE49-F238E27FC236}">
+                <a16:creationId xmlns:a16="http://schemas.microsoft.com/office/drawing/2014/main" id="{0C9C39DA-18EE-2742-89F1-032636CAFC4E}"/>
+              </a:ext>
+            </a:extLst>
+          </p:cNvPr>
+          <p:cNvSpPr/>
+          <p:nvPr/>
+        </p:nvSpPr>
+        <p:spPr>
+          <a:xfrm>
+            <a:off x="10817352" y="201168"/>
+            <a:ext cx="475488" cy="73152"/>
+          </a:xfrm>
+          <a:prstGeom prst="roundRect">
+            <a:avLst>
+              <a:gd name="adj" fmla="val 37500"/>
+            </a:avLst>
+          </a:prstGeom>
+          <a:solidFill>
+            <a:srgbClr val="0B0B0B"/>
+          </a:solidFill>
+          <a:ln w="12700">
+            <a:solidFill>
+              <a:srgbClr val="0B0B0B">
+                <a:alpha val="0"/>
+              </a:srgbClr>
+            </a:solidFill>
+            <a:prstDash val="solid"/>
+          </a:ln>
+        </p:spPr>
+        <p:txBody>
+          <a:bodyPr lIns="91434" tIns="45718" rIns="91434" bIns="45718"/>
+          <a:lstStyle/>
+          <a:p>
+            <a:endParaRPr lang="en-US"/>
+          </a:p>
+        </p:txBody>
+      </p:sp>
+    </p:spTree>
+    <p:extLst>
+      <p:ext uri="{BB962C8B-B14F-4D97-AF65-F5344CB8AC3E}">
+        <p14:creationId xmlns:p14="http://schemas.microsoft.com/office/powerpoint/2010/main" val="3040057556"/>
+      </p:ext>
+    </p:extLst>
+  </p:cSld>
+  <p:clrMapOvr>
+    <a:masterClrMapping/>
+  </p:clrMapOvr>
+</p:sld>
+</file>
+
+<file path=ppt/slides/slide17.xml><?xml version="1.0" encoding="utf-8"?>
+<p:sld xmlns:a="http://schemas.openxmlformats.org/drawingml/2006/main" xmlns:r="http://schemas.openxmlformats.org/officeDocument/2006/relationships" xmlns:p="http://schemas.openxmlformats.org/presentationml/2006/main">
+  <p:cSld>
+    <p:spTree>
+      <p:nvGrpSpPr>
+        <p:cNvPr id="1" name="">
+          <a:extLst>
+            <a:ext uri="{FF2B5EF4-FFF2-40B4-BE49-F238E27FC236}">
+              <a16:creationId xmlns:a16="http://schemas.microsoft.com/office/drawing/2014/main" id="{B1CA1211-FA84-E503-CB69-F3A2BCA41E66}"/>
+            </a:ext>
+          </a:extLst>
+        </p:cNvPr>
+        <p:cNvGrpSpPr/>
+        <p:nvPr/>
+      </p:nvGrpSpPr>
+      <p:grpSpPr>
+        <a:xfrm>
+          <a:off x="0" y="0"/>
+          <a:ext cx="0" cy="0"/>
+          <a:chOff x="0" y="0"/>
+          <a:chExt cx="0" cy="0"/>
+        </a:xfrm>
+      </p:grpSpPr>
+      <p:pic>
+        <p:nvPicPr>
+          <p:cNvPr id="2" name="Image 0" descr="/mnt/data/a_full_screen_ultra_high_resolution_abstract_fu.png">
+            <a:extLst>
+              <a:ext uri="{FF2B5EF4-FFF2-40B4-BE49-F238E27FC236}">
+                <a16:creationId xmlns:a16="http://schemas.microsoft.com/office/drawing/2014/main" id="{39403E5C-0C4A-5E1D-341B-2A3C8A30BF7C}"/>
+              </a:ext>
+            </a:extLst>
+          </p:cNvPr>
+          <p:cNvPicPr>
+            <a:picLocks noChangeAspect="1"/>
+          </p:cNvPicPr>
+          <p:nvPr/>
+        </p:nvPicPr>
+        <p:blipFill>
+          <a:blip r:embed="rId3"/>
+          <a:stretch>
+            <a:fillRect/>
+          </a:stretch>
+        </p:blipFill>
+        <p:spPr>
+          <a:xfrm>
+            <a:off x="5" y="0"/>
+            <a:ext cx="12191695" cy="6858000"/>
+          </a:xfrm>
+          <a:prstGeom prst="rect">
+            <a:avLst/>
+          </a:prstGeom>
+        </p:spPr>
+      </p:pic>
+      <p:sp>
+        <p:nvSpPr>
+          <p:cNvPr id="3" name="Shape 0">
+            <a:extLst>
+              <a:ext uri="{FF2B5EF4-FFF2-40B4-BE49-F238E27FC236}">
+                <a16:creationId xmlns:a16="http://schemas.microsoft.com/office/drawing/2014/main" id="{4552DA0B-75BA-496E-A4AA-D7C30DC827FE}"/>
+              </a:ext>
+            </a:extLst>
+          </p:cNvPr>
+          <p:cNvSpPr/>
+          <p:nvPr/>
+        </p:nvSpPr>
+        <p:spPr>
+          <a:xfrm>
+            <a:off x="5" y="0"/>
+            <a:ext cx="12191695" cy="6858000"/>
+          </a:xfrm>
+          <a:prstGeom prst="rect">
+            <a:avLst/>
+          </a:prstGeom>
+          <a:solidFill>
+            <a:srgbClr val="041736">
+              <a:alpha val="70000"/>
+            </a:srgbClr>
+          </a:solidFill>
+          <a:ln w="12700">
+            <a:solidFill>
+              <a:srgbClr val="041736">
+                <a:alpha val="0"/>
+              </a:srgbClr>
+            </a:solidFill>
+            <a:prstDash val="solid"/>
+          </a:ln>
+        </p:spPr>
+        <p:txBody>
+          <a:bodyPr lIns="91434" tIns="45718" rIns="91434" bIns="45718"/>
+          <a:lstStyle/>
+          <a:p>
+            <a:endParaRPr lang="en-US"/>
+          </a:p>
+        </p:txBody>
+      </p:sp>
+      <p:sp>
+        <p:nvSpPr>
+          <p:cNvPr id="6" name="Text 3">
+            <a:extLst>
+              <a:ext uri="{FF2B5EF4-FFF2-40B4-BE49-F238E27FC236}">
+                <a16:creationId xmlns:a16="http://schemas.microsoft.com/office/drawing/2014/main" id="{BDB86D8F-B6AB-832D-B0FA-AB69EE7DD18C}"/>
+              </a:ext>
+            </a:extLst>
+          </p:cNvPr>
+          <p:cNvSpPr/>
+          <p:nvPr/>
+        </p:nvSpPr>
+        <p:spPr>
+          <a:xfrm>
+            <a:off x="914400" y="2057400"/>
+            <a:ext cx="5120640" cy="1005840"/>
+          </a:xfrm>
+          <a:prstGeom prst="rect">
+            <a:avLst/>
+          </a:prstGeom>
+          <a:noFill/>
+          <a:ln/>
+        </p:spPr>
+        <p:txBody>
+          <a:bodyPr wrap="square" lIns="0" tIns="0" rIns="0" bIns="0" rtlCol="0" anchor="ctr"/>
+          <a:lstStyle/>
+          <a:p>
+            <a:r>
+              <a:rPr lang="en-US" sz="2800" dirty="0">
+                <a:solidFill>
+                  <a:srgbClr val="FFFFFF"/>
+                </a:solidFill>
+                <a:latin typeface="Akatab" pitchFamily="34" charset="0"/>
+                <a:ea typeface="Akatab" pitchFamily="34" charset="-122"/>
+                <a:cs typeface="Akatab" pitchFamily="34" charset="-120"/>
+              </a:rPr>
+              <a:t>6. Contact &amp; Closing</a:t>
+            </a:r>
+            <a:endParaRPr lang="en-US" sz="2800" dirty="0"/>
+          </a:p>
+          <a:p>
+            <a:endParaRPr lang="en-US" sz="2800" dirty="0"/>
+          </a:p>
+        </p:txBody>
+      </p:sp>
+    </p:spTree>
+    <p:extLst>
+      <p:ext uri="{BB962C8B-B14F-4D97-AF65-F5344CB8AC3E}">
+        <p14:creationId xmlns:p14="http://schemas.microsoft.com/office/powerpoint/2010/main" val="1410050473"/>
+      </p:ext>
+    </p:extLst>
+  </p:cSld>
+  <p:clrMapOvr>
+    <a:masterClrMapping/>
+  </p:clrMapOvr>
+</p:sld>
+</file>
+
+<file path=ppt/slides/slide18.xml><?xml version="1.0" encoding="utf-8"?>
 <p:sld xmlns:a="http://schemas.openxmlformats.org/drawingml/2006/main" xmlns:r="http://schemas.openxmlformats.org/officeDocument/2006/relationships" xmlns:p="http://schemas.openxmlformats.org/presentationml/2006/main">
   <p:cSld name="Slide 12">
     <p:bg>
@@ -5109,7 +7430,7 @@
         </p:nvSpPr>
         <p:spPr>
           <a:xfrm>
-            <a:off x="0" y="0"/>
+            <a:off x="5" y="0"/>
             <a:ext cx="12191695" cy="6858000"/>
           </a:xfrm>
           <a:prstGeom prst="rect">
@@ -5128,7 +7449,7 @@
           </a:ln>
         </p:spPr>
         <p:txBody>
-          <a:bodyPr/>
+          <a:bodyPr lIns="91434" tIns="45718" rIns="91434" bIns="45718"/>
           <a:lstStyle/>
           <a:p>
             <a:endParaRPr lang="en-US"/>
@@ -5156,9 +7477,6 @@
           <a:bodyPr wrap="square" lIns="0" tIns="0" rIns="0" bIns="0" rtlCol="0" anchor="ctr"/>
           <a:lstStyle/>
           <a:p>
-            <a:pPr marL="0" indent="0">
-              <a:buNone/>
-            </a:pPr>
             <a:r>
               <a:rPr lang="en-US" sz="2300" b="1" dirty="0">
                 <a:solidFill>
@@ -5203,7 +7521,7 @@
           </a:ln>
         </p:spPr>
         <p:txBody>
-          <a:bodyPr/>
+          <a:bodyPr lIns="91434" tIns="45718" rIns="91434" bIns="45718"/>
           <a:lstStyle/>
           <a:p>
             <a:endParaRPr lang="en-US"/>
@@ -5239,7 +7557,7 @@
           </a:ln>
         </p:spPr>
         <p:txBody>
-          <a:bodyPr/>
+          <a:bodyPr lIns="91434" tIns="45718" rIns="91434" bIns="45718"/>
           <a:lstStyle/>
           <a:p>
             <a:endParaRPr lang="en-US"/>
@@ -5273,7 +7591,7 @@
           </a:ln>
         </p:spPr>
         <p:txBody>
-          <a:bodyPr/>
+          <a:bodyPr lIns="91434" tIns="45718" rIns="91434" bIns="45718"/>
           <a:lstStyle/>
           <a:p>
             <a:endParaRPr lang="en-US"/>
@@ -5330,7 +7648,7 @@
           </a:ln>
         </p:spPr>
         <p:txBody>
-          <a:bodyPr/>
+          <a:bodyPr lIns="91434" tIns="45718" rIns="91434" bIns="45718"/>
           <a:lstStyle/>
           <a:p>
             <a:endParaRPr lang="en-US"/>
@@ -5358,9 +7676,7 @@
           <a:bodyPr wrap="square" lIns="0" tIns="0" rIns="0" bIns="0" rtlCol="0" anchor="ctr"/>
           <a:lstStyle/>
           <a:p>
-            <a:pPr marL="0" indent="0" algn="ctr">
-              <a:buNone/>
-            </a:pPr>
+            <a:pPr algn="ctr"/>
             <a:r>
               <a:rPr lang="en-US" sz="2000" b="1" dirty="0">
                 <a:solidFill>
@@ -5370,7 +7686,7 @@
                 <a:ea typeface="Akatab" pitchFamily="34" charset="-122"/>
                 <a:cs typeface="Akatab" pitchFamily="34" charset="-120"/>
               </a:rPr>
-              <a:t>Omar Saab</a:t>
+              <a:t>Omar N. Saab</a:t>
             </a:r>
             <a:endParaRPr lang="en-US" sz="2000" dirty="0"/>
           </a:p>
@@ -5397,11 +7713,9 @@
           <a:bodyPr wrap="square" lIns="0" tIns="0" rIns="0" bIns="0" rtlCol="0" anchor="ctr"/>
           <a:lstStyle/>
           <a:p>
-            <a:pPr marL="0" indent="0" algn="ctr">
-              <a:buNone/>
-            </a:pPr>
-            <a:r>
-              <a:rPr lang="en-US" sz="1060" dirty="0">
+            <a:pPr algn="ctr"/>
+            <a:r>
+              <a:rPr lang="en-US" sz="1100" dirty="0">
                 <a:solidFill>
                   <a:srgbClr val="5F6875"/>
                 </a:solidFill>
@@ -5411,7 +7725,7 @@
               </a:rPr>
               <a:t>CTO candidate • Full-stack technology leader</a:t>
             </a:r>
-            <a:endParaRPr lang="en-US" sz="1060" dirty="0"/>
+            <a:endParaRPr lang="en-US" sz="1100" dirty="0"/>
           </a:p>
         </p:txBody>
       </p:sp>
@@ -5436,9 +7750,6 @@
           <a:bodyPr wrap="square" lIns="0" tIns="0" rIns="0" bIns="0" rtlCol="0" anchor="ctr"/>
           <a:lstStyle/>
           <a:p>
-            <a:pPr marL="0" indent="0" algn="l">
-              <a:buNone/>
-            </a:pPr>
             <a:r>
               <a:rPr lang="en-US" sz="2000" b="1" dirty="0">
                 <a:solidFill>
@@ -5477,7 +7788,7 @@
           </a:ln>
         </p:spPr>
         <p:txBody>
-          <a:bodyPr/>
+          <a:bodyPr lIns="91434" tIns="45718" rIns="91434" bIns="45718"/>
           <a:lstStyle/>
           <a:p>
             <a:endParaRPr lang="en-US"/>
@@ -5507,26 +7818,6 @@
           </a:bodyPr>
           <a:lstStyle/>
           <a:p>
-            <a:pPr marL="0" indent="0">
-              <a:buNone/>
-            </a:pPr>
-            <a:r>
-              <a:rPr lang="en-US" sz="1600" dirty="0">
-                <a:solidFill>
-                  <a:srgbClr val="041736"/>
-                </a:solidFill>
-                <a:latin typeface="Akatab" pitchFamily="34" charset="0"/>
-                <a:ea typeface="Akatab" pitchFamily="34" charset="-122"/>
-                <a:cs typeface="Akatab" pitchFamily="34" charset="-120"/>
-              </a:rPr>
-              <a:t>Website:  https://omarsaab.net</a:t>
-            </a:r>
-            <a:endParaRPr lang="en-US" sz="1600" dirty="0"/>
-          </a:p>
-          <a:p>
-            <a:pPr marL="0" indent="0">
-              <a:buNone/>
-            </a:pPr>
             <a:r>
               <a:rPr lang="en-US" sz="1600" dirty="0">
                 <a:solidFill>
@@ -5541,9 +7832,6 @@
             <a:endParaRPr lang="en-US" sz="1600" dirty="0"/>
           </a:p>
           <a:p>
-            <a:pPr marL="0" indent="0">
-              <a:buNone/>
-            </a:pPr>
             <a:r>
               <a:rPr lang="en-US" sz="1600" dirty="0">
                 <a:solidFill>
@@ -5558,9 +7846,6 @@
             <a:endParaRPr lang="en-US" sz="1600" dirty="0"/>
           </a:p>
           <a:p>
-            <a:pPr marL="0" indent="0">
-              <a:buNone/>
-            </a:pPr>
             <a:r>
               <a:rPr lang="en-US" sz="1600" dirty="0">
                 <a:solidFill>
@@ -5575,9 +7860,6 @@
             <a:endParaRPr lang="en-US" sz="1600" dirty="0"/>
           </a:p>
           <a:p>
-            <a:pPr marL="0" indent="0">
-              <a:buNone/>
-            </a:pPr>
             <a:r>
               <a:rPr lang="en-US" sz="1600" dirty="0">
                 <a:solidFill>
@@ -5620,7 +7902,7 @@
           </a:ln>
         </p:spPr>
         <p:txBody>
-          <a:bodyPr/>
+          <a:bodyPr lIns="91434" tIns="45718" rIns="91434" bIns="45718"/>
           <a:lstStyle/>
           <a:p>
             <a:endParaRPr lang="en-US"/>
@@ -5648,11 +7930,9 @@
           <a:bodyPr wrap="square" lIns="0" tIns="0" rIns="0" bIns="0" rtlCol="0" anchor="ctr"/>
           <a:lstStyle/>
           <a:p>
-            <a:pPr marL="0" indent="0" algn="ctr">
-              <a:buNone/>
-            </a:pPr>
-            <a:r>
-              <a:rPr lang="en-US" sz="1280" b="1" dirty="0">
+            <a:pPr algn="ctr"/>
+            <a:r>
+              <a:rPr lang="en-US" sz="1300" b="1" dirty="0">
                 <a:solidFill>
                   <a:srgbClr val="1F1F1F"/>
                 </a:solidFill>
@@ -5662,7 +7942,7 @@
               </a:rPr>
               <a:t>Best fit for</a:t>
             </a:r>
-            <a:endParaRPr lang="en-US" sz="1280" dirty="0"/>
+            <a:endParaRPr lang="en-US" sz="1300" dirty="0"/>
           </a:p>
         </p:txBody>
       </p:sp>
@@ -5689,11 +7969,8 @@
           </a:bodyPr>
           <a:lstStyle/>
           <a:p>
-            <a:pPr marL="0" indent="0">
-              <a:buNone/>
-            </a:pPr>
-            <a:r>
-              <a:rPr lang="en-US" sz="1160" dirty="0">
+            <a:r>
+              <a:rPr lang="en-US" sz="1200" dirty="0">
                 <a:solidFill>
                   <a:srgbClr val="1F1F1F"/>
                 </a:solidFill>
@@ -5703,14 +7980,11 @@
               </a:rPr>
               <a:t>✓ Scale-ups</a:t>
             </a:r>
-            <a:endParaRPr lang="en-US" sz="1160" dirty="0"/>
-          </a:p>
-          <a:p>
-            <a:pPr marL="0" indent="0">
-              <a:buNone/>
-            </a:pPr>
-            <a:r>
-              <a:rPr lang="en-US" sz="1160" dirty="0">
+            <a:endParaRPr lang="en-US" sz="1200" dirty="0"/>
+          </a:p>
+          <a:p>
+            <a:r>
+              <a:rPr lang="en-US" sz="1200" dirty="0">
                 <a:solidFill>
                   <a:srgbClr val="1F1F1F"/>
                 </a:solidFill>
@@ -5720,14 +7994,11 @@
               </a:rPr>
               <a:t>✓ Founder-led companies</a:t>
             </a:r>
-            <a:endParaRPr lang="en-US" sz="1160" dirty="0"/>
-          </a:p>
-          <a:p>
-            <a:pPr marL="0" indent="0">
-              <a:buNone/>
-            </a:pPr>
-            <a:r>
-              <a:rPr lang="en-US" sz="1160" dirty="0">
+            <a:endParaRPr lang="en-US" sz="1200" dirty="0"/>
+          </a:p>
+          <a:p>
+            <a:r>
+              <a:rPr lang="en-US" sz="1200" dirty="0">
                 <a:solidFill>
                   <a:srgbClr val="1F1F1F"/>
                 </a:solidFill>
@@ -5737,14 +8008,11 @@
               </a:rPr>
               <a:t>✓ Product teams</a:t>
             </a:r>
-            <a:endParaRPr lang="en-US" sz="1160" dirty="0"/>
-          </a:p>
-          <a:p>
-            <a:pPr marL="0" indent="0">
-              <a:buNone/>
-            </a:pPr>
-            <a:r>
-              <a:rPr lang="en-US" sz="1160" dirty="0">
+            <a:endParaRPr lang="en-US" sz="1200" dirty="0"/>
+          </a:p>
+          <a:p>
+            <a:r>
+              <a:rPr lang="en-US" sz="1200" dirty="0">
                 <a:solidFill>
                   <a:srgbClr val="1F1F1F"/>
                 </a:solidFill>
@@ -5754,7 +8022,7 @@
               </a:rPr>
               <a:t>✓ Digital transformation</a:t>
             </a:r>
-            <a:endParaRPr lang="en-US" sz="1160" dirty="0"/>
+            <a:endParaRPr lang="en-US" sz="1200" dirty="0"/>
           </a:p>
         </p:txBody>
       </p:sp>
@@ -5779,9 +8047,6 @@
           <a:bodyPr wrap="square" lIns="0" tIns="0" rIns="0" bIns="0" rtlCol="0" anchor="ctr"/>
           <a:lstStyle/>
           <a:p>
-            <a:pPr marL="0" indent="0">
-              <a:buNone/>
-            </a:pPr>
             <a:r>
               <a:rPr lang="en-US" sz="1500" i="1" dirty="0">
                 <a:solidFill>
@@ -5805,7 +8070,7 @@
 </p:sld>
 </file>
 
-<file path=ppt/slides/slide14.xml><?xml version="1.0" encoding="utf-8"?>
+<file path=ppt/slides/slide19.xml><?xml version="1.0" encoding="utf-8"?>
 <p:sld xmlns:a="http://schemas.openxmlformats.org/drawingml/2006/main" xmlns:r="http://schemas.openxmlformats.org/officeDocument/2006/relationships" xmlns:p="http://schemas.openxmlformats.org/presentationml/2006/main">
   <p:cSld name="Slide 13">
     <p:spTree>
@@ -5838,7 +8103,7 @@
         </p:blipFill>
         <p:spPr>
           <a:xfrm>
-            <a:off x="0" y="0"/>
+            <a:off x="5" y="0"/>
             <a:ext cx="12191695" cy="6858000"/>
           </a:xfrm>
           <a:prstGeom prst="rect">
@@ -5854,7 +8119,7 @@
         </p:nvSpPr>
         <p:spPr>
           <a:xfrm>
-            <a:off x="0" y="0"/>
+            <a:off x="5" y="0"/>
             <a:ext cx="12191695" cy="6858000"/>
           </a:xfrm>
           <a:prstGeom prst="rect">
@@ -5875,7 +8140,7 @@
           </a:ln>
         </p:spPr>
         <p:txBody>
-          <a:bodyPr/>
+          <a:bodyPr lIns="91434" tIns="45718" rIns="91434" bIns="45718"/>
           <a:lstStyle/>
           <a:p>
             <a:endParaRPr lang="en-US"/>
@@ -5903,9 +8168,7 @@
           <a:bodyPr wrap="square" lIns="0" tIns="0" rIns="0" bIns="0" rtlCol="0" anchor="ctr"/>
           <a:lstStyle/>
           <a:p>
-            <a:pPr marL="0" indent="0" algn="ctr">
-              <a:buNone/>
-            </a:pPr>
+            <a:pPr algn="ctr"/>
             <a:r>
               <a:rPr lang="en-US" sz="2800" b="1" dirty="0">
                 <a:solidFill>
@@ -5942,11 +8205,9 @@
           <a:bodyPr wrap="square" lIns="0" tIns="0" rIns="0" bIns="0" rtlCol="0" anchor="ctr"/>
           <a:lstStyle/>
           <a:p>
-            <a:pPr marL="0" indent="0" algn="ctr">
-              <a:buNone/>
-            </a:pPr>
-            <a:r>
-              <a:rPr lang="en-US" sz="1320" dirty="0">
+            <a:pPr algn="ctr"/>
+            <a:r>
+              <a:rPr lang="en-US" sz="1300" dirty="0">
                 <a:solidFill>
                   <a:srgbClr val="E7EEF8"/>
                 </a:solidFill>
@@ -5956,7 +8217,7 @@
               </a:rPr>
               <a:t>Technology leadership is most valuable when it turns business vision into scalable execution.</a:t>
             </a:r>
-            <a:endParaRPr lang="en-US" sz="1320" dirty="0"/>
+            <a:endParaRPr lang="en-US" sz="1300" dirty="0"/>
           </a:p>
         </p:txBody>
       </p:sp>
@@ -5981,11 +8242,9 @@
           <a:bodyPr wrap="square" lIns="0" tIns="0" rIns="0" bIns="0" rtlCol="0" anchor="ctr"/>
           <a:lstStyle/>
           <a:p>
-            <a:pPr marL="0" indent="0" algn="ctr">
-              <a:buNone/>
-            </a:pPr>
-            <a:r>
-              <a:rPr lang="en-US" sz="1080" dirty="0">
+            <a:pPr algn="ctr"/>
+            <a:r>
+              <a:rPr lang="en-US" sz="1100" dirty="0">
                 <a:solidFill>
                   <a:srgbClr val="E7EEF8"/>
                 </a:solidFill>
@@ -5995,7 +8254,7 @@
               </a:rPr>
               <a:t>Omar Saab • omarsaab.net • omar.saab.96@gmail.com</a:t>
             </a:r>
-            <a:endParaRPr lang="en-US" sz="1080" dirty="0"/>
+            <a:endParaRPr lang="en-US" sz="1100" dirty="0"/>
           </a:p>
         </p:txBody>
       </p:sp>
@@ -6053,9 +8312,6 @@
           <a:bodyPr wrap="square" lIns="0" tIns="0" rIns="0" bIns="0" rtlCol="0" anchor="ctr"/>
           <a:lstStyle/>
           <a:p>
-            <a:pPr marL="0" indent="0">
-              <a:buNone/>
-            </a:pPr>
             <a:r>
               <a:rPr lang="en-US" sz="2300" b="1" dirty="0">
                 <a:solidFill>
@@ -6100,7 +8356,7 @@
           </a:ln>
         </p:spPr>
         <p:txBody>
-          <a:bodyPr/>
+          <a:bodyPr lIns="91434" tIns="45718" rIns="91434" bIns="45718"/>
           <a:lstStyle/>
           <a:p>
             <a:endParaRPr lang="en-US"/>
@@ -6136,7 +8392,7 @@
           </a:ln>
         </p:spPr>
         <p:txBody>
-          <a:bodyPr/>
+          <a:bodyPr lIns="91434" tIns="45718" rIns="91434" bIns="45718"/>
           <a:lstStyle/>
           <a:p>
             <a:endParaRPr lang="en-US"/>
@@ -6164,21 +8420,7 @@
           <a:bodyPr wrap="square" lIns="0" tIns="0" rIns="0" bIns="0" rtlCol="0" anchor="ctr"/>
           <a:lstStyle/>
           <a:p>
-            <a:pPr marL="0" marR="0" lvl="0" indent="0" defTabSz="914400" rtl="0" eaLnBrk="1" fontAlgn="auto" latinLnBrk="0" hangingPunct="1">
-              <a:lnSpc>
-                <a:spcPct val="100000"/>
-              </a:lnSpc>
-              <a:spcBef>
-                <a:spcPts val="0"/>
-              </a:spcBef>
-              <a:spcAft>
-                <a:spcPts val="0"/>
-              </a:spcAft>
-              <a:buClrTx/>
-              <a:buSzTx/>
-              <a:buFontTx/>
-              <a:buNone/>
-              <a:tabLst/>
+            <a:pPr>
               <a:defRPr/>
             </a:pPr>
             <a:r>
@@ -6193,34 +8435,20 @@
               <a:t>1. </a:t>
             </a:r>
             <a:r>
-              <a:rPr kumimoji="0" lang="en-US" sz="2000" b="0" i="0" u="none" strike="noStrike" kern="1200" cap="none" spc="0" normalizeH="0" baseline="0" noProof="0" dirty="0">
-                <a:ln>
-                  <a:noFill/>
-                </a:ln>
+              <a:rPr lang="en-US" sz="2000" dirty="0">
                 <a:solidFill>
                   <a:srgbClr val="1F1F1F"/>
                 </a:solidFill>
-                <a:effectLst/>
-                <a:uLnTx/>
-                <a:uFillTx/>
                 <a:latin typeface="Akatab" pitchFamily="34" charset="0"/>
                 <a:ea typeface="Akatab" pitchFamily="34" charset="-122"/>
                 <a:cs typeface="Akatab" pitchFamily="34" charset="-120"/>
               </a:rPr>
               <a:t>The CTO Mandate</a:t>
             </a:r>
-            <a:endParaRPr kumimoji="0" lang="en-US" sz="2000" b="0" i="0" u="none" strike="noStrike" kern="1200" cap="none" spc="0" normalizeH="0" baseline="0" noProof="0" dirty="0">
-              <a:ln>
-                <a:noFill/>
-              </a:ln>
+            <a:endParaRPr lang="en-US" sz="2000" dirty="0">
               <a:solidFill>
                 <a:prstClr val="black"/>
               </a:solidFill>
-              <a:effectLst/>
-              <a:uLnTx/>
-              <a:uFillTx/>
-              <a:ea typeface="+mn-ea"/>
-              <a:cs typeface="+mn-cs"/>
             </a:endParaRPr>
           </a:p>
         </p:txBody>
@@ -6233,7 +8461,7 @@
         </p:nvSpPr>
         <p:spPr>
           <a:xfrm>
-            <a:off x="1389887" y="1713286"/>
+            <a:off x="1389887" y="1713290"/>
             <a:ext cx="3909900" cy="426409"/>
           </a:xfrm>
           <a:prstGeom prst="rect">
@@ -6374,7 +8602,7 @@
         </p:nvSpPr>
         <p:spPr>
           <a:xfrm>
-            <a:off x="1389888" y="3355848"/>
+            <a:off x="1389892" y="3355853"/>
             <a:ext cx="3984545" cy="347471"/>
           </a:xfrm>
           <a:prstGeom prst="rect">
@@ -6421,7 +8649,7 @@
         </p:nvSpPr>
         <p:spPr>
           <a:xfrm>
-            <a:off x="1389887" y="3818365"/>
+            <a:off x="1389887" y="3818369"/>
             <a:ext cx="3452700" cy="426409"/>
           </a:xfrm>
           <a:prstGeom prst="rect">
@@ -6501,7 +8729,7 @@
         </p:blipFill>
         <p:spPr>
           <a:xfrm>
-            <a:off x="0" y="0"/>
+            <a:off x="5" y="0"/>
             <a:ext cx="12191695" cy="6858000"/>
           </a:xfrm>
           <a:prstGeom prst="rect">
@@ -6517,7 +8745,7 @@
         </p:nvSpPr>
         <p:spPr>
           <a:xfrm>
-            <a:off x="0" y="0"/>
+            <a:off x="5" y="0"/>
             <a:ext cx="12191695" cy="6858000"/>
           </a:xfrm>
           <a:prstGeom prst="rect">
@@ -6538,79 +8766,7 @@
           </a:ln>
         </p:spPr>
         <p:txBody>
-          <a:bodyPr/>
-          <a:lstStyle/>
-          <a:p>
-            <a:endParaRPr lang="en-US"/>
-          </a:p>
-        </p:txBody>
-      </p:sp>
-      <p:sp>
-        <p:nvSpPr>
-          <p:cNvPr id="4" name="Shape 1"/>
-          <p:cNvSpPr/>
-          <p:nvPr/>
-        </p:nvSpPr>
-        <p:spPr>
-          <a:xfrm>
-            <a:off x="5413248" y="292608"/>
-            <a:ext cx="384048" cy="64008"/>
-          </a:xfrm>
-          <a:prstGeom prst="roundRect">
-            <a:avLst>
-              <a:gd name="adj" fmla="val 42857"/>
-            </a:avLst>
-          </a:prstGeom>
-          <a:solidFill>
-            <a:srgbClr val="FFFFFF"/>
-          </a:solidFill>
-          <a:ln w="12700">
-            <a:solidFill>
-              <a:srgbClr val="FFFFFF">
-                <a:alpha val="0"/>
-              </a:srgbClr>
-            </a:solidFill>
-            <a:prstDash val="solid"/>
-          </a:ln>
-        </p:spPr>
-        <p:txBody>
-          <a:bodyPr/>
-          <a:lstStyle/>
-          <a:p>
-            <a:endParaRPr lang="en-US"/>
-          </a:p>
-        </p:txBody>
-      </p:sp>
-      <p:sp>
-        <p:nvSpPr>
-          <p:cNvPr id="5" name="Shape 2"/>
-          <p:cNvSpPr/>
-          <p:nvPr/>
-        </p:nvSpPr>
-        <p:spPr>
-          <a:xfrm>
-            <a:off x="11475720" y="2057400"/>
-            <a:ext cx="45720" cy="475488"/>
-          </a:xfrm>
-          <a:prstGeom prst="roundRect">
-            <a:avLst>
-              <a:gd name="adj" fmla="val 40000"/>
-            </a:avLst>
-          </a:prstGeom>
-          <a:solidFill>
-            <a:srgbClr val="FFFFFF"/>
-          </a:solidFill>
-          <a:ln w="12700">
-            <a:solidFill>
-              <a:srgbClr val="FFFFFF">
-                <a:alpha val="0"/>
-              </a:srgbClr>
-            </a:solidFill>
-            <a:prstDash val="solid"/>
-          </a:ln>
-        </p:spPr>
-        <p:txBody>
-          <a:bodyPr/>
+          <a:bodyPr lIns="91434" tIns="45718" rIns="91434" bIns="45718"/>
           <a:lstStyle/>
           <a:p>
             <a:endParaRPr lang="en-US"/>
@@ -6638,9 +8794,6 @@
           <a:bodyPr wrap="square" lIns="0" tIns="0" rIns="0" bIns="0" rtlCol="0" anchor="ctr"/>
           <a:lstStyle/>
           <a:p>
-            <a:pPr marL="0" indent="0" algn="l">
-              <a:buNone/>
-            </a:pPr>
             <a:r>
               <a:rPr lang="en-US" sz="2800" dirty="0">
                 <a:solidFill>
@@ -6697,7 +8850,7 @@
         </p:nvSpPr>
         <p:spPr>
           <a:xfrm>
-            <a:off x="0" y="0"/>
+            <a:off x="5" y="0"/>
             <a:ext cx="12191695" cy="6858000"/>
           </a:xfrm>
           <a:prstGeom prst="rect">
@@ -6716,7 +8869,7 @@
           </a:ln>
         </p:spPr>
         <p:txBody>
-          <a:bodyPr/>
+          <a:bodyPr lIns="91434" tIns="45718" rIns="91434" bIns="45718"/>
           <a:lstStyle/>
           <a:p>
             <a:endParaRPr lang="en-US"/>
@@ -6744,9 +8897,6 @@
           <a:bodyPr wrap="square" lIns="0" tIns="0" rIns="0" bIns="0" rtlCol="0" anchor="ctr"/>
           <a:lstStyle/>
           <a:p>
-            <a:pPr marL="0" indent="0">
-              <a:buNone/>
-            </a:pPr>
             <a:r>
               <a:rPr lang="en-US" sz="2300" b="1" dirty="0">
                 <a:solidFill>
@@ -6791,7 +8941,7 @@
           </a:ln>
         </p:spPr>
         <p:txBody>
-          <a:bodyPr/>
+          <a:bodyPr lIns="91434" tIns="45718" rIns="91434" bIns="45718"/>
           <a:lstStyle/>
           <a:p>
             <a:endParaRPr lang="en-US"/>
@@ -6827,7 +8977,7 @@
           </a:ln>
         </p:spPr>
         <p:txBody>
-          <a:bodyPr/>
+          <a:bodyPr lIns="91434" tIns="45718" rIns="91434" bIns="45718"/>
           <a:lstStyle/>
           <a:p>
             <a:endParaRPr lang="en-US"/>
@@ -6861,7 +9011,7 @@
           </a:ln>
         </p:spPr>
         <p:txBody>
-          <a:bodyPr/>
+          <a:bodyPr lIns="91434" tIns="45718" rIns="91434" bIns="45718"/>
           <a:lstStyle/>
           <a:p>
             <a:endParaRPr lang="en-US"/>
@@ -6895,7 +9045,7 @@
           </a:ln>
         </p:spPr>
         <p:txBody>
-          <a:bodyPr/>
+          <a:bodyPr lIns="91434" tIns="45718" rIns="91434" bIns="45718"/>
           <a:lstStyle/>
           <a:p>
             <a:endParaRPr lang="en-US"/>
@@ -6923,9 +9073,7 @@
           <a:bodyPr wrap="square" lIns="0" tIns="0" rIns="0" bIns="0" rtlCol="0" anchor="ctr"/>
           <a:lstStyle/>
           <a:p>
-            <a:pPr marL="0" indent="0" algn="ctr">
-              <a:buNone/>
-            </a:pPr>
+            <a:pPr algn="ctr"/>
             <a:r>
               <a:rPr lang="en-US" sz="1500" b="1" dirty="0">
                 <a:solidFill>
@@ -6962,11 +9110,9 @@
           <a:bodyPr wrap="square" lIns="0" tIns="0" rIns="0" bIns="0" rtlCol="0" anchor="ctr"/>
           <a:lstStyle/>
           <a:p>
-            <a:pPr marL="0" indent="0" algn="ctr">
-              <a:buNone/>
-            </a:pPr>
-            <a:r>
-              <a:rPr lang="en-US" sz="1020" dirty="0">
+            <a:pPr algn="ctr"/>
+            <a:r>
+              <a:rPr lang="en-US" sz="1100" dirty="0">
                 <a:solidFill>
                   <a:srgbClr val="5F6875"/>
                 </a:solidFill>
@@ -6976,7 +9122,7 @@
               </a:rPr>
               <a:t>Business-aligned technology vision, roadmap choices, and prioritization</a:t>
             </a:r>
-            <a:endParaRPr lang="en-US" sz="1020" dirty="0"/>
+            <a:endParaRPr lang="en-US" sz="1100" dirty="0"/>
           </a:p>
         </p:txBody>
       </p:sp>
@@ -7007,7 +9153,7 @@
           </a:ln>
         </p:spPr>
         <p:txBody>
-          <a:bodyPr/>
+          <a:bodyPr lIns="91434" tIns="45718" rIns="91434" bIns="45718"/>
           <a:lstStyle/>
           <a:p>
             <a:endParaRPr lang="en-US"/>
@@ -7041,7 +9187,7 @@
           </a:ln>
         </p:spPr>
         <p:txBody>
-          <a:bodyPr/>
+          <a:bodyPr lIns="91434" tIns="45718" rIns="91434" bIns="45718"/>
           <a:lstStyle/>
           <a:p>
             <a:endParaRPr lang="en-US"/>
@@ -7069,9 +9215,7 @@
           <a:bodyPr wrap="square" lIns="0" tIns="0" rIns="0" bIns="0" rtlCol="0" anchor="ctr"/>
           <a:lstStyle/>
           <a:p>
-            <a:pPr marL="0" indent="0" algn="ctr">
-              <a:buNone/>
-            </a:pPr>
+            <a:pPr algn="ctr"/>
             <a:r>
               <a:rPr lang="en-US" sz="1500" b="1" dirty="0">
                 <a:solidFill>
@@ -7108,11 +9252,9 @@
           <a:bodyPr wrap="square" lIns="0" tIns="0" rIns="0" bIns="0" rtlCol="0" anchor="ctr"/>
           <a:lstStyle/>
           <a:p>
-            <a:pPr marL="0" indent="0" algn="ctr">
-              <a:buNone/>
-            </a:pPr>
-            <a:r>
-              <a:rPr lang="en-US" sz="1020" dirty="0">
+            <a:pPr algn="ctr"/>
+            <a:r>
+              <a:rPr lang="en-US" sz="1100" dirty="0">
                 <a:solidFill>
                   <a:srgbClr val="5F6875"/>
                 </a:solidFill>
@@ -7122,7 +9264,7 @@
               </a:rPr>
               <a:t>Scalable systems, integration patterns, and platform direction</a:t>
             </a:r>
-            <a:endParaRPr lang="en-US" sz="1020" dirty="0"/>
+            <a:endParaRPr lang="en-US" sz="1100" dirty="0"/>
           </a:p>
         </p:txBody>
       </p:sp>
@@ -7153,7 +9295,7 @@
           </a:ln>
         </p:spPr>
         <p:txBody>
-          <a:bodyPr/>
+          <a:bodyPr lIns="91434" tIns="45718" rIns="91434" bIns="45718"/>
           <a:lstStyle/>
           <a:p>
             <a:endParaRPr lang="en-US"/>
@@ -7187,7 +9329,7 @@
           </a:ln>
         </p:spPr>
         <p:txBody>
-          <a:bodyPr/>
+          <a:bodyPr lIns="91434" tIns="45718" rIns="91434" bIns="45718"/>
           <a:lstStyle/>
           <a:p>
             <a:endParaRPr lang="en-US"/>
@@ -7215,9 +9357,7 @@
           <a:bodyPr wrap="square" lIns="0" tIns="0" rIns="0" bIns="0" rtlCol="0" anchor="ctr"/>
           <a:lstStyle/>
           <a:p>
-            <a:pPr marL="0" indent="0" algn="ctr">
-              <a:buNone/>
-            </a:pPr>
+            <a:pPr algn="ctr"/>
             <a:r>
               <a:rPr lang="en-US" sz="1500" b="1" dirty="0">
                 <a:solidFill>
@@ -7254,11 +9394,9 @@
           <a:bodyPr wrap="square" lIns="0" tIns="0" rIns="0" bIns="0" rtlCol="0" anchor="ctr"/>
           <a:lstStyle/>
           <a:p>
-            <a:pPr marL="0" indent="0" algn="ctr">
-              <a:buNone/>
-            </a:pPr>
-            <a:r>
-              <a:rPr lang="en-US" sz="1020" dirty="0">
+            <a:pPr algn="ctr"/>
+            <a:r>
+              <a:rPr lang="en-US" sz="1100" dirty="0">
                 <a:solidFill>
                   <a:srgbClr val="5F6875"/>
                 </a:solidFill>
@@ -7268,7 +9406,7 @@
               </a:rPr>
               <a:t>Hiring, mentoring, standards, and engineering culture</a:t>
             </a:r>
-            <a:endParaRPr lang="en-US" sz="1020" dirty="0"/>
+            <a:endParaRPr lang="en-US" sz="1100" dirty="0"/>
           </a:p>
         </p:txBody>
       </p:sp>
@@ -7299,7 +9437,7 @@
           </a:ln>
         </p:spPr>
         <p:txBody>
-          <a:bodyPr/>
+          <a:bodyPr lIns="91434" tIns="45718" rIns="91434" bIns="45718"/>
           <a:lstStyle/>
           <a:p>
             <a:endParaRPr lang="en-US"/>
@@ -7333,7 +9471,7 @@
           </a:ln>
         </p:spPr>
         <p:txBody>
-          <a:bodyPr/>
+          <a:bodyPr lIns="91434" tIns="45718" rIns="91434" bIns="45718"/>
           <a:lstStyle/>
           <a:p>
             <a:endParaRPr lang="en-US"/>
@@ -7361,9 +9499,7 @@
           <a:bodyPr wrap="square" lIns="0" tIns="0" rIns="0" bIns="0" rtlCol="0" anchor="ctr"/>
           <a:lstStyle/>
           <a:p>
-            <a:pPr marL="0" indent="0" algn="ctr">
-              <a:buNone/>
-            </a:pPr>
+            <a:pPr algn="ctr"/>
             <a:r>
               <a:rPr lang="en-US" sz="1500" b="1" dirty="0">
                 <a:solidFill>
@@ -7400,11 +9536,9 @@
           <a:bodyPr wrap="square" lIns="0" tIns="0" rIns="0" bIns="0" rtlCol="0" anchor="ctr"/>
           <a:lstStyle/>
           <a:p>
-            <a:pPr marL="0" indent="0" algn="ctr">
-              <a:buNone/>
-            </a:pPr>
-            <a:r>
-              <a:rPr lang="en-US" sz="1020" dirty="0">
+            <a:pPr algn="ctr"/>
+            <a:r>
+              <a:rPr lang="en-US" sz="1100" dirty="0">
                 <a:solidFill>
                   <a:srgbClr val="5F6875"/>
                 </a:solidFill>
@@ -7414,7 +9548,7 @@
               </a:rPr>
               <a:t>Instrumentation, analytics, automation, and decision support</a:t>
             </a:r>
-            <a:endParaRPr lang="en-US" sz="1020" dirty="0"/>
+            <a:endParaRPr lang="en-US" sz="1100" dirty="0"/>
           </a:p>
         </p:txBody>
       </p:sp>
@@ -7445,7 +9579,7 @@
           </a:ln>
         </p:spPr>
         <p:txBody>
-          <a:bodyPr/>
+          <a:bodyPr lIns="91434" tIns="45718" rIns="91434" bIns="45718"/>
           <a:lstStyle/>
           <a:p>
             <a:endParaRPr lang="en-US"/>
@@ -7479,7 +9613,7 @@
           </a:ln>
         </p:spPr>
         <p:txBody>
-          <a:bodyPr/>
+          <a:bodyPr lIns="91434" tIns="45718" rIns="91434" bIns="45718"/>
           <a:lstStyle/>
           <a:p>
             <a:endParaRPr lang="en-US"/>
@@ -7507,9 +9641,7 @@
           <a:bodyPr wrap="square" lIns="0" tIns="0" rIns="0" bIns="0" rtlCol="0" anchor="ctr"/>
           <a:lstStyle/>
           <a:p>
-            <a:pPr marL="0" indent="0" algn="ctr">
-              <a:buNone/>
-            </a:pPr>
+            <a:pPr algn="ctr"/>
             <a:r>
               <a:rPr lang="en-US" sz="1500" b="1" dirty="0">
                 <a:solidFill>
@@ -7546,11 +9678,9 @@
           <a:bodyPr wrap="square" lIns="0" tIns="0" rIns="0" bIns="0" rtlCol="0" anchor="ctr"/>
           <a:lstStyle/>
           <a:p>
-            <a:pPr marL="0" indent="0" algn="ctr">
-              <a:buNone/>
-            </a:pPr>
-            <a:r>
-              <a:rPr lang="en-US" sz="1020" dirty="0">
+            <a:pPr algn="ctr"/>
+            <a:r>
+              <a:rPr lang="en-US" sz="1100" dirty="0">
                 <a:solidFill>
                   <a:srgbClr val="5F6875"/>
                 </a:solidFill>
@@ -7560,7 +9690,7 @@
               </a:rPr>
               <a:t>Reliability, access control, resilience, and risk management</a:t>
             </a:r>
-            <a:endParaRPr lang="en-US" sz="1020" dirty="0"/>
+            <a:endParaRPr lang="en-US" sz="1100" dirty="0"/>
           </a:p>
         </p:txBody>
       </p:sp>
@@ -7591,7 +9721,7 @@
           </a:ln>
         </p:spPr>
         <p:txBody>
-          <a:bodyPr/>
+          <a:bodyPr lIns="91434" tIns="45718" rIns="91434" bIns="45718"/>
           <a:lstStyle/>
           <a:p>
             <a:endParaRPr lang="en-US"/>
@@ -7625,7 +9755,7 @@
           </a:ln>
         </p:spPr>
         <p:txBody>
-          <a:bodyPr/>
+          <a:bodyPr lIns="91434" tIns="45718" rIns="91434" bIns="45718"/>
           <a:lstStyle/>
           <a:p>
             <a:endParaRPr lang="en-US"/>
@@ -7653,9 +9783,7 @@
           <a:bodyPr wrap="square" lIns="0" tIns="0" rIns="0" bIns="0" rtlCol="0" anchor="ctr"/>
           <a:lstStyle/>
           <a:p>
-            <a:pPr marL="0" indent="0" algn="ctr">
-              <a:buNone/>
-            </a:pPr>
+            <a:pPr algn="ctr"/>
             <a:r>
               <a:rPr lang="en-US" sz="1500" b="1" dirty="0">
                 <a:solidFill>
@@ -7692,11 +9820,9 @@
           <a:bodyPr wrap="square" lIns="0" tIns="0" rIns="0" bIns="0" rtlCol="0" anchor="ctr"/>
           <a:lstStyle/>
           <a:p>
-            <a:pPr marL="0" indent="0" algn="ctr">
-              <a:buNone/>
-            </a:pPr>
-            <a:r>
-              <a:rPr lang="en-US" sz="1020" dirty="0">
+            <a:pPr algn="ctr"/>
+            <a:r>
+              <a:rPr lang="en-US" sz="1100" dirty="0">
                 <a:solidFill>
                   <a:srgbClr val="5F6875"/>
                 </a:solidFill>
@@ -7706,7 +9832,7 @@
               </a:rPr>
               <a:t>Cadence, governance, delivery confidence, and accountability</a:t>
             </a:r>
-            <a:endParaRPr lang="en-US" sz="1020" dirty="0"/>
+            <a:endParaRPr lang="en-US" sz="1100" dirty="0"/>
           </a:p>
         </p:txBody>
       </p:sp>
@@ -7737,7 +9863,7 @@
           </a:ln>
         </p:spPr>
         <p:txBody>
-          <a:bodyPr/>
+          <a:bodyPr lIns="91434" tIns="45718" rIns="91434" bIns="45718"/>
           <a:lstStyle/>
           <a:p>
             <a:endParaRPr lang="en-US"/>
@@ -7765,11 +9891,9 @@
           <a:bodyPr wrap="square" lIns="0" tIns="0" rIns="0" bIns="0" rtlCol="0" anchor="ctr"/>
           <a:lstStyle/>
           <a:p>
-            <a:pPr marL="0" indent="0" algn="ctr">
-              <a:buNone/>
-            </a:pPr>
-            <a:r>
-              <a:rPr lang="en-US" sz="1800" b="1" dirty="0">
+            <a:pPr algn="ctr"/>
+            <a:r>
+              <a:rPr lang="en-US" b="1" dirty="0">
                 <a:solidFill>
                   <a:srgbClr val="041736"/>
                 </a:solidFill>
@@ -7779,7 +9903,7 @@
               </a:rPr>
               <a:t>CTO mandate</a:t>
             </a:r>
-            <a:endParaRPr lang="en-US" sz="1800" dirty="0"/>
+            <a:endParaRPr lang="en-US" dirty="0"/>
           </a:p>
         </p:txBody>
       </p:sp>
@@ -7804,11 +9928,9 @@
           <a:bodyPr wrap="square" lIns="0" tIns="0" rIns="0" bIns="0" rtlCol="0" anchor="ctr"/>
           <a:lstStyle/>
           <a:p>
-            <a:pPr marL="0" indent="0" algn="ctr">
-              <a:buNone/>
-            </a:pPr>
-            <a:r>
-              <a:rPr lang="en-US" sz="1110" dirty="0">
+            <a:pPr algn="ctr"/>
+            <a:r>
+              <a:rPr lang="en-US" sz="1100" dirty="0">
                 <a:solidFill>
                   <a:srgbClr val="5F6875"/>
                 </a:solidFill>
@@ -7818,7 +9940,7 @@
               </a:rPr>
               <a:t>Turn technology into a durable business advantage by aligning product, platform, and people around scalable execution.</a:t>
             </a:r>
-            <a:endParaRPr lang="en-US" sz="1110" dirty="0"/>
+            <a:endParaRPr lang="en-US" sz="1100" dirty="0"/>
           </a:p>
         </p:txBody>
       </p:sp>
@@ -7840,14 +9962,12 @@
           <a:ln/>
         </p:spPr>
         <p:txBody>
-          <a:bodyPr wrap="square" lIns="254" tIns="254" rIns="254" bIns="254" rtlCol="0" anchor="ctr"/>
-          <a:lstStyle/>
-          <a:p>
-            <a:pPr marL="0" indent="0" algn="ctr">
-              <a:buNone/>
-            </a:pPr>
-            <a:r>
-              <a:rPr lang="en-US" sz="1140" dirty="0">
+          <a:bodyPr wrap="square" lIns="255" tIns="255" rIns="255" bIns="255" rtlCol="0" anchor="ctr"/>
+          <a:lstStyle/>
+          <a:p>
+            <a:pPr algn="ctr"/>
+            <a:r>
+              <a:rPr lang="en-US" sz="1200" dirty="0">
                 <a:solidFill>
                   <a:srgbClr val="5F6875"/>
                 </a:solidFill>
@@ -7857,7 +9977,7 @@
               </a:rPr>
               <a:t>A strong CTO creates clarity across business priorities, technical decisions, and delivery discipline — not just code.</a:t>
             </a:r>
-            <a:endParaRPr lang="en-US" sz="1140" dirty="0"/>
+            <a:endParaRPr lang="en-US" sz="1200" dirty="0"/>
           </a:p>
         </p:txBody>
       </p:sp>
@@ -7870,6 +9990,127 @@
 </file>
 
 <file path=ppt/slides/slide5.xml><?xml version="1.0" encoding="utf-8"?>
+<p:sld xmlns:a="http://schemas.openxmlformats.org/drawingml/2006/main" xmlns:r="http://schemas.openxmlformats.org/officeDocument/2006/relationships" xmlns:p="http://schemas.openxmlformats.org/presentationml/2006/main">
+  <p:cSld name="Slide 6">
+    <p:spTree>
+      <p:nvGrpSpPr>
+        <p:cNvPr id="1" name=""/>
+        <p:cNvGrpSpPr/>
+        <p:nvPr/>
+      </p:nvGrpSpPr>
+      <p:grpSpPr>
+        <a:xfrm>
+          <a:off x="0" y="0"/>
+          <a:ext cx="0" cy="0"/>
+          <a:chOff x="0" y="0"/>
+          <a:chExt cx="0" cy="0"/>
+        </a:xfrm>
+      </p:grpSpPr>
+      <p:pic>
+        <p:nvPicPr>
+          <p:cNvPr id="2" name="Image 0" descr="/mnt/data/a_full_screen_ultra_high_resolution_abstract_fu.png"/>
+          <p:cNvPicPr>
+            <a:picLocks noChangeAspect="1"/>
+          </p:cNvPicPr>
+          <p:nvPr/>
+        </p:nvPicPr>
+        <p:blipFill>
+          <a:blip r:embed="rId3"/>
+          <a:stretch>
+            <a:fillRect/>
+          </a:stretch>
+        </p:blipFill>
+        <p:spPr>
+          <a:xfrm>
+            <a:off x="5" y="0"/>
+            <a:ext cx="12191695" cy="6858000"/>
+          </a:xfrm>
+          <a:prstGeom prst="rect">
+            <a:avLst/>
+          </a:prstGeom>
+        </p:spPr>
+      </p:pic>
+      <p:sp>
+        <p:nvSpPr>
+          <p:cNvPr id="3" name="Shape 0"/>
+          <p:cNvSpPr/>
+          <p:nvPr/>
+        </p:nvSpPr>
+        <p:spPr>
+          <a:xfrm>
+            <a:off x="0" y="0"/>
+            <a:ext cx="12191695" cy="6858000"/>
+          </a:xfrm>
+          <a:prstGeom prst="rect">
+            <a:avLst/>
+          </a:prstGeom>
+          <a:solidFill>
+            <a:srgbClr val="041736">
+              <a:alpha val="70000"/>
+            </a:srgbClr>
+          </a:solidFill>
+          <a:ln w="12700">
+            <a:solidFill>
+              <a:srgbClr val="041736">
+                <a:alpha val="0"/>
+              </a:srgbClr>
+            </a:solidFill>
+            <a:prstDash val="solid"/>
+          </a:ln>
+        </p:spPr>
+        <p:txBody>
+          <a:bodyPr lIns="91434" tIns="45718" rIns="91434" bIns="45718"/>
+          <a:lstStyle/>
+          <a:p>
+            <a:endParaRPr lang="en-US"/>
+          </a:p>
+        </p:txBody>
+      </p:sp>
+      <p:sp>
+        <p:nvSpPr>
+          <p:cNvPr id="6" name="Text 3"/>
+          <p:cNvSpPr/>
+          <p:nvPr/>
+        </p:nvSpPr>
+        <p:spPr>
+          <a:xfrm>
+            <a:off x="914395" y="2057400"/>
+            <a:ext cx="5120640" cy="1005840"/>
+          </a:xfrm>
+          <a:prstGeom prst="rect">
+            <a:avLst/>
+          </a:prstGeom>
+          <a:noFill/>
+          <a:ln/>
+        </p:spPr>
+        <p:txBody>
+          <a:bodyPr wrap="square" lIns="0" tIns="0" rIns="0" bIns="0" rtlCol="0" anchor="ctr"/>
+          <a:lstStyle/>
+          <a:p>
+            <a:r>
+              <a:rPr lang="en-US" sz="2800" dirty="0">
+                <a:solidFill>
+                  <a:srgbClr val="FFFFFF"/>
+                </a:solidFill>
+                <a:latin typeface="Akatab" pitchFamily="34" charset="0"/>
+                <a:ea typeface="Akatab" pitchFamily="34" charset="-122"/>
+                <a:cs typeface="Akatab" pitchFamily="34" charset="-120"/>
+              </a:rPr>
+              <a:t>2. Why a CTO Is Needed</a:t>
+            </a:r>
+            <a:endParaRPr lang="en-US" sz="2800" dirty="0"/>
+          </a:p>
+        </p:txBody>
+      </p:sp>
+    </p:spTree>
+  </p:cSld>
+  <p:clrMapOvr>
+    <a:masterClrMapping/>
+  </p:clrMapOvr>
+</p:sld>
+</file>
+
+<file path=ppt/slides/slide6.xml><?xml version="1.0" encoding="utf-8"?>
 <p:sld xmlns:a="http://schemas.openxmlformats.org/drawingml/2006/main" xmlns:r="http://schemas.openxmlformats.org/officeDocument/2006/relationships" xmlns:p="http://schemas.openxmlformats.org/presentationml/2006/main">
   <p:cSld name="Slide 5">
     <p:bg>
@@ -7902,7 +10143,7 @@
         </p:nvSpPr>
         <p:spPr>
           <a:xfrm>
-            <a:off x="0" y="0"/>
+            <a:off x="5" y="0"/>
             <a:ext cx="12191695" cy="6858000"/>
           </a:xfrm>
           <a:prstGeom prst="rect">
@@ -7921,7 +10162,7 @@
           </a:ln>
         </p:spPr>
         <p:txBody>
-          <a:bodyPr/>
+          <a:bodyPr lIns="91434" tIns="45718" rIns="91434" bIns="45718"/>
           <a:lstStyle/>
           <a:p>
             <a:endParaRPr lang="en-US"/>
@@ -7949,9 +10190,6 @@
           <a:bodyPr wrap="square" lIns="0" tIns="0" rIns="0" bIns="0" rtlCol="0" anchor="ctr"/>
           <a:lstStyle/>
           <a:p>
-            <a:pPr marL="0" indent="0">
-              <a:buNone/>
-            </a:pPr>
             <a:r>
               <a:rPr lang="en-US" sz="2300" b="1" dirty="0">
                 <a:solidFill>
@@ -7996,7 +10234,7 @@
           </a:ln>
         </p:spPr>
         <p:txBody>
-          <a:bodyPr/>
+          <a:bodyPr lIns="91434" tIns="45718" rIns="91434" bIns="45718"/>
           <a:lstStyle/>
           <a:p>
             <a:endParaRPr lang="en-US"/>
@@ -8032,7 +10270,7 @@
           </a:ln>
         </p:spPr>
         <p:txBody>
-          <a:bodyPr/>
+          <a:bodyPr lIns="91434" tIns="45718" rIns="91434" bIns="45718"/>
           <a:lstStyle/>
           <a:p>
             <a:endParaRPr lang="en-US"/>
@@ -8066,7 +10304,7 @@
           </a:ln>
         </p:spPr>
         <p:txBody>
-          <a:bodyPr/>
+          <a:bodyPr lIns="91434" tIns="45718" rIns="91434" bIns="45718"/>
           <a:lstStyle/>
           <a:p>
             <a:endParaRPr lang="en-US"/>
@@ -8094,9 +10332,7 @@
           <a:bodyPr wrap="square" lIns="0" tIns="0" rIns="0" bIns="0" rtlCol="0" anchor="ctr"/>
           <a:lstStyle/>
           <a:p>
-            <a:pPr marL="0" indent="0" algn="ctr">
-              <a:buNone/>
-            </a:pPr>
+            <a:pPr algn="ctr"/>
             <a:r>
               <a:rPr lang="en-US" sz="1600" b="1" dirty="0">
                 <a:solidFill>
@@ -8137,7 +10373,7 @@
           </a:ln>
         </p:spPr>
         <p:txBody>
-          <a:bodyPr/>
+          <a:bodyPr lIns="91434" tIns="45718" rIns="91434" bIns="45718"/>
           <a:lstStyle/>
           <a:p>
             <a:endParaRPr lang="en-US"/>
@@ -8167,11 +10403,8 @@
           </a:bodyPr>
           <a:lstStyle/>
           <a:p>
-            <a:pPr marL="0" indent="0">
-              <a:buNone/>
-            </a:pPr>
-            <a:r>
-              <a:rPr lang="en-US" sz="1140" dirty="0">
+            <a:r>
+              <a:rPr lang="en-US" sz="1200" dirty="0">
                 <a:solidFill>
                   <a:srgbClr val="1F1F1F"/>
                 </a:solidFill>
@@ -8181,14 +10414,11 @@
               </a:rPr>
               <a:t>✓ Translate company vision into an executable technical roadmap</a:t>
             </a:r>
-            <a:endParaRPr lang="en-US" sz="1140" dirty="0"/>
-          </a:p>
-          <a:p>
-            <a:pPr marL="0" indent="0">
-              <a:buNone/>
-            </a:pPr>
-            <a:r>
-              <a:rPr lang="en-US" sz="1140" dirty="0">
+            <a:endParaRPr lang="en-US" sz="1200" dirty="0"/>
+          </a:p>
+          <a:p>
+            <a:r>
+              <a:rPr lang="en-US" sz="1200" dirty="0">
                 <a:solidFill>
                   <a:srgbClr val="1F1F1F"/>
                 </a:solidFill>
@@ -8198,14 +10428,11 @@
               </a:rPr>
               <a:t>✓ Prioritize architecture, budget, platform, and build-vs-buy choices</a:t>
             </a:r>
-            <a:endParaRPr lang="en-US" sz="1140" dirty="0"/>
-          </a:p>
-          <a:p>
-            <a:pPr marL="0" indent="0">
-              <a:buNone/>
-            </a:pPr>
-            <a:r>
-              <a:rPr lang="en-US" sz="1140" dirty="0">
+            <a:endParaRPr lang="en-US" sz="1200" dirty="0"/>
+          </a:p>
+          <a:p>
+            <a:r>
+              <a:rPr lang="en-US" sz="1200" dirty="0">
                 <a:solidFill>
                   <a:srgbClr val="1F1F1F"/>
                 </a:solidFill>
@@ -8215,7 +10442,7 @@
               </a:rPr>
               <a:t>✓ Keep technology tied to growth, efficiency, and customer value</a:t>
             </a:r>
-            <a:endParaRPr lang="en-US" sz="1140" dirty="0"/>
+            <a:endParaRPr lang="en-US" sz="1200" dirty="0"/>
           </a:p>
         </p:txBody>
       </p:sp>
@@ -8246,7 +10473,7 @@
           </a:ln>
         </p:spPr>
         <p:txBody>
-          <a:bodyPr/>
+          <a:bodyPr lIns="91434" tIns="45718" rIns="91434" bIns="45718"/>
           <a:lstStyle/>
           <a:p>
             <a:endParaRPr lang="en-US"/>
@@ -8274,9 +10501,7 @@
           <a:bodyPr wrap="square" lIns="0" tIns="0" rIns="0" bIns="0" rtlCol="0" anchor="ctr"/>
           <a:lstStyle/>
           <a:p>
-            <a:pPr marL="0" indent="0" algn="ctr">
-              <a:buNone/>
-            </a:pPr>
+            <a:pPr algn="ctr"/>
             <a:r>
               <a:rPr lang="en-US" sz="1600" b="1" dirty="0">
                 <a:solidFill>
@@ -8317,7 +10542,7 @@
           </a:ln>
         </p:spPr>
         <p:txBody>
-          <a:bodyPr/>
+          <a:bodyPr lIns="91434" tIns="45718" rIns="91434" bIns="45718"/>
           <a:lstStyle/>
           <a:p>
             <a:endParaRPr lang="en-US"/>
@@ -8347,11 +10572,8 @@
           </a:bodyPr>
           <a:lstStyle/>
           <a:p>
-            <a:pPr marL="0" indent="0">
-              <a:buNone/>
-            </a:pPr>
-            <a:r>
-              <a:rPr lang="en-US" sz="1140" dirty="0">
+            <a:r>
+              <a:rPr lang="en-US" sz="1200" dirty="0">
                 <a:solidFill>
                   <a:srgbClr val="1F1F1F"/>
                 </a:solidFill>
@@ -8361,14 +10583,11 @@
               </a:rPr>
               <a:t>✓ Architect for performance, security, maintainability, and expansion</a:t>
             </a:r>
-            <a:endParaRPr lang="en-US" sz="1140" dirty="0"/>
-          </a:p>
-          <a:p>
-            <a:pPr marL="0" indent="0">
-              <a:buNone/>
-            </a:pPr>
-            <a:r>
-              <a:rPr lang="en-US" sz="1140" dirty="0">
+            <a:endParaRPr lang="en-US" sz="1200" dirty="0"/>
+          </a:p>
+          <a:p>
+            <a:r>
+              <a:rPr lang="en-US" sz="1200" dirty="0">
                 <a:solidFill>
                   <a:srgbClr val="1F1F1F"/>
                 </a:solidFill>
@@ -8378,14 +10597,11 @@
               </a:rPr>
               <a:t>✓ Reduce technical debt while preserving delivery speed</a:t>
             </a:r>
-            <a:endParaRPr lang="en-US" sz="1140" dirty="0"/>
-          </a:p>
-          <a:p>
-            <a:pPr marL="0" indent="0">
-              <a:buNone/>
-            </a:pPr>
-            <a:r>
-              <a:rPr lang="en-US" sz="1140" dirty="0">
+            <a:endParaRPr lang="en-US" sz="1200" dirty="0"/>
+          </a:p>
+          <a:p>
+            <a:r>
+              <a:rPr lang="en-US" sz="1200" dirty="0">
                 <a:solidFill>
                   <a:srgbClr val="1F1F1F"/>
                 </a:solidFill>
@@ -8395,7 +10611,7 @@
               </a:rPr>
               <a:t>✓ Introduce engineering discipline, observability, and quality gates</a:t>
             </a:r>
-            <a:endParaRPr lang="en-US" sz="1140" dirty="0"/>
+            <a:endParaRPr lang="en-US" sz="1200" dirty="0"/>
           </a:p>
         </p:txBody>
       </p:sp>
@@ -8426,7 +10642,7 @@
           </a:ln>
         </p:spPr>
         <p:txBody>
-          <a:bodyPr/>
+          <a:bodyPr lIns="91434" tIns="45718" rIns="91434" bIns="45718"/>
           <a:lstStyle/>
           <a:p>
             <a:endParaRPr lang="en-US"/>
@@ -8454,9 +10670,7 @@
           <a:bodyPr wrap="square" lIns="0" tIns="0" rIns="0" bIns="0" rtlCol="0" anchor="ctr"/>
           <a:lstStyle/>
           <a:p>
-            <a:pPr marL="0" indent="0" algn="ctr">
-              <a:buNone/>
-            </a:pPr>
+            <a:pPr algn="ctr"/>
             <a:r>
               <a:rPr lang="en-US" sz="1600" b="1" dirty="0">
                 <a:solidFill>
@@ -8497,7 +10711,7 @@
           </a:ln>
         </p:spPr>
         <p:txBody>
-          <a:bodyPr/>
+          <a:bodyPr lIns="91434" tIns="45718" rIns="91434" bIns="45718"/>
           <a:lstStyle/>
           <a:p>
             <a:endParaRPr lang="en-US"/>
@@ -8527,11 +10741,8 @@
           </a:bodyPr>
           <a:lstStyle/>
           <a:p>
-            <a:pPr marL="0" indent="0">
-              <a:buNone/>
-            </a:pPr>
-            <a:r>
-              <a:rPr lang="en-US" sz="1140" dirty="0">
+            <a:r>
+              <a:rPr lang="en-US" sz="1200" dirty="0">
                 <a:solidFill>
                   <a:srgbClr val="1F1F1F"/>
                 </a:solidFill>
@@ -8541,14 +10752,11 @@
               </a:rPr>
               <a:t>✓ Raise technical quality through standards, mentoring, and review culture</a:t>
             </a:r>
-            <a:endParaRPr lang="en-US" sz="1140" dirty="0"/>
-          </a:p>
-          <a:p>
-            <a:pPr marL="0" indent="0">
-              <a:buNone/>
-            </a:pPr>
-            <a:r>
-              <a:rPr lang="en-US" sz="1140" dirty="0">
+            <a:endParaRPr lang="en-US" sz="1200" dirty="0"/>
+          </a:p>
+          <a:p>
+            <a:r>
+              <a:rPr lang="en-US" sz="1200" dirty="0">
                 <a:solidFill>
                   <a:srgbClr val="1F1F1F"/>
                 </a:solidFill>
@@ -8558,14 +10766,11 @@
               </a:rPr>
               <a:t>✓ Create accountability for timelines, outcomes, and ownership</a:t>
             </a:r>
-            <a:endParaRPr lang="en-US" sz="1140" dirty="0"/>
-          </a:p>
-          <a:p>
-            <a:pPr marL="0" indent="0">
-              <a:buNone/>
-            </a:pPr>
-            <a:r>
-              <a:rPr lang="en-US" sz="1140" dirty="0">
+            <a:endParaRPr lang="en-US" sz="1200" dirty="0"/>
+          </a:p>
+          <a:p>
+            <a:r>
+              <a:rPr lang="en-US" sz="1200" dirty="0">
                 <a:solidFill>
                   <a:srgbClr val="1F1F1F"/>
                 </a:solidFill>
@@ -8575,7 +10780,7 @@
               </a:rPr>
               <a:t>✓ Partner with founders, product, design, and operations</a:t>
             </a:r>
-            <a:endParaRPr lang="en-US" sz="1140" dirty="0"/>
+            <a:endParaRPr lang="en-US" sz="1200" dirty="0"/>
           </a:p>
         </p:txBody>
       </p:sp>
@@ -8606,7 +10811,7 @@
           </a:ln>
         </p:spPr>
         <p:txBody>
-          <a:bodyPr/>
+          <a:bodyPr lIns="91434" tIns="45718" rIns="91434" bIns="45718"/>
           <a:lstStyle/>
           <a:p>
             <a:endParaRPr lang="en-US"/>
@@ -8634,11 +10839,9 @@
           <a:bodyPr wrap="square" lIns="0" tIns="0" rIns="0" bIns="0" rtlCol="0" anchor="ctr"/>
           <a:lstStyle/>
           <a:p>
-            <a:pPr marL="0" indent="0" algn="ctr">
-              <a:buNone/>
-            </a:pPr>
-            <a:r>
-              <a:rPr lang="en-US" sz="1440" b="1" dirty="0">
+            <a:pPr algn="ctr"/>
+            <a:r>
+              <a:rPr lang="en-US" sz="1500" b="1" dirty="0">
                 <a:solidFill>
                   <a:srgbClr val="1F1F1F"/>
                 </a:solidFill>
@@ -8648,7 +10851,7 @@
               </a:rPr>
               <a:t>Where I add the most value as a CTO profile</a:t>
             </a:r>
-            <a:endParaRPr lang="en-US" sz="1440" dirty="0"/>
+            <a:endParaRPr lang="en-US" sz="1500" dirty="0"/>
           </a:p>
         </p:txBody>
       </p:sp>
@@ -8675,11 +10878,8 @@
           </a:bodyPr>
           <a:lstStyle/>
           <a:p>
-            <a:pPr marL="0" indent="0">
-              <a:buNone/>
-            </a:pPr>
-            <a:r>
-              <a:rPr lang="en-US" sz="1130" dirty="0">
+            <a:r>
+              <a:rPr lang="en-US" sz="1100" dirty="0">
                 <a:solidFill>
                   <a:srgbClr val="1F1F1F"/>
                 </a:solidFill>
@@ -8689,14 +10889,11 @@
               </a:rPr>
               <a:t>✓ Founder-led or growth-stage companies that need stronger technical direction</a:t>
             </a:r>
-            <a:endParaRPr lang="en-US" sz="1130" dirty="0"/>
-          </a:p>
-          <a:p>
-            <a:pPr marL="0" indent="0">
-              <a:buNone/>
-            </a:pPr>
-            <a:r>
-              <a:rPr lang="en-US" sz="1130" dirty="0">
+            <a:endParaRPr lang="en-US" sz="1100" dirty="0"/>
+          </a:p>
+          <a:p>
+            <a:r>
+              <a:rPr lang="en-US" sz="1100" dirty="0">
                 <a:solidFill>
                   <a:srgbClr val="1F1F1F"/>
                 </a:solidFill>
@@ -8706,14 +10903,11 @@
               </a:rPr>
               <a:t>✓ Organizations modernizing legacy systems without slowing down delivery</a:t>
             </a:r>
-            <a:endParaRPr lang="en-US" sz="1130" dirty="0"/>
-          </a:p>
-          <a:p>
-            <a:pPr marL="0" indent="0">
-              <a:buNone/>
-            </a:pPr>
-            <a:r>
-              <a:rPr lang="en-US" sz="1130" dirty="0">
+            <a:endParaRPr lang="en-US" sz="1100" dirty="0"/>
+          </a:p>
+          <a:p>
+            <a:r>
+              <a:rPr lang="en-US" sz="1100" dirty="0">
                 <a:solidFill>
                   <a:srgbClr val="1F1F1F"/>
                 </a:solidFill>
@@ -8723,14 +10917,11 @@
               </a:rPr>
               <a:t>✓ Product teams that need tighter alignment between architecture, engineering, and outcomes</a:t>
             </a:r>
-            <a:endParaRPr lang="en-US" sz="1130" dirty="0"/>
-          </a:p>
-          <a:p>
-            <a:pPr marL="0" indent="0">
-              <a:buNone/>
-            </a:pPr>
-            <a:r>
-              <a:rPr lang="en-US" sz="1130" dirty="0">
+            <a:endParaRPr lang="en-US" sz="1100" dirty="0"/>
+          </a:p>
+          <a:p>
+            <a:r>
+              <a:rPr lang="en-US" sz="1100" dirty="0">
                 <a:solidFill>
                   <a:srgbClr val="1F1F1F"/>
                 </a:solidFill>
@@ -8740,7 +10931,7 @@
               </a:rPr>
               <a:t>✓ Businesses moving from freelance/vendor execution to a true engineering operating model</a:t>
             </a:r>
-            <a:endParaRPr lang="en-US" sz="1130" dirty="0"/>
+            <a:endParaRPr lang="en-US" sz="1100" dirty="0"/>
           </a:p>
         </p:txBody>
       </p:sp>
@@ -8752,12 +10943,18 @@
 </p:sld>
 </file>
 
-<file path=ppt/slides/slide6.xml><?xml version="1.0" encoding="utf-8"?>
+<file path=ppt/slides/slide7.xml><?xml version="1.0" encoding="utf-8"?>
 <p:sld xmlns:a="http://schemas.openxmlformats.org/drawingml/2006/main" xmlns:r="http://schemas.openxmlformats.org/officeDocument/2006/relationships" xmlns:p="http://schemas.openxmlformats.org/presentationml/2006/main">
-  <p:cSld name="Slide 6">
+  <p:cSld>
     <p:spTree>
       <p:nvGrpSpPr>
-        <p:cNvPr id="1" name=""/>
+        <p:cNvPr id="1" name="">
+          <a:extLst>
+            <a:ext uri="{FF2B5EF4-FFF2-40B4-BE49-F238E27FC236}">
+              <a16:creationId xmlns:a16="http://schemas.microsoft.com/office/drawing/2014/main" id="{A97CDBF0-C3E3-6609-8C0E-4300911134E5}"/>
+            </a:ext>
+          </a:extLst>
+        </p:cNvPr>
         <p:cNvGrpSpPr/>
         <p:nvPr/>
       </p:nvGrpSpPr>
@@ -8771,7 +10968,13 @@
       </p:grpSpPr>
       <p:pic>
         <p:nvPicPr>
-          <p:cNvPr id="2" name="Image 0" descr="/mnt/data/a_full_screen_ultra_high_resolution_abstract_fu.png"/>
+          <p:cNvPr id="2" name="Image 0" descr="/mnt/data/a_full_screen_ultra_high_resolution_abstract_fu.png">
+            <a:extLst>
+              <a:ext uri="{FF2B5EF4-FFF2-40B4-BE49-F238E27FC236}">
+                <a16:creationId xmlns:a16="http://schemas.microsoft.com/office/drawing/2014/main" id="{17911820-6B38-39BF-B658-A26ED2AF1EA9}"/>
+              </a:ext>
+            </a:extLst>
+          </p:cNvPr>
           <p:cNvPicPr>
             <a:picLocks noChangeAspect="1"/>
           </p:cNvPicPr>
@@ -8785,7 +10988,7 @@
         </p:blipFill>
         <p:spPr>
           <a:xfrm>
-            <a:off x="0" y="0"/>
+            <a:off x="5" y="0"/>
             <a:ext cx="12191695" cy="6858000"/>
           </a:xfrm>
           <a:prstGeom prst="rect">
@@ -8795,13 +10998,19 @@
       </p:pic>
       <p:sp>
         <p:nvSpPr>
-          <p:cNvPr id="3" name="Shape 0"/>
-          <p:cNvSpPr/>
-          <p:nvPr/>
-        </p:nvSpPr>
-        <p:spPr>
-          <a:xfrm>
-            <a:off x="0" y="0"/>
+          <p:cNvPr id="3" name="Shape 0">
+            <a:extLst>
+              <a:ext uri="{FF2B5EF4-FFF2-40B4-BE49-F238E27FC236}">
+                <a16:creationId xmlns:a16="http://schemas.microsoft.com/office/drawing/2014/main" id="{5C297FF9-E850-9E35-87EC-002C9D06A01A}"/>
+              </a:ext>
+            </a:extLst>
+          </p:cNvPr>
+          <p:cNvSpPr/>
+          <p:nvPr/>
+        </p:nvSpPr>
+        <p:spPr>
+          <a:xfrm>
+            <a:off x="5" y="0"/>
             <a:ext cx="12191695" cy="6858000"/>
           </a:xfrm>
           <a:prstGeom prst="rect">
@@ -8822,7 +11031,7 @@
           </a:ln>
         </p:spPr>
         <p:txBody>
-          <a:bodyPr/>
+          <a:bodyPr lIns="91434" tIns="45718" rIns="91434" bIns="45718"/>
           <a:lstStyle/>
           <a:p>
             <a:endParaRPr lang="en-US"/>
@@ -8831,79 +11040,13 @@
       </p:sp>
       <p:sp>
         <p:nvSpPr>
-          <p:cNvPr id="4" name="Shape 1"/>
-          <p:cNvSpPr/>
-          <p:nvPr/>
-        </p:nvSpPr>
-        <p:spPr>
-          <a:xfrm>
-            <a:off x="5413248" y="292608"/>
-            <a:ext cx="384048" cy="64008"/>
-          </a:xfrm>
-          <a:prstGeom prst="roundRect">
-            <a:avLst>
-              <a:gd name="adj" fmla="val 42857"/>
-            </a:avLst>
-          </a:prstGeom>
-          <a:solidFill>
-            <a:srgbClr val="FFFFFF"/>
-          </a:solidFill>
-          <a:ln w="12700">
-            <a:solidFill>
-              <a:srgbClr val="FFFFFF">
-                <a:alpha val="0"/>
-              </a:srgbClr>
-            </a:solidFill>
-            <a:prstDash val="solid"/>
-          </a:ln>
-        </p:spPr>
-        <p:txBody>
-          <a:bodyPr/>
-          <a:lstStyle/>
-          <a:p>
-            <a:endParaRPr lang="en-US"/>
-          </a:p>
-        </p:txBody>
-      </p:sp>
-      <p:sp>
-        <p:nvSpPr>
-          <p:cNvPr id="5" name="Shape 2"/>
-          <p:cNvSpPr/>
-          <p:nvPr/>
-        </p:nvSpPr>
-        <p:spPr>
-          <a:xfrm>
-            <a:off x="11475720" y="2057400"/>
-            <a:ext cx="45720" cy="475488"/>
-          </a:xfrm>
-          <a:prstGeom prst="roundRect">
-            <a:avLst>
-              <a:gd name="adj" fmla="val 40000"/>
-            </a:avLst>
-          </a:prstGeom>
-          <a:solidFill>
-            <a:srgbClr val="FFFFFF"/>
-          </a:solidFill>
-          <a:ln w="12700">
-            <a:solidFill>
-              <a:srgbClr val="FFFFFF">
-                <a:alpha val="0"/>
-              </a:srgbClr>
-            </a:solidFill>
-            <a:prstDash val="solid"/>
-          </a:ln>
-        </p:spPr>
-        <p:txBody>
-          <a:bodyPr/>
-          <a:lstStyle/>
-          <a:p>
-            <a:endParaRPr lang="en-US"/>
-          </a:p>
-        </p:txBody>
-      </p:sp>
-      <p:sp>
-        <p:nvSpPr>
-          <p:cNvPr id="6" name="Text 3"/>
+          <p:cNvPr id="6" name="Text 3">
+            <a:extLst>
+              <a:ext uri="{FF2B5EF4-FFF2-40B4-BE49-F238E27FC236}">
+                <a16:creationId xmlns:a16="http://schemas.microsoft.com/office/drawing/2014/main" id="{DCD8270E-836D-C7B3-C1FA-77FB9F10CA62}"/>
+              </a:ext>
+            </a:extLst>
+          </p:cNvPr>
           <p:cNvSpPr/>
           <p:nvPr/>
         </p:nvSpPr>
@@ -8922,9 +11065,6 @@
           <a:bodyPr wrap="square" lIns="0" tIns="0" rIns="0" bIns="0" rtlCol="0" anchor="ctr"/>
           <a:lstStyle/>
           <a:p>
-            <a:pPr marL="0" indent="0" algn="l">
-              <a:buNone/>
-            </a:pPr>
             <a:r>
               <a:rPr lang="en-US" sz="2800" dirty="0">
                 <a:solidFill>
@@ -8934,13 +11074,18 @@
                 <a:ea typeface="Akatab" pitchFamily="34" charset="-122"/>
                 <a:cs typeface="Akatab" pitchFamily="34" charset="-120"/>
               </a:rPr>
-              <a:t>2. My Expertise &amp; Capabilities</a:t>
+              <a:t>3. My Expertise &amp; Capabilities</a:t>
             </a:r>
             <a:endParaRPr lang="en-US" sz="2800" dirty="0"/>
           </a:p>
         </p:txBody>
       </p:sp>
     </p:spTree>
+    <p:extLst>
+      <p:ext uri="{BB962C8B-B14F-4D97-AF65-F5344CB8AC3E}">
+        <p14:creationId xmlns:p14="http://schemas.microsoft.com/office/powerpoint/2010/main" val="82318278"/>
+      </p:ext>
+    </p:extLst>
   </p:cSld>
   <p:clrMapOvr>
     <a:masterClrMapping/>
@@ -8948,7 +11093,7 @@
 </p:sld>
 </file>
 
-<file path=ppt/slides/slide7.xml><?xml version="1.0" encoding="utf-8"?>
+<file path=ppt/slides/slide8.xml><?xml version="1.0" encoding="utf-8"?>
 <p:sld xmlns:a="http://schemas.openxmlformats.org/drawingml/2006/main" xmlns:r="http://schemas.openxmlformats.org/officeDocument/2006/relationships" xmlns:p="http://schemas.openxmlformats.org/presentationml/2006/main">
   <p:cSld name="Slide 7">
     <p:bg>
@@ -8981,7 +11126,7 @@
         </p:nvSpPr>
         <p:spPr>
           <a:xfrm>
-            <a:off x="0" y="0"/>
+            <a:off x="5" y="0"/>
             <a:ext cx="12191695" cy="6858000"/>
           </a:xfrm>
           <a:prstGeom prst="rect">
@@ -9000,7 +11145,7 @@
           </a:ln>
         </p:spPr>
         <p:txBody>
-          <a:bodyPr/>
+          <a:bodyPr lIns="91434" tIns="45718" rIns="91434" bIns="45718"/>
           <a:lstStyle/>
           <a:p>
             <a:endParaRPr lang="en-US"/>
@@ -9028,9 +11173,6 @@
           <a:bodyPr wrap="square" lIns="0" tIns="0" rIns="0" bIns="0" rtlCol="0" anchor="ctr"/>
           <a:lstStyle/>
           <a:p>
-            <a:pPr marL="0" indent="0">
-              <a:buNone/>
-            </a:pPr>
             <a:r>
               <a:rPr lang="en-US" sz="2300" b="1" dirty="0">
                 <a:solidFill>
@@ -9075,7 +11217,7 @@
           </a:ln>
         </p:spPr>
         <p:txBody>
-          <a:bodyPr/>
+          <a:bodyPr lIns="91434" tIns="45718" rIns="91434" bIns="45718"/>
           <a:lstStyle/>
           <a:p>
             <a:endParaRPr lang="en-US"/>
@@ -9111,7 +11253,7 @@
           </a:ln>
         </p:spPr>
         <p:txBody>
-          <a:bodyPr/>
+          <a:bodyPr lIns="91434" tIns="45718" rIns="91434" bIns="45718"/>
           <a:lstStyle/>
           <a:p>
             <a:endParaRPr lang="en-US"/>
@@ -9145,7 +11287,7 @@
           </a:ln>
         </p:spPr>
         <p:txBody>
-          <a:bodyPr/>
+          <a:bodyPr lIns="91434" tIns="45718" rIns="91434" bIns="45718"/>
           <a:lstStyle/>
           <a:p>
             <a:endParaRPr lang="en-US"/>
@@ -9173,9 +11315,7 @@
           <a:bodyPr wrap="square" lIns="0" tIns="0" rIns="0" bIns="0" rtlCol="0" anchor="ctr"/>
           <a:lstStyle/>
           <a:p>
-            <a:pPr marL="0" indent="0" algn="ctr">
-              <a:buNone/>
-            </a:pPr>
+            <a:pPr algn="ctr"/>
             <a:r>
               <a:rPr lang="en-US" sz="1600" b="1" dirty="0">
                 <a:solidFill>
@@ -9216,7 +11356,7 @@
           </a:ln>
         </p:spPr>
         <p:txBody>
-          <a:bodyPr/>
+          <a:bodyPr lIns="91434" tIns="45718" rIns="91434" bIns="45718"/>
           <a:lstStyle/>
           <a:p>
             <a:endParaRPr lang="en-US"/>
@@ -9246,11 +11386,8 @@
           </a:bodyPr>
           <a:lstStyle/>
           <a:p>
-            <a:pPr marL="0" indent="0">
-              <a:buNone/>
-            </a:pPr>
-            <a:r>
-              <a:rPr lang="en-US" sz="1140" dirty="0">
+            <a:r>
+              <a:rPr lang="en-US" sz="1200" dirty="0">
                 <a:solidFill>
                   <a:srgbClr val="1F1F1F"/>
                 </a:solidFill>
@@ -9260,14 +11397,11 @@
               </a:rPr>
               <a:t>✓ Technical vision, target-state planning, and roadmap thinking</a:t>
             </a:r>
-            <a:endParaRPr lang="en-US" sz="1140" dirty="0"/>
-          </a:p>
-          <a:p>
-            <a:pPr marL="0" indent="0">
-              <a:buNone/>
-            </a:pPr>
-            <a:r>
-              <a:rPr lang="en-US" sz="1140" dirty="0">
+            <a:endParaRPr lang="en-US" sz="1200" dirty="0"/>
+          </a:p>
+          <a:p>
+            <a:r>
+              <a:rPr lang="en-US" sz="1200" dirty="0">
                 <a:solidFill>
                   <a:srgbClr val="1F1F1F"/>
                 </a:solidFill>
@@ -9277,14 +11411,11 @@
               </a:rPr>
               <a:t>✓ System design, modular architecture, APIs, and integrations</a:t>
             </a:r>
-            <a:endParaRPr lang="en-US" sz="1140" dirty="0"/>
-          </a:p>
-          <a:p>
-            <a:pPr marL="0" indent="0">
-              <a:buNone/>
-            </a:pPr>
-            <a:r>
-              <a:rPr lang="en-US" sz="1140" dirty="0">
+            <a:endParaRPr lang="en-US" sz="1200" dirty="0"/>
+          </a:p>
+          <a:p>
+            <a:r>
+              <a:rPr lang="en-US" sz="1200" dirty="0">
                 <a:solidFill>
                   <a:srgbClr val="1F1F1F"/>
                 </a:solidFill>
@@ -9294,14 +11425,11 @@
               </a:rPr>
               <a:t>✓ Build-vs-buy evaluation and modernization tradeoffs</a:t>
             </a:r>
-            <a:endParaRPr lang="en-US" sz="1140" dirty="0"/>
-          </a:p>
-          <a:p>
-            <a:pPr marL="0" indent="0">
-              <a:buNone/>
-            </a:pPr>
-            <a:r>
-              <a:rPr lang="en-US" sz="1140" dirty="0">
+            <a:endParaRPr lang="en-US" sz="1200" dirty="0"/>
+          </a:p>
+          <a:p>
+            <a:r>
+              <a:rPr lang="en-US" sz="1200" dirty="0">
                 <a:solidFill>
                   <a:srgbClr val="1F1F1F"/>
                 </a:solidFill>
@@ -9311,7 +11439,7 @@
               </a:rPr>
               <a:t>✓ Future-proof thinking across web, platforms, and enterprise systems</a:t>
             </a:r>
-            <a:endParaRPr lang="en-US" sz="1140" dirty="0"/>
+            <a:endParaRPr lang="en-US" sz="1200" dirty="0"/>
           </a:p>
         </p:txBody>
       </p:sp>
@@ -9342,7 +11470,7 @@
           </a:ln>
         </p:spPr>
         <p:txBody>
-          <a:bodyPr/>
+          <a:bodyPr lIns="91434" tIns="45718" rIns="91434" bIns="45718"/>
           <a:lstStyle/>
           <a:p>
             <a:endParaRPr lang="en-US"/>
@@ -9370,9 +11498,7 @@
           <a:bodyPr wrap="square" lIns="0" tIns="0" rIns="0" bIns="0" rtlCol="0" anchor="ctr"/>
           <a:lstStyle/>
           <a:p>
-            <a:pPr marL="0" indent="0" algn="ctr">
-              <a:buNone/>
-            </a:pPr>
+            <a:pPr algn="ctr"/>
             <a:r>
               <a:rPr lang="en-US" sz="1600" b="1" dirty="0">
                 <a:solidFill>
@@ -9413,7 +11539,7 @@
           </a:ln>
         </p:spPr>
         <p:txBody>
-          <a:bodyPr/>
+          <a:bodyPr lIns="91434" tIns="45718" rIns="91434" bIns="45718"/>
           <a:lstStyle/>
           <a:p>
             <a:endParaRPr lang="en-US"/>
@@ -9443,11 +11569,8 @@
           </a:bodyPr>
           <a:lstStyle/>
           <a:p>
-            <a:pPr marL="0" indent="0">
-              <a:buNone/>
-            </a:pPr>
-            <a:r>
-              <a:rPr lang="en-US" sz="1140" dirty="0">
+            <a:r>
+              <a:rPr lang="en-US" sz="1200" dirty="0">
                 <a:solidFill>
                   <a:srgbClr val="1F1F1F"/>
                 </a:solidFill>
@@ -9457,14 +11580,11 @@
               </a:rPr>
               <a:t>✓ Frontend and backend development across modern JavaScript stacks</a:t>
             </a:r>
-            <a:endParaRPr lang="en-US" sz="1140" dirty="0"/>
-          </a:p>
-          <a:p>
-            <a:pPr marL="0" indent="0">
-              <a:buNone/>
-            </a:pPr>
-            <a:r>
-              <a:rPr lang="en-US" sz="1140" dirty="0">
+            <a:endParaRPr lang="en-US" sz="1200" dirty="0"/>
+          </a:p>
+          <a:p>
+            <a:r>
+              <a:rPr lang="en-US" sz="1200" dirty="0">
                 <a:solidFill>
                   <a:srgbClr val="1F1F1F"/>
                 </a:solidFill>
@@ -9474,14 +11594,11 @@
               </a:rPr>
               <a:t>✓ Release discipline, maintainable code, and lifecycle ownership</a:t>
             </a:r>
-            <a:endParaRPr lang="en-US" sz="1140" dirty="0"/>
-          </a:p>
-          <a:p>
-            <a:pPr marL="0" indent="0">
-              <a:buNone/>
-            </a:pPr>
-            <a:r>
-              <a:rPr lang="en-US" sz="1140" dirty="0">
+            <a:endParaRPr lang="en-US" sz="1200" dirty="0"/>
+          </a:p>
+          <a:p>
+            <a:r>
+              <a:rPr lang="en-US" sz="1200" dirty="0">
                 <a:solidFill>
                   <a:srgbClr val="1F1F1F"/>
                 </a:solidFill>
@@ -9491,14 +11608,11 @@
               </a:rPr>
               <a:t>✓ Performance optimization and user experience awareness</a:t>
             </a:r>
-            <a:endParaRPr lang="en-US" sz="1140" dirty="0"/>
-          </a:p>
-          <a:p>
-            <a:pPr marL="0" indent="0">
-              <a:buNone/>
-            </a:pPr>
-            <a:r>
-              <a:rPr lang="en-US" sz="1140" dirty="0">
+            <a:endParaRPr lang="en-US" sz="1200" dirty="0"/>
+          </a:p>
+          <a:p>
+            <a:r>
+              <a:rPr lang="en-US" sz="1200" dirty="0">
                 <a:solidFill>
                   <a:srgbClr val="1F1F1F"/>
                 </a:solidFill>
@@ -9508,7 +11622,7 @@
               </a:rPr>
               <a:t>✓ Hands-on delivery from concept through deployment</a:t>
             </a:r>
-            <a:endParaRPr lang="en-US" sz="1140" dirty="0"/>
+            <a:endParaRPr lang="en-US" sz="1200" dirty="0"/>
           </a:p>
         </p:txBody>
       </p:sp>
@@ -9539,7 +11653,7 @@
           </a:ln>
         </p:spPr>
         <p:txBody>
-          <a:bodyPr/>
+          <a:bodyPr lIns="91434" tIns="45718" rIns="91434" bIns="45718"/>
           <a:lstStyle/>
           <a:p>
             <a:endParaRPr lang="en-US"/>
@@ -9567,9 +11681,7 @@
           <a:bodyPr wrap="square" lIns="0" tIns="0" rIns="0" bIns="0" rtlCol="0" anchor="ctr"/>
           <a:lstStyle/>
           <a:p>
-            <a:pPr marL="0" indent="0" algn="ctr">
-              <a:buNone/>
-            </a:pPr>
+            <a:pPr algn="ctr"/>
             <a:r>
               <a:rPr lang="en-US" sz="1600" b="1" dirty="0">
                 <a:solidFill>
@@ -9610,7 +11722,7 @@
           </a:ln>
         </p:spPr>
         <p:txBody>
-          <a:bodyPr/>
+          <a:bodyPr lIns="91434" tIns="45718" rIns="91434" bIns="45718"/>
           <a:lstStyle/>
           <a:p>
             <a:endParaRPr lang="en-US"/>
@@ -9640,11 +11752,8 @@
           </a:bodyPr>
           <a:lstStyle/>
           <a:p>
-            <a:pPr marL="0" indent="0">
-              <a:buNone/>
-            </a:pPr>
-            <a:r>
-              <a:rPr lang="en-US" sz="1140" dirty="0">
+            <a:r>
+              <a:rPr lang="en-US" sz="1200" dirty="0">
                 <a:solidFill>
                   <a:srgbClr val="1F1F1F"/>
                 </a:solidFill>
@@ -9654,14 +11763,11 @@
               </a:rPr>
               <a:t>✓ Dashboards, instrumentation, and metrics-driven decision support</a:t>
             </a:r>
-            <a:endParaRPr lang="en-US" sz="1140" dirty="0"/>
-          </a:p>
-          <a:p>
-            <a:pPr marL="0" indent="0">
-              <a:buNone/>
-            </a:pPr>
-            <a:r>
-              <a:rPr lang="en-US" sz="1140" dirty="0">
+            <a:endParaRPr lang="en-US" sz="1200" dirty="0"/>
+          </a:p>
+          <a:p>
+            <a:r>
+              <a:rPr lang="en-US" sz="1200" dirty="0">
                 <a:solidFill>
                   <a:srgbClr val="1F1F1F"/>
                 </a:solidFill>
@@ -9671,14 +11777,11 @@
               </a:rPr>
               <a:t>✓ High-throughput APIs and scalable back-end infrastructure exposure</a:t>
             </a:r>
-            <a:endParaRPr lang="en-US" sz="1140" dirty="0"/>
-          </a:p>
-          <a:p>
-            <a:pPr marL="0" indent="0">
-              <a:buNone/>
-            </a:pPr>
-            <a:r>
-              <a:rPr lang="en-US" sz="1140" dirty="0">
+            <a:endParaRPr lang="en-US" sz="1200" dirty="0"/>
+          </a:p>
+          <a:p>
+            <a:r>
+              <a:rPr lang="en-US" sz="1200" dirty="0">
                 <a:solidFill>
                   <a:srgbClr val="1F1F1F"/>
                 </a:solidFill>
@@ -9688,14 +11791,11 @@
               </a:rPr>
               <a:t>✓ Access control, security-minded implementation, and data protection</a:t>
             </a:r>
-            <a:endParaRPr lang="en-US" sz="1140" dirty="0"/>
-          </a:p>
-          <a:p>
-            <a:pPr marL="0" indent="0">
-              <a:buNone/>
-            </a:pPr>
-            <a:r>
-              <a:rPr lang="en-US" sz="1140" dirty="0">
+            <a:endParaRPr lang="en-US" sz="1200" dirty="0"/>
+          </a:p>
+          <a:p>
+            <a:r>
+              <a:rPr lang="en-US" sz="1200" dirty="0">
                 <a:solidFill>
                   <a:srgbClr val="1F1F1F"/>
                 </a:solidFill>
@@ -9705,7 +11805,7 @@
               </a:rPr>
               <a:t>✓ Operational thinking for resilience, uptime, and scale</a:t>
             </a:r>
-            <a:endParaRPr lang="en-US" sz="1140" dirty="0"/>
+            <a:endParaRPr lang="en-US" sz="1200" dirty="0"/>
           </a:p>
         </p:txBody>
       </p:sp>
@@ -9730,11 +11830,8 @@
           <a:bodyPr wrap="square" lIns="0" tIns="0" rIns="0" bIns="0" rtlCol="0" anchor="ctr"/>
           <a:lstStyle/>
           <a:p>
-            <a:pPr marL="0" indent="0">
-              <a:buNone/>
-            </a:pPr>
-            <a:r>
-              <a:rPr lang="en-US" sz="1230" b="1" dirty="0">
+            <a:r>
+              <a:rPr lang="en-US" sz="1200" b="1" dirty="0">
                 <a:solidFill>
                   <a:srgbClr val="1F1F1F"/>
                 </a:solidFill>
@@ -9744,7 +11841,7 @@
               </a:rPr>
               <a:t>Core technologies called out in the CV and portfolio</a:t>
             </a:r>
-            <a:endParaRPr lang="en-US" sz="1230" dirty="0"/>
+            <a:endParaRPr lang="en-US" sz="1200" dirty="0"/>
           </a:p>
         </p:txBody>
       </p:sp>
@@ -9775,7 +11872,7 @@
           </a:ln>
         </p:spPr>
         <p:txBody>
-          <a:bodyPr/>
+          <a:bodyPr lIns="91434" tIns="45718" rIns="91434" bIns="45718"/>
           <a:lstStyle/>
           <a:p>
             <a:endParaRPr lang="en-US"/>
@@ -9803,11 +11900,9 @@
           <a:bodyPr wrap="square" lIns="0" tIns="0" rIns="0" bIns="0" rtlCol="0" anchor="ctr"/>
           <a:lstStyle/>
           <a:p>
-            <a:pPr marL="0" indent="0" algn="ctr">
-              <a:buNone/>
-            </a:pPr>
-            <a:r>
-              <a:rPr lang="en-US" sz="950" b="1" dirty="0">
+            <a:pPr algn="ctr"/>
+            <a:r>
+              <a:rPr lang="en-US" sz="900" b="1" dirty="0">
                 <a:solidFill>
                   <a:srgbClr val="173F73"/>
                 </a:solidFill>
@@ -9817,7 +11912,7 @@
               </a:rPr>
               <a:t>React</a:t>
             </a:r>
-            <a:endParaRPr lang="en-US" sz="950" dirty="0"/>
+            <a:endParaRPr lang="en-US" sz="900" dirty="0"/>
           </a:p>
         </p:txBody>
       </p:sp>
@@ -9848,7 +11943,7 @@
           </a:ln>
         </p:spPr>
         <p:txBody>
-          <a:bodyPr/>
+          <a:bodyPr lIns="91434" tIns="45718" rIns="91434" bIns="45718"/>
           <a:lstStyle/>
           <a:p>
             <a:endParaRPr lang="en-US"/>
@@ -9876,11 +11971,9 @@
           <a:bodyPr wrap="square" lIns="0" tIns="0" rIns="0" bIns="0" rtlCol="0" anchor="ctr"/>
           <a:lstStyle/>
           <a:p>
-            <a:pPr marL="0" indent="0" algn="ctr">
-              <a:buNone/>
-            </a:pPr>
-            <a:r>
-              <a:rPr lang="en-US" sz="950" b="1" dirty="0">
+            <a:pPr algn="ctr"/>
+            <a:r>
+              <a:rPr lang="en-US" sz="900" b="1" dirty="0">
                 <a:solidFill>
                   <a:srgbClr val="173F73"/>
                 </a:solidFill>
@@ -9890,7 +11983,7 @@
               </a:rPr>
               <a:t>Angular</a:t>
             </a:r>
-            <a:endParaRPr lang="en-US" sz="950" dirty="0"/>
+            <a:endParaRPr lang="en-US" sz="900" dirty="0"/>
           </a:p>
         </p:txBody>
       </p:sp>
@@ -9921,7 +12014,7 @@
           </a:ln>
         </p:spPr>
         <p:txBody>
-          <a:bodyPr/>
+          <a:bodyPr lIns="91434" tIns="45718" rIns="91434" bIns="45718"/>
           <a:lstStyle/>
           <a:p>
             <a:endParaRPr lang="en-US"/>
@@ -9949,11 +12042,9 @@
           <a:bodyPr wrap="square" lIns="0" tIns="0" rIns="0" bIns="0" rtlCol="0" anchor="ctr"/>
           <a:lstStyle/>
           <a:p>
-            <a:pPr marL="0" indent="0" algn="ctr">
-              <a:buNone/>
-            </a:pPr>
-            <a:r>
-              <a:rPr lang="en-US" sz="950" b="1" dirty="0">
+            <a:pPr algn="ctr"/>
+            <a:r>
+              <a:rPr lang="en-US" sz="900" b="1" dirty="0">
                 <a:solidFill>
                   <a:srgbClr val="173F73"/>
                 </a:solidFill>
@@ -9963,7 +12054,7 @@
               </a:rPr>
               <a:t>Vue</a:t>
             </a:r>
-            <a:endParaRPr lang="en-US" sz="950" dirty="0"/>
+            <a:endParaRPr lang="en-US" sz="900" dirty="0"/>
           </a:p>
         </p:txBody>
       </p:sp>
@@ -9994,7 +12085,7 @@
           </a:ln>
         </p:spPr>
         <p:txBody>
-          <a:bodyPr/>
+          <a:bodyPr lIns="91434" tIns="45718" rIns="91434" bIns="45718"/>
           <a:lstStyle/>
           <a:p>
             <a:endParaRPr lang="en-US"/>
@@ -10022,11 +12113,9 @@
           <a:bodyPr wrap="square" lIns="0" tIns="0" rIns="0" bIns="0" rtlCol="0" anchor="ctr"/>
           <a:lstStyle/>
           <a:p>
-            <a:pPr marL="0" indent="0" algn="ctr">
-              <a:buNone/>
-            </a:pPr>
-            <a:r>
-              <a:rPr lang="en-US" sz="950" b="1" dirty="0">
+            <a:pPr algn="ctr"/>
+            <a:r>
+              <a:rPr lang="en-US" sz="900" b="1" dirty="0">
                 <a:solidFill>
                   <a:srgbClr val="173F73"/>
                 </a:solidFill>
@@ -10036,7 +12125,7 @@
               </a:rPr>
               <a:t>Next.js</a:t>
             </a:r>
-            <a:endParaRPr lang="en-US" sz="950" dirty="0"/>
+            <a:endParaRPr lang="en-US" sz="900" dirty="0"/>
           </a:p>
         </p:txBody>
       </p:sp>
@@ -10067,7 +12156,7 @@
           </a:ln>
         </p:spPr>
         <p:txBody>
-          <a:bodyPr/>
+          <a:bodyPr lIns="91434" tIns="45718" rIns="91434" bIns="45718"/>
           <a:lstStyle/>
           <a:p>
             <a:endParaRPr lang="en-US"/>
@@ -10095,11 +12184,9 @@
           <a:bodyPr wrap="square" lIns="0" tIns="0" rIns="0" bIns="0" rtlCol="0" anchor="ctr"/>
           <a:lstStyle/>
           <a:p>
-            <a:pPr marL="0" indent="0" algn="ctr">
-              <a:buNone/>
-            </a:pPr>
-            <a:r>
-              <a:rPr lang="en-US" sz="950" b="1" dirty="0">
+            <a:pPr algn="ctr"/>
+            <a:r>
+              <a:rPr lang="en-US" sz="900" b="1" dirty="0">
                 <a:solidFill>
                   <a:srgbClr val="173F73"/>
                 </a:solidFill>
@@ -10109,7 +12196,7 @@
               </a:rPr>
               <a:t>Node.js</a:t>
             </a:r>
-            <a:endParaRPr lang="en-US" sz="950" dirty="0"/>
+            <a:endParaRPr lang="en-US" sz="900" dirty="0"/>
           </a:p>
         </p:txBody>
       </p:sp>
@@ -10140,7 +12227,7 @@
           </a:ln>
         </p:spPr>
         <p:txBody>
-          <a:bodyPr/>
+          <a:bodyPr lIns="91434" tIns="45718" rIns="91434" bIns="45718"/>
           <a:lstStyle/>
           <a:p>
             <a:endParaRPr lang="en-US"/>
@@ -10168,11 +12255,9 @@
           <a:bodyPr wrap="square" lIns="0" tIns="0" rIns="0" bIns="0" rtlCol="0" anchor="ctr"/>
           <a:lstStyle/>
           <a:p>
-            <a:pPr marL="0" indent="0" algn="ctr">
-              <a:buNone/>
-            </a:pPr>
-            <a:r>
-              <a:rPr lang="en-US" sz="950" b="1" dirty="0">
+            <a:pPr algn="ctr"/>
+            <a:r>
+              <a:rPr lang="en-US" sz="900" b="1" dirty="0">
                 <a:solidFill>
                   <a:srgbClr val="173F73"/>
                 </a:solidFill>
@@ -10182,7 +12267,7 @@
               </a:rPr>
               <a:t>Express</a:t>
             </a:r>
-            <a:endParaRPr lang="en-US" sz="950" dirty="0"/>
+            <a:endParaRPr lang="en-US" sz="900" dirty="0"/>
           </a:p>
         </p:txBody>
       </p:sp>
@@ -10213,7 +12298,7 @@
           </a:ln>
         </p:spPr>
         <p:txBody>
-          <a:bodyPr/>
+          <a:bodyPr lIns="91434" tIns="45718" rIns="91434" bIns="45718"/>
           <a:lstStyle/>
           <a:p>
             <a:endParaRPr lang="en-US"/>
@@ -10241,11 +12326,9 @@
           <a:bodyPr wrap="square" lIns="0" tIns="0" rIns="0" bIns="0" rtlCol="0" anchor="ctr"/>
           <a:lstStyle/>
           <a:p>
-            <a:pPr marL="0" indent="0" algn="ctr">
-              <a:buNone/>
-            </a:pPr>
-            <a:r>
-              <a:rPr lang="en-US" sz="950" b="1" dirty="0">
+            <a:pPr algn="ctr"/>
+            <a:r>
+              <a:rPr lang="en-US" sz="900" b="1" dirty="0">
                 <a:solidFill>
                   <a:srgbClr val="173F73"/>
                 </a:solidFill>
@@ -10255,7 +12338,7 @@
               </a:rPr>
               <a:t>Laravel</a:t>
             </a:r>
-            <a:endParaRPr lang="en-US" sz="950" dirty="0"/>
+            <a:endParaRPr lang="en-US" sz="900" dirty="0"/>
           </a:p>
         </p:txBody>
       </p:sp>
@@ -10286,7 +12369,7 @@
           </a:ln>
         </p:spPr>
         <p:txBody>
-          <a:bodyPr/>
+          <a:bodyPr lIns="91434" tIns="45718" rIns="91434" bIns="45718"/>
           <a:lstStyle/>
           <a:p>
             <a:endParaRPr lang="en-US"/>
@@ -10314,11 +12397,9 @@
           <a:bodyPr wrap="square" lIns="0" tIns="0" rIns="0" bIns="0" rtlCol="0" anchor="ctr"/>
           <a:lstStyle/>
           <a:p>
-            <a:pPr marL="0" indent="0" algn="ctr">
-              <a:buNone/>
-            </a:pPr>
-            <a:r>
-              <a:rPr lang="en-US" sz="950" b="1" dirty="0">
+            <a:pPr algn="ctr"/>
+            <a:r>
+              <a:rPr lang="en-US" sz="900" b="1" dirty="0">
                 <a:solidFill>
                   <a:srgbClr val="173F73"/>
                 </a:solidFill>
@@ -10328,7 +12409,7 @@
               </a:rPr>
               <a:t>REST APIs</a:t>
             </a:r>
-            <a:endParaRPr lang="en-US" sz="950" dirty="0"/>
+            <a:endParaRPr lang="en-US" sz="900" dirty="0"/>
           </a:p>
         </p:txBody>
       </p:sp>
@@ -10359,7 +12440,7 @@
           </a:ln>
         </p:spPr>
         <p:txBody>
-          <a:bodyPr/>
+          <a:bodyPr lIns="91434" tIns="45718" rIns="91434" bIns="45718"/>
           <a:lstStyle/>
           <a:p>
             <a:endParaRPr lang="en-US"/>
@@ -10387,11 +12468,9 @@
           <a:bodyPr wrap="square" lIns="0" tIns="0" rIns="0" bIns="0" rtlCol="0" anchor="ctr"/>
           <a:lstStyle/>
           <a:p>
-            <a:pPr marL="0" indent="0" algn="ctr">
-              <a:buNone/>
-            </a:pPr>
-            <a:r>
-              <a:rPr lang="en-US" sz="950" b="1" dirty="0">
+            <a:pPr algn="ctr"/>
+            <a:r>
+              <a:rPr lang="en-US" sz="900" b="1" dirty="0">
                 <a:solidFill>
                   <a:srgbClr val="173F73"/>
                 </a:solidFill>
@@ -10401,7 +12480,7 @@
               </a:rPr>
               <a:t>SQL / MySQL</a:t>
             </a:r>
-            <a:endParaRPr lang="en-US" sz="950" dirty="0"/>
+            <a:endParaRPr lang="en-US" sz="900" dirty="0"/>
           </a:p>
         </p:txBody>
       </p:sp>
@@ -10432,7 +12511,7 @@
           </a:ln>
         </p:spPr>
         <p:txBody>
-          <a:bodyPr/>
+          <a:bodyPr lIns="91434" tIns="45718" rIns="91434" bIns="45718"/>
           <a:lstStyle/>
           <a:p>
             <a:endParaRPr lang="en-US"/>
@@ -10460,11 +12539,9 @@
           <a:bodyPr wrap="square" lIns="0" tIns="0" rIns="0" bIns="0" rtlCol="0" anchor="ctr"/>
           <a:lstStyle/>
           <a:p>
-            <a:pPr marL="0" indent="0" algn="ctr">
-              <a:buNone/>
-            </a:pPr>
-            <a:r>
-              <a:rPr lang="en-US" sz="950" b="1" dirty="0">
+            <a:pPr algn="ctr"/>
+            <a:r>
+              <a:rPr lang="en-US" sz="900" b="1" dirty="0">
                 <a:solidFill>
                   <a:srgbClr val="173F73"/>
                 </a:solidFill>
@@ -10474,7 +12551,7 @@
               </a:rPr>
               <a:t>TypeScript</a:t>
             </a:r>
-            <a:endParaRPr lang="en-US" sz="950" dirty="0"/>
+            <a:endParaRPr lang="en-US" sz="900" dirty="0"/>
           </a:p>
         </p:txBody>
       </p:sp>
@@ -10505,7 +12582,7 @@
           </a:ln>
         </p:spPr>
         <p:txBody>
-          <a:bodyPr/>
+          <a:bodyPr lIns="91434" tIns="45718" rIns="91434" bIns="45718"/>
           <a:lstStyle/>
           <a:p>
             <a:endParaRPr lang="en-US"/>
@@ -10533,11 +12610,9 @@
           <a:bodyPr wrap="square" lIns="0" tIns="0" rIns="0" bIns="0" rtlCol="0" anchor="ctr"/>
           <a:lstStyle/>
           <a:p>
-            <a:pPr marL="0" indent="0" algn="ctr">
-              <a:buNone/>
-            </a:pPr>
-            <a:r>
-              <a:rPr lang="en-US" sz="950" b="1" dirty="0">
+            <a:pPr algn="ctr"/>
+            <a:r>
+              <a:rPr lang="en-US" sz="900" b="1" dirty="0">
                 <a:solidFill>
                   <a:srgbClr val="173F73"/>
                 </a:solidFill>
@@ -10547,7 +12622,7 @@
               </a:rPr>
               <a:t>Tailwind</a:t>
             </a:r>
-            <a:endParaRPr lang="en-US" sz="950" dirty="0"/>
+            <a:endParaRPr lang="en-US" sz="900" dirty="0"/>
           </a:p>
         </p:txBody>
       </p:sp>
@@ -10578,7 +12653,7 @@
           </a:ln>
         </p:spPr>
         <p:txBody>
-          <a:bodyPr/>
+          <a:bodyPr lIns="91434" tIns="45718" rIns="91434" bIns="45718"/>
           <a:lstStyle/>
           <a:p>
             <a:endParaRPr lang="en-US"/>
@@ -10606,11 +12681,9 @@
           <a:bodyPr wrap="square" lIns="0" tIns="0" rIns="0" bIns="0" rtlCol="0" anchor="ctr"/>
           <a:lstStyle/>
           <a:p>
-            <a:pPr marL="0" indent="0" algn="ctr">
-              <a:buNone/>
-            </a:pPr>
-            <a:r>
-              <a:rPr lang="en-US" sz="950" b="1" dirty="0">
+            <a:pPr algn="ctr"/>
+            <a:r>
+              <a:rPr lang="en-US" sz="900" b="1" dirty="0">
                 <a:solidFill>
                   <a:srgbClr val="173F73"/>
                 </a:solidFill>
@@ -10620,7 +12693,7 @@
               </a:rPr>
               <a:t>Git</a:t>
             </a:r>
-            <a:endParaRPr lang="en-US" sz="950" dirty="0"/>
+            <a:endParaRPr lang="en-US" sz="900" dirty="0"/>
           </a:p>
         </p:txBody>
       </p:sp>
@@ -10632,7 +12705,7 @@
 </p:sld>
 </file>
 
-<file path=ppt/slides/slide8.xml><?xml version="1.0" encoding="utf-8"?>
+<file path=ppt/slides/slide9.xml><?xml version="1.0" encoding="utf-8"?>
 <p:sld xmlns:a="http://schemas.openxmlformats.org/drawingml/2006/main" xmlns:r="http://schemas.openxmlformats.org/officeDocument/2006/relationships" xmlns:p="http://schemas.openxmlformats.org/presentationml/2006/main">
   <p:cSld>
     <p:bg>
@@ -10690,9 +12763,6 @@
           <a:bodyPr wrap="square" lIns="0" tIns="0" rIns="0" bIns="0" rtlCol="0" anchor="ctr"/>
           <a:lstStyle/>
           <a:p>
-            <a:pPr marL="0" indent="0">
-              <a:buNone/>
-            </a:pPr>
             <a:r>
               <a:rPr lang="en-US" sz="2300" b="1" dirty="0">
                 <a:solidFill>
@@ -10742,7 +12812,7 @@
           </a:ln>
         </p:spPr>
         <p:txBody>
-          <a:bodyPr/>
+          <a:bodyPr lIns="91434" tIns="45718" rIns="91434" bIns="45718"/>
           <a:lstStyle/>
           <a:p>
             <a:endParaRPr lang="en-US"/>
@@ -10763,7 +12833,7 @@
         </p:nvSpPr>
         <p:spPr>
           <a:xfrm>
-            <a:off x="388794" y="5837638"/>
+            <a:off x="388795" y="5837639"/>
             <a:ext cx="11137392" cy="27432"/>
           </a:xfrm>
           <a:prstGeom prst="roundRect">
@@ -10784,7 +12854,7 @@
           </a:ln>
         </p:spPr>
         <p:txBody>
-          <a:bodyPr/>
+          <a:bodyPr lIns="91434" tIns="45718" rIns="91434" bIns="45718"/>
           <a:lstStyle/>
           <a:p>
             <a:endParaRPr lang="en-US"/>
@@ -10805,10 +12875,10 @@
         </p:nvGrpSpPr>
         <p:grpSpPr>
           <a:xfrm>
-            <a:off x="473162" y="742123"/>
-            <a:ext cx="11023266" cy="4848626"/>
+            <a:off x="473165" y="742123"/>
+            <a:ext cx="11005903" cy="4912643"/>
             <a:chOff x="473162" y="742123"/>
-            <a:chExt cx="11023266" cy="5095516"/>
+            <a:chExt cx="11005902" cy="5162789"/>
           </a:xfrm>
         </p:grpSpPr>
         <p:sp>
@@ -10826,7 +12896,7 @@
           <p:spPr>
             <a:xfrm>
               <a:off x="473162" y="742123"/>
-              <a:ext cx="1132395" cy="369332"/>
+              <a:ext cx="1132395" cy="404311"/>
             </a:xfrm>
             <a:prstGeom prst="rect">
               <a:avLst/>
@@ -10860,10 +12930,10 @@
           </p:nvGrpSpPr>
           <p:grpSpPr>
             <a:xfrm>
-              <a:off x="473162" y="1223215"/>
-              <a:ext cx="11023266" cy="272219"/>
+              <a:off x="473162" y="1223214"/>
+              <a:ext cx="11005902" cy="322074"/>
               <a:chOff x="603539" y="1196181"/>
-              <a:chExt cx="9951765" cy="306467"/>
+              <a:chExt cx="9936089" cy="362594"/>
             </a:xfrm>
           </p:grpSpPr>
           <p:sp>
@@ -10880,8 +12950,8 @@
             </p:nvSpPr>
             <p:spPr>
               <a:xfrm>
-                <a:off x="603539" y="1196181"/>
-                <a:ext cx="522423" cy="306467"/>
+                <a:off x="603539" y="1196182"/>
+                <a:ext cx="516911" cy="362592"/>
               </a:xfrm>
               <a:prstGeom prst="roundRect">
                 <a:avLst/>
@@ -10941,8 +13011,8 @@
             </p:nvSpPr>
             <p:spPr>
               <a:xfrm>
-                <a:off x="1256755" y="1196181"/>
-                <a:ext cx="653866" cy="306467"/>
+                <a:off x="1256756" y="1196182"/>
+                <a:ext cx="630894" cy="362592"/>
               </a:xfrm>
               <a:prstGeom prst="roundRect">
                 <a:avLst/>
@@ -11002,8 +13072,8 @@
             </p:nvSpPr>
             <p:spPr>
               <a:xfrm>
-                <a:off x="2041414" y="1196181"/>
-                <a:ext cx="411363" cy="306467"/>
+                <a:off x="2041414" y="1196182"/>
+                <a:ext cx="397336" cy="362592"/>
               </a:xfrm>
               <a:prstGeom prst="roundRect">
                 <a:avLst/>
@@ -11063,8 +13133,8 @@
             </p:nvSpPr>
             <p:spPr>
               <a:xfrm>
-                <a:off x="2583570" y="1196181"/>
-                <a:ext cx="602547" cy="306467"/>
+                <a:off x="2583570" y="1196183"/>
+                <a:ext cx="576779" cy="362592"/>
               </a:xfrm>
               <a:prstGeom prst="roundRect">
                 <a:avLst/>
@@ -11124,8 +13194,8 @@
             </p:nvSpPr>
             <p:spPr>
               <a:xfrm>
-                <a:off x="3316910" y="1196181"/>
-                <a:ext cx="537277" cy="306467"/>
+                <a:off x="3316910" y="1196182"/>
+                <a:ext cx="533600" cy="362592"/>
               </a:xfrm>
               <a:prstGeom prst="roundRect">
                 <a:avLst/>
@@ -11185,8 +13255,8 @@
             </p:nvSpPr>
             <p:spPr>
               <a:xfrm>
-                <a:off x="3984980" y="1196181"/>
-                <a:ext cx="396712" cy="306467"/>
+                <a:off x="3984980" y="1196182"/>
+                <a:ext cx="440528" cy="362592"/>
               </a:xfrm>
               <a:prstGeom prst="roundRect">
                 <a:avLst/>
@@ -11246,8 +13316,8 @@
             </p:nvSpPr>
             <p:spPr>
               <a:xfrm>
-                <a:off x="4512485" y="1196181"/>
-                <a:ext cx="464215" cy="306467"/>
+                <a:off x="4512485" y="1196182"/>
+                <a:ext cx="533600" cy="362592"/>
               </a:xfrm>
               <a:prstGeom prst="roundRect">
                 <a:avLst/>
@@ -11307,8 +13377,8 @@
             </p:nvSpPr>
             <p:spPr>
               <a:xfrm>
-                <a:off x="5107493" y="1196181"/>
-                <a:ext cx="791329" cy="306467"/>
+                <a:off x="5107493" y="1196182"/>
+                <a:ext cx="800742" cy="362592"/>
               </a:xfrm>
               <a:prstGeom prst="roundRect">
                 <a:avLst/>
@@ -11368,8 +13438,8 @@
             </p:nvSpPr>
             <p:spPr>
               <a:xfrm>
-                <a:off x="6029615" y="1196181"/>
-                <a:ext cx="818007" cy="306467"/>
+                <a:off x="6029615" y="1196182"/>
+                <a:ext cx="809259" cy="362592"/>
               </a:xfrm>
               <a:prstGeom prst="roundRect">
                 <a:avLst/>
@@ -11429,8 +13499,8 @@
             </p:nvSpPr>
             <p:spPr>
               <a:xfrm>
-                <a:off x="6978415" y="1196181"/>
-                <a:ext cx="787001" cy="306467"/>
+                <a:off x="6978415" y="1196182"/>
+                <a:ext cx="745642" cy="362592"/>
               </a:xfrm>
               <a:prstGeom prst="roundRect">
                 <a:avLst/>
@@ -11490,8 +13560,8 @@
             </p:nvSpPr>
             <p:spPr>
               <a:xfrm>
-                <a:off x="7896209" y="1196181"/>
-                <a:ext cx="684635" cy="306467"/>
+                <a:off x="7896209" y="1196182"/>
+                <a:ext cx="646466" cy="362592"/>
               </a:xfrm>
               <a:prstGeom prst="roundRect">
                 <a:avLst/>
@@ -11551,8 +13621,8 @@
             </p:nvSpPr>
             <p:spPr>
               <a:xfrm>
-                <a:off x="8711637" y="1196181"/>
-                <a:ext cx="593540" cy="306467"/>
+                <a:off x="8711637" y="1196182"/>
+                <a:ext cx="565460" cy="362592"/>
               </a:xfrm>
               <a:prstGeom prst="roundRect">
                 <a:avLst/>
@@ -11612,8 +13682,8 @@
             </p:nvSpPr>
             <p:spPr>
               <a:xfrm>
-                <a:off x="9435970" y="1196181"/>
-                <a:ext cx="480225" cy="306467"/>
+                <a:off x="9435970" y="1196182"/>
+                <a:ext cx="501740" cy="362592"/>
               </a:xfrm>
               <a:prstGeom prst="roundRect">
                 <a:avLst/>
@@ -11674,7 +13744,7 @@
             <p:spPr>
               <a:xfrm>
                 <a:off x="10046991" y="1196181"/>
-                <a:ext cx="508313" cy="306467"/>
+                <a:ext cx="492637" cy="362592"/>
               </a:xfrm>
               <a:prstGeom prst="roundRect">
                 <a:avLst/>
@@ -11735,8 +13805,8 @@
           </p:nvSpPr>
           <p:spPr>
             <a:xfrm>
-              <a:off x="473162" y="2506513"/>
-              <a:ext cx="954291" cy="369332"/>
+              <a:off x="473162" y="2506512"/>
+              <a:ext cx="1095987" cy="404311"/>
             </a:xfrm>
             <a:prstGeom prst="rect">
               <a:avLst/>
@@ -11770,8 +13840,8 @@
           </p:nvSpPr>
           <p:spPr>
             <a:xfrm>
-              <a:off x="473162" y="3371583"/>
-              <a:ext cx="1128313" cy="369332"/>
+              <a:off x="473162" y="3371584"/>
+              <a:ext cx="1313996" cy="404311"/>
             </a:xfrm>
             <a:prstGeom prst="rect">
               <a:avLst/>
@@ -11805,8 +13875,8 @@
           </p:nvSpPr>
           <p:spPr>
             <a:xfrm>
-              <a:off x="473162" y="4236653"/>
-              <a:ext cx="2511778" cy="369332"/>
+              <a:off x="473162" y="4236652"/>
+              <a:ext cx="2865703" cy="404311"/>
             </a:xfrm>
             <a:prstGeom prst="rect">
               <a:avLst/>
@@ -11840,10 +13910,10 @@
           </p:nvGrpSpPr>
           <p:grpSpPr>
             <a:xfrm>
-              <a:off x="473162" y="4717745"/>
-              <a:ext cx="6894816" cy="272218"/>
-              <a:chOff x="603264" y="4647555"/>
-              <a:chExt cx="6894816" cy="306467"/>
+              <a:off x="473162" y="4717743"/>
+              <a:ext cx="7046439" cy="322098"/>
+              <a:chOff x="603264" y="4647531"/>
+              <a:chExt cx="7046439" cy="362621"/>
             </a:xfrm>
           </p:grpSpPr>
           <p:sp>
@@ -11861,7 +13931,7 @@
             <p:spPr>
               <a:xfrm>
                 <a:off x="603264" y="4647555"/>
-                <a:ext cx="2055937" cy="306467"/>
+                <a:ext cx="2213644" cy="362593"/>
               </a:xfrm>
               <a:prstGeom prst="roundRect">
                 <a:avLst/>
@@ -11921,8 +13991,8 @@
             </p:nvSpPr>
             <p:spPr>
               <a:xfrm>
-                <a:off x="4269897" y="4647555"/>
-                <a:ext cx="1141108" cy="306467"/>
+                <a:off x="4269897" y="4647559"/>
+                <a:ext cx="1260978" cy="362593"/>
               </a:xfrm>
               <a:prstGeom prst="roundRect">
                 <a:avLst/>
@@ -11982,8 +14052,8 @@
             </p:nvSpPr>
             <p:spPr>
               <a:xfrm>
-                <a:off x="5510962" y="4647555"/>
-                <a:ext cx="1987118" cy="306467"/>
+                <a:off x="5510963" y="4647531"/>
+                <a:ext cx="2138740" cy="362592"/>
               </a:xfrm>
               <a:prstGeom prst="roundRect">
                 <a:avLst/>
@@ -12043,8 +14113,8 @@
             </p:nvSpPr>
             <p:spPr>
               <a:xfrm>
-                <a:off x="2759157" y="4647555"/>
-                <a:ext cx="1410784" cy="306467"/>
+                <a:off x="2759157" y="4647544"/>
+                <a:ext cx="1538303" cy="362592"/>
               </a:xfrm>
               <a:prstGeom prst="roundRect">
                 <a:avLst/>
@@ -12106,7 +14176,7 @@
           <p:spPr>
             <a:xfrm>
               <a:off x="473162" y="5101723"/>
-              <a:ext cx="5351905" cy="369332"/>
+              <a:ext cx="5351905" cy="404311"/>
             </a:xfrm>
             <a:prstGeom prst="rect">
               <a:avLst/>
@@ -12152,10 +14222,10 @@
           </p:nvGrpSpPr>
           <p:grpSpPr>
             <a:xfrm>
-              <a:off x="473162" y="5582817"/>
-              <a:ext cx="8148131" cy="254822"/>
-              <a:chOff x="603264" y="5582816"/>
-              <a:chExt cx="8148131" cy="306467"/>
+              <a:off x="473162" y="5582807"/>
+              <a:ext cx="8240794" cy="322105"/>
+              <a:chOff x="603264" y="5582797"/>
+              <a:chExt cx="8240794" cy="387386"/>
             </a:xfrm>
           </p:grpSpPr>
           <p:sp>
@@ -12172,8 +14242,8 @@
             </p:nvSpPr>
             <p:spPr>
               <a:xfrm>
-                <a:off x="603264" y="5582816"/>
-                <a:ext cx="321776" cy="306467"/>
+                <a:off x="603264" y="5582817"/>
+                <a:ext cx="332879" cy="387347"/>
               </a:xfrm>
               <a:prstGeom prst="roundRect">
                 <a:avLst/>
@@ -12233,8 +14303,8 @@
             </p:nvSpPr>
             <p:spPr>
               <a:xfrm>
-                <a:off x="1054778" y="5582816"/>
-                <a:ext cx="576471" cy="306467"/>
+                <a:off x="1054779" y="5582797"/>
+                <a:ext cx="615122" cy="387346"/>
               </a:xfrm>
               <a:prstGeom prst="roundRect">
                 <a:avLst/>
@@ -12294,8 +14364,8 @@
             </p:nvSpPr>
             <p:spPr>
               <a:xfrm>
-                <a:off x="1760987" y="5582816"/>
-                <a:ext cx="681043" cy="306467"/>
+                <a:off x="1760987" y="5582797"/>
+                <a:ext cx="742649" cy="387346"/>
               </a:xfrm>
               <a:prstGeom prst="roundRect">
                 <a:avLst/>
@@ -12355,8 +14425,8 @@
             </p:nvSpPr>
             <p:spPr>
               <a:xfrm>
-                <a:off x="2571768" y="5582816"/>
-                <a:ext cx="941924" cy="306467"/>
+                <a:off x="2571768" y="5582812"/>
+                <a:ext cx="1029810" cy="387346"/>
               </a:xfrm>
               <a:prstGeom prst="roundRect">
                 <a:avLst/>
@@ -12416,8 +14486,8 @@
             </p:nvSpPr>
             <p:spPr>
               <a:xfrm>
-                <a:off x="3643430" y="5582816"/>
-                <a:ext cx="512252" cy="306467"/>
+                <a:off x="3643430" y="5582832"/>
+                <a:ext cx="561346" cy="387346"/>
               </a:xfrm>
               <a:prstGeom prst="roundRect">
                 <a:avLst/>
@@ -12478,7 +14548,7 @@
             <p:spPr>
               <a:xfrm>
                 <a:off x="4285420" y="5582816"/>
-                <a:ext cx="345146" cy="306467"/>
+                <a:ext cx="383454" cy="387346"/>
               </a:xfrm>
               <a:prstGeom prst="roundRect">
                 <a:avLst/>
@@ -12538,8 +14608,8 @@
             </p:nvSpPr>
             <p:spPr>
               <a:xfrm>
-                <a:off x="4760304" y="5582816"/>
-                <a:ext cx="417935" cy="306467"/>
+                <a:off x="4760304" y="5582821"/>
+                <a:ext cx="498135" cy="387346"/>
               </a:xfrm>
               <a:prstGeom prst="roundRect">
                 <a:avLst/>
@@ -12599,8 +14669,8 @@
             </p:nvSpPr>
             <p:spPr>
               <a:xfrm>
-                <a:off x="5307977" y="5582816"/>
-                <a:ext cx="1220147" cy="306467"/>
+                <a:off x="5307977" y="5582824"/>
+                <a:ext cx="1235292" cy="387346"/>
               </a:xfrm>
               <a:prstGeom prst="roundRect">
                 <a:avLst/>
@@ -12660,8 +14730,8 @@
             </p:nvSpPr>
             <p:spPr>
               <a:xfrm>
-                <a:off x="6657862" y="5582816"/>
-                <a:ext cx="580969" cy="306467"/>
+                <a:off x="6657862" y="5582831"/>
+                <a:ext cx="616260" cy="387346"/>
               </a:xfrm>
               <a:prstGeom prst="roundRect">
                 <a:avLst/>
@@ -12721,8 +14791,8 @@
             </p:nvSpPr>
             <p:spPr>
               <a:xfrm>
-                <a:off x="7368566" y="5582816"/>
-                <a:ext cx="1382829" cy="306467"/>
+                <a:off x="7368566" y="5582837"/>
+                <a:ext cx="1475492" cy="387346"/>
               </a:xfrm>
               <a:prstGeom prst="roundRect">
                 <a:avLst/>
@@ -12783,10 +14853,10 @@
           </p:nvGrpSpPr>
           <p:grpSpPr>
             <a:xfrm>
-              <a:off x="473162" y="2987605"/>
-              <a:ext cx="6958242" cy="272218"/>
-              <a:chOff x="603539" y="2939975"/>
-              <a:chExt cx="6958242" cy="306467"/>
+              <a:off x="473162" y="2987606"/>
+              <a:ext cx="7018411" cy="322083"/>
+              <a:chOff x="603539" y="2939968"/>
+              <a:chExt cx="7018411" cy="362605"/>
             </a:xfrm>
           </p:grpSpPr>
           <p:sp>
@@ -12803,8 +14873,8 @@
             </p:nvSpPr>
             <p:spPr>
               <a:xfrm>
-                <a:off x="603539" y="2939975"/>
-                <a:ext cx="643876" cy="306467"/>
+                <a:off x="603539" y="2939973"/>
+                <a:ext cx="690496" cy="362592"/>
               </a:xfrm>
               <a:prstGeom prst="roundRect">
                 <a:avLst/>
@@ -12864,8 +14934,8 @@
             </p:nvSpPr>
             <p:spPr>
               <a:xfrm>
-                <a:off x="1339304" y="2939975"/>
-                <a:ext cx="803251" cy="306467"/>
+                <a:off x="1339304" y="2939974"/>
+                <a:ext cx="949639" cy="362592"/>
               </a:xfrm>
               <a:prstGeom prst="roundRect">
                 <a:avLst/>
@@ -12939,7 +15009,7 @@
             <p:spPr>
               <a:xfrm>
                 <a:off x="2234444" y="2939975"/>
-                <a:ext cx="612093" cy="306467"/>
+                <a:ext cx="672181" cy="362592"/>
               </a:xfrm>
               <a:prstGeom prst="roundRect">
                 <a:avLst/>
@@ -12999,8 +15069,8 @@
             </p:nvSpPr>
             <p:spPr>
               <a:xfrm>
-                <a:off x="2938426" y="2939975"/>
-                <a:ext cx="429094" cy="306467"/>
+                <a:off x="2938425" y="2939968"/>
+                <a:ext cx="487959" cy="362592"/>
               </a:xfrm>
               <a:prstGeom prst="roundRect">
                 <a:avLst/>
@@ -13060,8 +15130,8 @@
             </p:nvSpPr>
             <p:spPr>
               <a:xfrm>
-                <a:off x="3459409" y="2939975"/>
-                <a:ext cx="781140" cy="306467"/>
+                <a:off x="3459409" y="2939973"/>
+                <a:ext cx="939741" cy="362592"/>
               </a:xfrm>
               <a:prstGeom prst="roundRect">
                 <a:avLst/>
@@ -13121,8 +15191,8 @@
             </p:nvSpPr>
             <p:spPr>
               <a:xfrm>
-                <a:off x="4332438" y="2939975"/>
-                <a:ext cx="1254704" cy="306467"/>
+                <a:off x="4332438" y="2939973"/>
+                <a:ext cx="1408040" cy="362592"/>
               </a:xfrm>
               <a:prstGeom prst="roundRect">
                 <a:avLst/>
@@ -13182,8 +15252,8 @@
             </p:nvSpPr>
             <p:spPr>
               <a:xfrm>
-                <a:off x="5679031" y="2939975"/>
-                <a:ext cx="494744" cy="306467"/>
+                <a:off x="5679032" y="2939973"/>
+                <a:ext cx="582650" cy="362592"/>
               </a:xfrm>
               <a:prstGeom prst="roundRect">
                 <a:avLst/>
@@ -13243,8 +15313,8 @@
             </p:nvSpPr>
             <p:spPr>
               <a:xfrm>
-                <a:off x="6265664" y="2939975"/>
-                <a:ext cx="438472" cy="306467"/>
+                <a:off x="6265664" y="2939973"/>
+                <a:ext cx="456478" cy="362592"/>
               </a:xfrm>
               <a:prstGeom prst="roundRect">
                 <a:avLst/>
@@ -13309,8 +15379,8 @@
             </p:nvSpPr>
             <p:spPr>
               <a:xfrm>
-                <a:off x="6796025" y="2939975"/>
-                <a:ext cx="765756" cy="306467"/>
+                <a:off x="6796025" y="2939981"/>
+                <a:ext cx="825925" cy="362592"/>
               </a:xfrm>
               <a:prstGeom prst="roundRect">
                 <a:avLst/>
@@ -13380,9 +15450,9 @@
           <p:grpSpPr>
             <a:xfrm>
               <a:off x="473162" y="3852675"/>
-              <a:ext cx="5667288" cy="272218"/>
-              <a:chOff x="603813" y="3798165"/>
-              <a:chExt cx="5667288" cy="306467"/>
+              <a:ext cx="5720569" cy="322078"/>
+              <a:chOff x="603813" y="3798156"/>
+              <a:chExt cx="5720569" cy="362599"/>
             </a:xfrm>
           </p:grpSpPr>
           <p:sp>
@@ -13399,8 +15469,8 @@
             </p:nvSpPr>
             <p:spPr>
               <a:xfrm>
-                <a:off x="603813" y="3798165"/>
-                <a:ext cx="410268" cy="306467"/>
+                <a:off x="603813" y="3798163"/>
+                <a:ext cx="479480" cy="362592"/>
               </a:xfrm>
               <a:prstGeom prst="roundRect">
                 <a:avLst/>
@@ -13460,8 +15530,8 @@
             </p:nvSpPr>
             <p:spPr>
               <a:xfrm>
-                <a:off x="1094064" y="3798165"/>
-                <a:ext cx="612899" cy="306467"/>
+                <a:off x="1094064" y="3798163"/>
+                <a:ext cx="683836" cy="362592"/>
               </a:xfrm>
               <a:prstGeom prst="roundRect">
                 <a:avLst/>
@@ -13521,8 +15591,8 @@
             </p:nvSpPr>
             <p:spPr>
               <a:xfrm>
-                <a:off x="1786946" y="3798165"/>
-                <a:ext cx="1703880" cy="306467"/>
+                <a:off x="1786946" y="3798156"/>
+                <a:ext cx="1824750" cy="362591"/>
               </a:xfrm>
               <a:prstGeom prst="roundRect">
                 <a:avLst/>
@@ -13582,8 +15652,8 @@
             </p:nvSpPr>
             <p:spPr>
               <a:xfrm>
-                <a:off x="3570809" y="3798165"/>
-                <a:ext cx="799322" cy="306467"/>
+                <a:off x="3570809" y="3798156"/>
+                <a:ext cx="850668" cy="362592"/>
               </a:xfrm>
               <a:prstGeom prst="roundRect">
                 <a:avLst/>
@@ -13643,8 +15713,8 @@
             </p:nvSpPr>
             <p:spPr>
               <a:xfrm>
-                <a:off x="5553965" y="3798165"/>
-                <a:ext cx="717136" cy="306467"/>
+                <a:off x="5553965" y="3798157"/>
+                <a:ext cx="770417" cy="362592"/>
               </a:xfrm>
               <a:prstGeom prst="roundRect">
                 <a:avLst/>
@@ -13704,8 +15774,8 @@
             </p:nvSpPr>
             <p:spPr>
               <a:xfrm>
-                <a:off x="4450114" y="3798165"/>
-                <a:ext cx="1023867" cy="306467"/>
+                <a:off x="4450114" y="3798157"/>
+                <a:ext cx="1059996" cy="362593"/>
               </a:xfrm>
               <a:prstGeom prst="roundRect">
                 <a:avLst/>
@@ -13766,8 +15836,8 @@
           </p:nvSpPr>
           <p:spPr>
             <a:xfrm>
-              <a:off x="473162" y="1607194"/>
-              <a:ext cx="807447" cy="369332"/>
+              <a:off x="473162" y="1607193"/>
+              <a:ext cx="866758" cy="404311"/>
             </a:xfrm>
             <a:prstGeom prst="rect">
               <a:avLst/>
@@ -13803,9 +15873,9 @@
           <p:grpSpPr>
             <a:xfrm>
               <a:off x="473162" y="2088286"/>
-              <a:ext cx="1705425" cy="306467"/>
+              <a:ext cx="1727945" cy="322072"/>
               <a:chOff x="607456" y="1966966"/>
-              <a:chExt cx="1705425" cy="306467"/>
+              <a:chExt cx="1727945" cy="322072"/>
             </a:xfrm>
           </p:grpSpPr>
           <p:sp>
@@ -13823,7 +15893,7 @@
             <p:spPr>
               <a:xfrm>
                 <a:off x="607456" y="1966966"/>
-                <a:ext cx="938950" cy="306467"/>
+                <a:ext cx="1027165" cy="322072"/>
               </a:xfrm>
               <a:prstGeom prst="roundRect">
                 <a:avLst/>
@@ -13888,8 +15958,8 @@
             </p:nvSpPr>
             <p:spPr>
               <a:xfrm>
-                <a:off x="1725861" y="1966966"/>
-                <a:ext cx="587020" cy="306467"/>
+                <a:off x="1725863" y="1966966"/>
+                <a:ext cx="609538" cy="322072"/>
               </a:xfrm>
               <a:prstGeom prst="roundRect">
                 <a:avLst/>
@@ -13948,887 +16018,6 @@
         <p14:creationId xmlns:p14="http://schemas.microsoft.com/office/powerpoint/2010/main" val="1550683682"/>
       </p:ext>
     </p:extLst>
-  </p:cSld>
-  <p:clrMapOvr>
-    <a:masterClrMapping/>
-  </p:clrMapOvr>
-</p:sld>
-</file>
-
-<file path=ppt/slides/slide9.xml><?xml version="1.0" encoding="utf-8"?>
-<p:sld xmlns:a="http://schemas.openxmlformats.org/drawingml/2006/main" xmlns:r="http://schemas.openxmlformats.org/officeDocument/2006/relationships" xmlns:p="http://schemas.openxmlformats.org/presentationml/2006/main">
-  <p:cSld name="Slide 8">
-    <p:bg>
-      <p:bgPr>
-        <a:solidFill>
-          <a:srgbClr val="FFFFFF"/>
-        </a:solidFill>
-        <a:effectLst/>
-      </p:bgPr>
-    </p:bg>
-    <p:spTree>
-      <p:nvGrpSpPr>
-        <p:cNvPr id="1" name=""/>
-        <p:cNvGrpSpPr/>
-        <p:nvPr/>
-      </p:nvGrpSpPr>
-      <p:grpSpPr>
-        <a:xfrm>
-          <a:off x="0" y="0"/>
-          <a:ext cx="0" cy="0"/>
-          <a:chOff x="0" y="0"/>
-          <a:chExt cx="0" cy="0"/>
-        </a:xfrm>
-      </p:grpSpPr>
-      <p:sp>
-        <p:nvSpPr>
-          <p:cNvPr id="2" name="Shape 0"/>
-          <p:cNvSpPr/>
-          <p:nvPr/>
-        </p:nvSpPr>
-        <p:spPr>
-          <a:xfrm>
-            <a:off x="0" y="0"/>
-            <a:ext cx="12191695" cy="6858000"/>
-          </a:xfrm>
-          <a:prstGeom prst="rect">
-            <a:avLst/>
-          </a:prstGeom>
-          <a:solidFill>
-            <a:srgbClr val="FFFFFF"/>
-          </a:solidFill>
-          <a:ln w="12700">
-            <a:solidFill>
-              <a:srgbClr val="FFFFFF">
-                <a:alpha val="0"/>
-              </a:srgbClr>
-            </a:solidFill>
-            <a:prstDash val="solid"/>
-          </a:ln>
-        </p:spPr>
-        <p:txBody>
-          <a:bodyPr/>
-          <a:lstStyle/>
-          <a:p>
-            <a:endParaRPr lang="en-US"/>
-          </a:p>
-        </p:txBody>
-      </p:sp>
-      <p:sp>
-        <p:nvSpPr>
-          <p:cNvPr id="3" name="Text 1"/>
-          <p:cNvSpPr/>
-          <p:nvPr/>
-        </p:nvSpPr>
-        <p:spPr>
-          <a:xfrm>
-            <a:off x="502920" y="228600"/>
-            <a:ext cx="9509760" cy="347472"/>
-          </a:xfrm>
-          <a:prstGeom prst="rect">
-            <a:avLst/>
-          </a:prstGeom>
-          <a:noFill/>
-          <a:ln/>
-        </p:spPr>
-        <p:txBody>
-          <a:bodyPr wrap="square" lIns="0" tIns="0" rIns="0" bIns="0" rtlCol="0" anchor="ctr"/>
-          <a:lstStyle/>
-          <a:p>
-            <a:pPr marL="0" indent="0">
-              <a:buNone/>
-            </a:pPr>
-            <a:r>
-              <a:rPr lang="en-US" sz="2300" b="1" dirty="0">
-                <a:solidFill>
-                  <a:srgbClr val="1F1F1F"/>
-                </a:solidFill>
-                <a:latin typeface="Akatab" pitchFamily="34" charset="0"/>
-                <a:ea typeface="Akatab" pitchFamily="34" charset="-122"/>
-                <a:cs typeface="Akatab" pitchFamily="34" charset="-120"/>
-              </a:rPr>
-              <a:t>Expertise &amp; Capabilities</a:t>
-            </a:r>
-            <a:endParaRPr lang="en-US" sz="2300" dirty="0"/>
-          </a:p>
-        </p:txBody>
-      </p:sp>
-      <p:sp>
-        <p:nvSpPr>
-          <p:cNvPr id="4" name="Shape 2"/>
-          <p:cNvSpPr/>
-          <p:nvPr/>
-        </p:nvSpPr>
-        <p:spPr>
-          <a:xfrm>
-            <a:off x="10817352" y="201168"/>
-            <a:ext cx="475488" cy="73152"/>
-          </a:xfrm>
-          <a:prstGeom prst="roundRect">
-            <a:avLst>
-              <a:gd name="adj" fmla="val 37500"/>
-            </a:avLst>
-          </a:prstGeom>
-          <a:solidFill>
-            <a:srgbClr val="0B0B0B"/>
-          </a:solidFill>
-          <a:ln w="12700">
-            <a:solidFill>
-              <a:srgbClr val="0B0B0B">
-                <a:alpha val="0"/>
-              </a:srgbClr>
-            </a:solidFill>
-            <a:prstDash val="solid"/>
-          </a:ln>
-        </p:spPr>
-        <p:txBody>
-          <a:bodyPr/>
-          <a:lstStyle/>
-          <a:p>
-            <a:endParaRPr lang="en-US"/>
-          </a:p>
-        </p:txBody>
-      </p:sp>
-      <p:sp>
-        <p:nvSpPr>
-          <p:cNvPr id="5" name="Shape 3"/>
-          <p:cNvSpPr/>
-          <p:nvPr/>
-        </p:nvSpPr>
-        <p:spPr>
-          <a:xfrm>
-            <a:off x="502920" y="6547104"/>
-            <a:ext cx="11137392" cy="27432"/>
-          </a:xfrm>
-          <a:prstGeom prst="roundRect">
-            <a:avLst>
-              <a:gd name="adj" fmla="val 33333"/>
-            </a:avLst>
-          </a:prstGeom>
-          <a:solidFill>
-            <a:srgbClr val="D6943C"/>
-          </a:solidFill>
-          <a:ln w="12700">
-            <a:solidFill>
-              <a:srgbClr val="D6943C">
-                <a:alpha val="0"/>
-              </a:srgbClr>
-            </a:solidFill>
-            <a:prstDash val="solid"/>
-          </a:ln>
-        </p:spPr>
-        <p:txBody>
-          <a:bodyPr/>
-          <a:lstStyle/>
-          <a:p>
-            <a:endParaRPr lang="en-US"/>
-          </a:p>
-        </p:txBody>
-      </p:sp>
-      <p:sp>
-        <p:nvSpPr>
-          <p:cNvPr id="6" name="Shape 4"/>
-          <p:cNvSpPr/>
-          <p:nvPr/>
-        </p:nvSpPr>
-        <p:spPr>
-          <a:xfrm>
-            <a:off x="658368" y="1051560"/>
-            <a:ext cx="3547872" cy="658368"/>
-          </a:xfrm>
-          <a:prstGeom prst="rect">
-            <a:avLst/>
-          </a:prstGeom>
-          <a:solidFill>
-            <a:srgbClr val="173F73"/>
-          </a:solidFill>
-          <a:ln w="12700">
-            <a:solidFill>
-              <a:srgbClr val="173F73">
-                <a:alpha val="0"/>
-              </a:srgbClr>
-            </a:solidFill>
-            <a:prstDash val="solid"/>
-          </a:ln>
-        </p:spPr>
-        <p:txBody>
-          <a:bodyPr/>
-          <a:lstStyle/>
-          <a:p>
-            <a:endParaRPr lang="en-US"/>
-          </a:p>
-        </p:txBody>
-      </p:sp>
-      <p:sp>
-        <p:nvSpPr>
-          <p:cNvPr id="7" name="Text 5"/>
-          <p:cNvSpPr/>
-          <p:nvPr/>
-        </p:nvSpPr>
-        <p:spPr>
-          <a:xfrm>
-            <a:off x="731520" y="1161288"/>
-            <a:ext cx="3401568" cy="365760"/>
-          </a:xfrm>
-          <a:prstGeom prst="rect">
-            <a:avLst/>
-          </a:prstGeom>
-          <a:noFill/>
-          <a:ln/>
-        </p:spPr>
-        <p:txBody>
-          <a:bodyPr wrap="square" lIns="0" tIns="0" rIns="0" bIns="0" rtlCol="0" anchor="ctr"/>
-          <a:lstStyle/>
-          <a:p>
-            <a:pPr marL="0" indent="0" algn="ctr">
-              <a:buNone/>
-            </a:pPr>
-            <a:r>
-              <a:rPr lang="en-US" sz="1600" b="1" dirty="0">
-                <a:solidFill>
-                  <a:srgbClr val="FFFFFF"/>
-                </a:solidFill>
-                <a:latin typeface="Akatab" pitchFamily="34" charset="0"/>
-                <a:ea typeface="Akatab" pitchFamily="34" charset="-122"/>
-                <a:cs typeface="Akatab" pitchFamily="34" charset="-120"/>
-              </a:rPr>
-              <a:t>Leadership &amp; Team Building</a:t>
-            </a:r>
-            <a:endParaRPr lang="en-US" sz="1600" dirty="0"/>
-          </a:p>
-        </p:txBody>
-      </p:sp>
-      <p:sp>
-        <p:nvSpPr>
-          <p:cNvPr id="8" name="Shape 6"/>
-          <p:cNvSpPr/>
-          <p:nvPr/>
-        </p:nvSpPr>
-        <p:spPr>
-          <a:xfrm>
-            <a:off x="658368" y="1709928"/>
-            <a:ext cx="3547872" cy="1856232"/>
-          </a:xfrm>
-          <a:prstGeom prst="rect">
-            <a:avLst/>
-          </a:prstGeom>
-          <a:solidFill>
-            <a:srgbClr val="F6F8FB"/>
-          </a:solidFill>
-          <a:ln w="10160">
-            <a:solidFill>
-              <a:srgbClr val="D8DCE4"/>
-            </a:solidFill>
-            <a:prstDash val="solid"/>
-          </a:ln>
-        </p:spPr>
-        <p:txBody>
-          <a:bodyPr/>
-          <a:lstStyle/>
-          <a:p>
-            <a:endParaRPr lang="en-US"/>
-          </a:p>
-        </p:txBody>
-      </p:sp>
-      <p:sp>
-        <p:nvSpPr>
-          <p:cNvPr id="9" name="Text 7"/>
-          <p:cNvSpPr/>
-          <p:nvPr/>
-        </p:nvSpPr>
-        <p:spPr>
-          <a:xfrm>
-            <a:off x="768096" y="1856232"/>
-            <a:ext cx="3328416" cy="1591056"/>
-          </a:xfrm>
-          <a:prstGeom prst="rect">
-            <a:avLst/>
-          </a:prstGeom>
-          <a:noFill/>
-          <a:ln/>
-        </p:spPr>
-        <p:txBody>
-          <a:bodyPr wrap="square" lIns="381" tIns="381" rIns="381" bIns="381" rtlCol="0" anchor="t">
-            <a:normAutofit/>
-          </a:bodyPr>
-          <a:lstStyle/>
-          <a:p>
-            <a:pPr marL="0" indent="0">
-              <a:buNone/>
-            </a:pPr>
-            <a:r>
-              <a:rPr lang="en-US" sz="1140" dirty="0">
-                <a:solidFill>
-                  <a:srgbClr val="1F1F1F"/>
-                </a:solidFill>
-                <a:latin typeface="Akatab" pitchFamily="34" charset="0"/>
-                <a:ea typeface="Akatab" pitchFamily="34" charset="-122"/>
-                <a:cs typeface="Akatab" pitchFamily="34" charset="-120"/>
-              </a:rPr>
-              <a:t>✓ Mentored junior developers and improved code quality and efficiency</a:t>
-            </a:r>
-            <a:endParaRPr lang="en-US" sz="1140" dirty="0"/>
-          </a:p>
-          <a:p>
-            <a:pPr marL="0" indent="0">
-              <a:buNone/>
-            </a:pPr>
-            <a:r>
-              <a:rPr lang="en-US" sz="1140" dirty="0">
-                <a:solidFill>
-                  <a:srgbClr val="1F1F1F"/>
-                </a:solidFill>
-                <a:latin typeface="Akatab" pitchFamily="34" charset="0"/>
-                <a:ea typeface="Akatab" pitchFamily="34" charset="-122"/>
-                <a:cs typeface="Akatab" pitchFamily="34" charset="-120"/>
-              </a:rPr>
-              <a:t>✓ Comfortable setting standards, review habits, and delivery expectations</a:t>
-            </a:r>
-            <a:endParaRPr lang="en-US" sz="1140" dirty="0"/>
-          </a:p>
-          <a:p>
-            <a:pPr marL="0" indent="0">
-              <a:buNone/>
-            </a:pPr>
-            <a:r>
-              <a:rPr lang="en-US" sz="1140" dirty="0">
-                <a:solidFill>
-                  <a:srgbClr val="1F1F1F"/>
-                </a:solidFill>
-                <a:latin typeface="Akatab" pitchFamily="34" charset="0"/>
-                <a:ea typeface="Akatab" pitchFamily="34" charset="-122"/>
-                <a:cs typeface="Akatab" pitchFamily="34" charset="-120"/>
-              </a:rPr>
-              <a:t>✓ Able to lead lean teams while still contributing hands-on</a:t>
-            </a:r>
-            <a:endParaRPr lang="en-US" sz="1140" dirty="0"/>
-          </a:p>
-          <a:p>
-            <a:pPr marL="0" indent="0">
-              <a:buNone/>
-            </a:pPr>
-            <a:r>
-              <a:rPr lang="en-US" sz="1140" dirty="0">
-                <a:solidFill>
-                  <a:srgbClr val="1F1F1F"/>
-                </a:solidFill>
-                <a:latin typeface="Akatab" pitchFamily="34" charset="0"/>
-                <a:ea typeface="Akatab" pitchFamily="34" charset="-122"/>
-                <a:cs typeface="Akatab" pitchFamily="34" charset="-120"/>
-              </a:rPr>
-              <a:t>✓ Strong owner mentality from idea to implementation</a:t>
-            </a:r>
-            <a:endParaRPr lang="en-US" sz="1140" dirty="0"/>
-          </a:p>
-        </p:txBody>
-      </p:sp>
-      <p:sp>
-        <p:nvSpPr>
-          <p:cNvPr id="10" name="Shape 8"/>
-          <p:cNvSpPr/>
-          <p:nvPr/>
-        </p:nvSpPr>
-        <p:spPr>
-          <a:xfrm>
-            <a:off x="4325112" y="1051560"/>
-            <a:ext cx="3547872" cy="658368"/>
-          </a:xfrm>
-          <a:prstGeom prst="rect">
-            <a:avLst/>
-          </a:prstGeom>
-          <a:solidFill>
-            <a:srgbClr val="0B2C5D"/>
-          </a:solidFill>
-          <a:ln w="12700">
-            <a:solidFill>
-              <a:srgbClr val="0B2C5D">
-                <a:alpha val="0"/>
-              </a:srgbClr>
-            </a:solidFill>
-            <a:prstDash val="solid"/>
-          </a:ln>
-        </p:spPr>
-        <p:txBody>
-          <a:bodyPr/>
-          <a:lstStyle/>
-          <a:p>
-            <a:endParaRPr lang="en-US"/>
-          </a:p>
-        </p:txBody>
-      </p:sp>
-      <p:sp>
-        <p:nvSpPr>
-          <p:cNvPr id="11" name="Text 9"/>
-          <p:cNvSpPr/>
-          <p:nvPr/>
-        </p:nvSpPr>
-        <p:spPr>
-          <a:xfrm>
-            <a:off x="4398264" y="1161288"/>
-            <a:ext cx="3401568" cy="365760"/>
-          </a:xfrm>
-          <a:prstGeom prst="rect">
-            <a:avLst/>
-          </a:prstGeom>
-          <a:noFill/>
-          <a:ln/>
-        </p:spPr>
-        <p:txBody>
-          <a:bodyPr wrap="square" lIns="0" tIns="0" rIns="0" bIns="0" rtlCol="0" anchor="ctr"/>
-          <a:lstStyle/>
-          <a:p>
-            <a:pPr marL="0" indent="0" algn="ctr">
-              <a:buNone/>
-            </a:pPr>
-            <a:r>
-              <a:rPr lang="en-US" sz="1600" b="1" dirty="0">
-                <a:solidFill>
-                  <a:srgbClr val="FFFFFF"/>
-                </a:solidFill>
-                <a:latin typeface="Akatab" pitchFamily="34" charset="0"/>
-                <a:ea typeface="Akatab" pitchFamily="34" charset="-122"/>
-                <a:cs typeface="Akatab" pitchFamily="34" charset="-120"/>
-              </a:rPr>
-              <a:t>Business &amp; Cross-Functional Partnership</a:t>
-            </a:r>
-            <a:endParaRPr lang="en-US" sz="1600" dirty="0"/>
-          </a:p>
-        </p:txBody>
-      </p:sp>
-      <p:sp>
-        <p:nvSpPr>
-          <p:cNvPr id="12" name="Shape 10"/>
-          <p:cNvSpPr/>
-          <p:nvPr/>
-        </p:nvSpPr>
-        <p:spPr>
-          <a:xfrm>
-            <a:off x="4325112" y="1709928"/>
-            <a:ext cx="3547872" cy="1856232"/>
-          </a:xfrm>
-          <a:prstGeom prst="rect">
-            <a:avLst/>
-          </a:prstGeom>
-          <a:solidFill>
-            <a:srgbClr val="F6F8FB"/>
-          </a:solidFill>
-          <a:ln w="10160">
-            <a:solidFill>
-              <a:srgbClr val="D8DCE4"/>
-            </a:solidFill>
-            <a:prstDash val="solid"/>
-          </a:ln>
-        </p:spPr>
-        <p:txBody>
-          <a:bodyPr/>
-          <a:lstStyle/>
-          <a:p>
-            <a:endParaRPr lang="en-US"/>
-          </a:p>
-        </p:txBody>
-      </p:sp>
-      <p:sp>
-        <p:nvSpPr>
-          <p:cNvPr id="13" name="Text 11"/>
-          <p:cNvSpPr/>
-          <p:nvPr/>
-        </p:nvSpPr>
-        <p:spPr>
-          <a:xfrm>
-            <a:off x="4434840" y="1856232"/>
-            <a:ext cx="3328416" cy="1591056"/>
-          </a:xfrm>
-          <a:prstGeom prst="rect">
-            <a:avLst/>
-          </a:prstGeom>
-          <a:noFill/>
-          <a:ln/>
-        </p:spPr>
-        <p:txBody>
-          <a:bodyPr wrap="square" lIns="381" tIns="381" rIns="381" bIns="381" rtlCol="0" anchor="t">
-            <a:normAutofit/>
-          </a:bodyPr>
-          <a:lstStyle/>
-          <a:p>
-            <a:pPr marL="0" indent="0">
-              <a:buNone/>
-            </a:pPr>
-            <a:r>
-              <a:rPr lang="en-US" sz="1140" dirty="0">
-                <a:solidFill>
-                  <a:srgbClr val="1F1F1F"/>
-                </a:solidFill>
-                <a:latin typeface="Akatab" pitchFamily="34" charset="0"/>
-                <a:ea typeface="Akatab" pitchFamily="34" charset="-122"/>
-                <a:cs typeface="Akatab" pitchFamily="34" charset="-120"/>
-              </a:rPr>
-              <a:t>✓ Translate requirements into executable plans and technical decisions</a:t>
-            </a:r>
-            <a:endParaRPr lang="en-US" sz="1140" dirty="0"/>
-          </a:p>
-          <a:p>
-            <a:pPr marL="0" indent="0">
-              <a:buNone/>
-            </a:pPr>
-            <a:r>
-              <a:rPr lang="en-US" sz="1140" dirty="0">
-                <a:solidFill>
-                  <a:srgbClr val="1F1F1F"/>
-                </a:solidFill>
-                <a:latin typeface="Akatab" pitchFamily="34" charset="0"/>
-                <a:ea typeface="Akatab" pitchFamily="34" charset="-122"/>
-                <a:cs typeface="Akatab" pitchFamily="34" charset="-120"/>
-              </a:rPr>
-              <a:t>✓ Collaborate with product, design, marketing, and operations</a:t>
-            </a:r>
-            <a:endParaRPr lang="en-US" sz="1140" dirty="0"/>
-          </a:p>
-          <a:p>
-            <a:pPr marL="0" indent="0">
-              <a:buNone/>
-            </a:pPr>
-            <a:r>
-              <a:rPr lang="en-US" sz="1140" dirty="0">
-                <a:solidFill>
-                  <a:srgbClr val="1F1F1F"/>
-                </a:solidFill>
-                <a:latin typeface="Akatab" pitchFamily="34" charset="0"/>
-                <a:ea typeface="Akatab" pitchFamily="34" charset="-122"/>
-                <a:cs typeface="Akatab" pitchFamily="34" charset="-120"/>
-              </a:rPr>
-              <a:t>✓ Support launches, conversion performance, and digital growth goals</a:t>
-            </a:r>
-            <a:endParaRPr lang="en-US" sz="1140" dirty="0"/>
-          </a:p>
-          <a:p>
-            <a:pPr marL="0" indent="0">
-              <a:buNone/>
-            </a:pPr>
-            <a:r>
-              <a:rPr lang="en-US" sz="1140" dirty="0">
-                <a:solidFill>
-                  <a:srgbClr val="1F1F1F"/>
-                </a:solidFill>
-                <a:latin typeface="Akatab" pitchFamily="34" charset="0"/>
-                <a:ea typeface="Akatab" pitchFamily="34" charset="-122"/>
-                <a:cs typeface="Akatab" pitchFamily="34" charset="-120"/>
-              </a:rPr>
-              <a:t>✓ Communicate tradeoffs clearly to non-technical stakeholders</a:t>
-            </a:r>
-            <a:endParaRPr lang="en-US" sz="1140" dirty="0"/>
-          </a:p>
-        </p:txBody>
-      </p:sp>
-      <p:sp>
-        <p:nvSpPr>
-          <p:cNvPr id="14" name="Shape 12"/>
-          <p:cNvSpPr/>
-          <p:nvPr/>
-        </p:nvSpPr>
-        <p:spPr>
-          <a:xfrm>
-            <a:off x="7991856" y="1051560"/>
-            <a:ext cx="3547872" cy="658368"/>
-          </a:xfrm>
-          <a:prstGeom prst="rect">
-            <a:avLst/>
-          </a:prstGeom>
-          <a:solidFill>
-            <a:srgbClr val="D6943C"/>
-          </a:solidFill>
-          <a:ln w="12700">
-            <a:solidFill>
-              <a:srgbClr val="D6943C">
-                <a:alpha val="0"/>
-              </a:srgbClr>
-            </a:solidFill>
-            <a:prstDash val="solid"/>
-          </a:ln>
-        </p:spPr>
-        <p:txBody>
-          <a:bodyPr/>
-          <a:lstStyle/>
-          <a:p>
-            <a:endParaRPr lang="en-US"/>
-          </a:p>
-        </p:txBody>
-      </p:sp>
-      <p:sp>
-        <p:nvSpPr>
-          <p:cNvPr id="15" name="Text 13"/>
-          <p:cNvSpPr/>
-          <p:nvPr/>
-        </p:nvSpPr>
-        <p:spPr>
-          <a:xfrm>
-            <a:off x="8065008" y="1161288"/>
-            <a:ext cx="3401568" cy="365760"/>
-          </a:xfrm>
-          <a:prstGeom prst="rect">
-            <a:avLst/>
-          </a:prstGeom>
-          <a:noFill/>
-          <a:ln/>
-        </p:spPr>
-        <p:txBody>
-          <a:bodyPr wrap="square" lIns="0" tIns="0" rIns="0" bIns="0" rtlCol="0" anchor="ctr"/>
-          <a:lstStyle/>
-          <a:p>
-            <a:pPr marL="0" indent="0" algn="ctr">
-              <a:buNone/>
-            </a:pPr>
-            <a:r>
-              <a:rPr lang="en-US" sz="1600" b="1" dirty="0">
-                <a:solidFill>
-                  <a:srgbClr val="FFFFFF"/>
-                </a:solidFill>
-                <a:latin typeface="Akatab" pitchFamily="34" charset="0"/>
-                <a:ea typeface="Akatab" pitchFamily="34" charset="-122"/>
-                <a:cs typeface="Akatab" pitchFamily="34" charset="-120"/>
-              </a:rPr>
-              <a:t>Industry Breadth Without Being Project-Locked</a:t>
-            </a:r>
-            <a:endParaRPr lang="en-US" sz="1600" dirty="0"/>
-          </a:p>
-        </p:txBody>
-      </p:sp>
-      <p:sp>
-        <p:nvSpPr>
-          <p:cNvPr id="16" name="Shape 14"/>
-          <p:cNvSpPr/>
-          <p:nvPr/>
-        </p:nvSpPr>
-        <p:spPr>
-          <a:xfrm>
-            <a:off x="7991856" y="1709928"/>
-            <a:ext cx="3547872" cy="1856232"/>
-          </a:xfrm>
-          <a:prstGeom prst="rect">
-            <a:avLst/>
-          </a:prstGeom>
-          <a:solidFill>
-            <a:srgbClr val="F6F8FB"/>
-          </a:solidFill>
-          <a:ln w="10160">
-            <a:solidFill>
-              <a:srgbClr val="D8DCE4"/>
-            </a:solidFill>
-            <a:prstDash val="solid"/>
-          </a:ln>
-        </p:spPr>
-        <p:txBody>
-          <a:bodyPr/>
-          <a:lstStyle/>
-          <a:p>
-            <a:endParaRPr lang="en-US"/>
-          </a:p>
-        </p:txBody>
-      </p:sp>
-      <p:sp>
-        <p:nvSpPr>
-          <p:cNvPr id="17" name="Text 15"/>
-          <p:cNvSpPr/>
-          <p:nvPr/>
-        </p:nvSpPr>
-        <p:spPr>
-          <a:xfrm>
-            <a:off x="8101584" y="1856232"/>
-            <a:ext cx="3328416" cy="1591056"/>
-          </a:xfrm>
-          <a:prstGeom prst="rect">
-            <a:avLst/>
-          </a:prstGeom>
-          <a:noFill/>
-          <a:ln/>
-        </p:spPr>
-        <p:txBody>
-          <a:bodyPr wrap="square" lIns="381" tIns="381" rIns="381" bIns="381" rtlCol="0" anchor="t">
-            <a:normAutofit/>
-          </a:bodyPr>
-          <a:lstStyle/>
-          <a:p>
-            <a:pPr marL="0" indent="0">
-              <a:buNone/>
-            </a:pPr>
-            <a:r>
-              <a:rPr lang="en-US" sz="1140" dirty="0">
-                <a:solidFill>
-                  <a:srgbClr val="1F1F1F"/>
-                </a:solidFill>
-                <a:latin typeface="Akatab" pitchFamily="34" charset="0"/>
-                <a:ea typeface="Akatab" pitchFamily="34" charset="-122"/>
-                <a:cs typeface="Akatab" pitchFamily="34" charset="-120"/>
-              </a:rPr>
-              <a:t>✓ Banking &amp; finance, insurance, fintech, retail, healthcare</a:t>
-            </a:r>
-            <a:endParaRPr lang="en-US" sz="1140" dirty="0"/>
-          </a:p>
-          <a:p>
-            <a:pPr marL="0" indent="0">
-              <a:buNone/>
-            </a:pPr>
-            <a:r>
-              <a:rPr lang="en-US" sz="1140" dirty="0">
-                <a:solidFill>
-                  <a:srgbClr val="1F1F1F"/>
-                </a:solidFill>
-                <a:latin typeface="Akatab" pitchFamily="34" charset="0"/>
-                <a:ea typeface="Akatab" pitchFamily="34" charset="-122"/>
-                <a:cs typeface="Akatab" pitchFamily="34" charset="-120"/>
-              </a:rPr>
-              <a:t>✓ Cargo &amp; shipping, airports, logistics, education, public sector</a:t>
-            </a:r>
-            <a:endParaRPr lang="en-US" sz="1140" dirty="0"/>
-          </a:p>
-          <a:p>
-            <a:pPr marL="0" indent="0">
-              <a:buNone/>
-            </a:pPr>
-            <a:r>
-              <a:rPr lang="en-US" sz="1140" dirty="0">
-                <a:solidFill>
-                  <a:srgbClr val="1F1F1F"/>
-                </a:solidFill>
-                <a:latin typeface="Akatab" pitchFamily="34" charset="0"/>
-                <a:ea typeface="Akatab" pitchFamily="34" charset="-122"/>
-                <a:cs typeface="Akatab" pitchFamily="34" charset="-120"/>
-              </a:rPr>
-              <a:t>✓ Exposure to both enterprise environments and fast-moving delivery teams</a:t>
-            </a:r>
-            <a:endParaRPr lang="en-US" sz="1140" dirty="0"/>
-          </a:p>
-          <a:p>
-            <a:pPr marL="0" indent="0">
-              <a:buNone/>
-            </a:pPr>
-            <a:r>
-              <a:rPr lang="en-US" sz="1140" dirty="0">
-                <a:solidFill>
-                  <a:srgbClr val="1F1F1F"/>
-                </a:solidFill>
-                <a:latin typeface="Akatab" pitchFamily="34" charset="0"/>
-                <a:ea typeface="Akatab" pitchFamily="34" charset="-122"/>
-                <a:cs typeface="Akatab" pitchFamily="34" charset="-120"/>
-              </a:rPr>
-              <a:t>✓ Useful for CTO roles that require range, not just one vertical</a:t>
-            </a:r>
-            <a:endParaRPr lang="en-US" sz="1140" dirty="0"/>
-          </a:p>
-        </p:txBody>
-      </p:sp>
-      <p:sp>
-        <p:nvSpPr>
-          <p:cNvPr id="18" name="Shape 16"/>
-          <p:cNvSpPr/>
-          <p:nvPr/>
-        </p:nvSpPr>
-        <p:spPr>
-          <a:xfrm>
-            <a:off x="822960" y="4407408"/>
-            <a:ext cx="10561320" cy="914400"/>
-          </a:xfrm>
-          <a:prstGeom prst="roundRect">
-            <a:avLst>
-              <a:gd name="adj" fmla="val 6000"/>
-            </a:avLst>
-          </a:prstGeom>
-          <a:solidFill>
-            <a:srgbClr val="F6F8FB"/>
-          </a:solidFill>
-          <a:ln w="12700">
-            <a:solidFill>
-              <a:srgbClr val="D8DCE4"/>
-            </a:solidFill>
-            <a:prstDash val="solid"/>
-          </a:ln>
-        </p:spPr>
-        <p:txBody>
-          <a:bodyPr/>
-          <a:lstStyle/>
-          <a:p>
-            <a:endParaRPr lang="en-US"/>
-          </a:p>
-        </p:txBody>
-      </p:sp>
-      <p:sp>
-        <p:nvSpPr>
-          <p:cNvPr id="19" name="Text 17"/>
-          <p:cNvSpPr/>
-          <p:nvPr/>
-        </p:nvSpPr>
-        <p:spPr>
-          <a:xfrm>
-            <a:off x="1024128" y="4590288"/>
-            <a:ext cx="1828800" cy="201168"/>
-          </a:xfrm>
-          <a:prstGeom prst="rect">
-            <a:avLst/>
-          </a:prstGeom>
-          <a:noFill/>
-          <a:ln/>
-        </p:spPr>
-        <p:txBody>
-          <a:bodyPr wrap="square" lIns="0" tIns="0" rIns="0" bIns="0" rtlCol="0" anchor="ctr"/>
-          <a:lstStyle/>
-          <a:p>
-            <a:pPr marL="0" indent="0">
-              <a:buNone/>
-            </a:pPr>
-            <a:r>
-              <a:rPr lang="en-US" sz="1280" b="1" dirty="0">
-                <a:solidFill>
-                  <a:srgbClr val="1F1F1F"/>
-                </a:solidFill>
-                <a:latin typeface="Akatab" pitchFamily="34" charset="0"/>
-                <a:ea typeface="Akatab" pitchFamily="34" charset="-122"/>
-                <a:cs typeface="Akatab" pitchFamily="34" charset="-120"/>
-              </a:rPr>
-              <a:t>Qualifications snapshot</a:t>
-            </a:r>
-            <a:endParaRPr lang="en-US" sz="1280" dirty="0"/>
-          </a:p>
-        </p:txBody>
-      </p:sp>
-      <p:sp>
-        <p:nvSpPr>
-          <p:cNvPr id="20" name="Text 18"/>
-          <p:cNvSpPr/>
-          <p:nvPr/>
-        </p:nvSpPr>
-        <p:spPr>
-          <a:xfrm>
-            <a:off x="2880360" y="4572000"/>
-            <a:ext cx="8092440" cy="219456"/>
-          </a:xfrm>
-          <a:prstGeom prst="rect">
-            <a:avLst/>
-          </a:prstGeom>
-          <a:noFill/>
-          <a:ln/>
-        </p:spPr>
-        <p:txBody>
-          <a:bodyPr wrap="square" lIns="0" tIns="0" rIns="0" bIns="0" rtlCol="0" anchor="ctr"/>
-          <a:lstStyle/>
-          <a:p>
-            <a:pPr marL="0" indent="0">
-              <a:buNone/>
-            </a:pPr>
-            <a:r>
-              <a:rPr lang="en-US" sz="1220" dirty="0">
-                <a:solidFill>
-                  <a:srgbClr val="5F6875"/>
-                </a:solidFill>
-                <a:latin typeface="Akatab" pitchFamily="34" charset="0"/>
-                <a:ea typeface="Akatab" pitchFamily="34" charset="-122"/>
-                <a:cs typeface="Akatab" pitchFamily="34" charset="-120"/>
-              </a:rPr>
-              <a:t>B.S. Computer Science • Lebanese American University • Arabic / English / French • Remote and cross-border delivery experience</a:t>
-            </a:r>
-            <a:endParaRPr lang="en-US" sz="1220" dirty="0"/>
-          </a:p>
-        </p:txBody>
-      </p:sp>
-    </p:spTree>
   </p:cSld>
   <p:clrMapOvr>
     <a:masterClrMapping/>
@@ -15174,7 +16363,7 @@
     </a:clrScheme>
     <a:fontScheme name="Office">
       <a:majorFont>
-        <a:latin typeface="Aptos Display" panose="02110004020202020204"/>
+        <a:latin typeface="Aptos Display"/>
         <a:ea typeface=""/>
         <a:cs typeface=""/>
         <a:font script="Jpan" typeface="游ゴシック Light"/>
@@ -15226,7 +16415,7 @@
         <a:font script="Tfng" typeface="Ebrima"/>
       </a:majorFont>
       <a:minorFont>
-        <a:latin typeface="Aptos" panose="02110004020202020204"/>
+        <a:latin typeface="Aptos"/>
         <a:ea typeface=""/>
         <a:cs typeface=""/>
         <a:font script="Jpan" typeface="游ゴシック"/>
